--- a/docs/private-beta/hosted-ux-qa/supreme-privacy/Supreme-Privacy-Board.pptx
+++ b/docs/private-beta/hosted-ux-qa/supreme-privacy/Supreme-Privacy-Board.pptx
@@ -1,6 +1,9 @@
 
 <file path=ppt/presentation.xml><?xml version="1.0" encoding="utf-8"?>
 <p:presentation xmlns:a="http://schemas.openxmlformats.org/drawingml/2006/main" xmlns:r="http://schemas.openxmlformats.org/officeDocument/2006/relationships" xmlns:p="http://schemas.openxmlformats.org/presentationml/2006/main">
+  <p:sldMasterIdLst>
+    <p:sldMasterId id="2147483648" r:id="rId13"/>
+  </p:sldMasterIdLst>
   <p:sldIdLst>
     <p:sldId id="256" r:id="rId1"/>
     <p:sldId id="257" r:id="rId2"/>
@@ -20,6 +23,99 @@
 </p:presentation>
 </file>
 
+<file path=ppt/slideLayouts/slideLayout1.xml><?xml version="1.0" encoding="utf-8"?>
+<p:sldLayout xmlns:a="http://schemas.openxmlformats.org/drawingml/2006/main" xmlns:r="http://schemas.openxmlformats.org/officeDocument/2006/relationships" xmlns:p="http://schemas.openxmlformats.org/presentationml/2006/main" type="blank" preserve="1">
+  <p:cSld name="Blank">
+    <p:spTree>
+      <p:nvGrpSpPr>
+        <p:cNvPr id="1" name=""/>
+        <p:cNvGrpSpPr/>
+        <p:nvPr/>
+      </p:nvGrpSpPr>
+      <p:grpSpPr>
+        <a:xfrm>
+          <a:off x="0" y="0"/>
+          <a:ext cx="0" cy="0"/>
+          <a:chOff x="0" y="0"/>
+          <a:chExt cx="0" cy="0"/>
+        </a:xfrm>
+      </p:grpSpPr>
+    </p:spTree>
+  </p:cSld>
+  <p:clrMapOvr>
+    <a:masterClrMapping/>
+  </p:clrMapOvr>
+</p:sldLayout>
+</file>
+
+<file path=ppt/slideMasters/slideMaster1.xml><?xml version="1.0" encoding="utf-8"?>
+<p:sldMaster xmlns:a="http://schemas.openxmlformats.org/drawingml/2006/main" xmlns:r="http://schemas.openxmlformats.org/officeDocument/2006/relationships" xmlns:p="http://schemas.openxmlformats.org/presentationml/2006/main">
+  <p:cSld>
+    <p:bg>
+      <p:bgPr>
+        <a:solidFill>
+          <a:srgbClr val="FFFFFF"/>
+        </a:solidFill>
+        <a:effectLst/>
+      </p:bgPr>
+    </p:bg>
+    <p:spTree>
+      <p:nvGrpSpPr>
+        <p:cNvPr id="1" name=""/>
+        <p:cNvGrpSpPr/>
+        <p:nvPr/>
+      </p:nvGrpSpPr>
+      <p:grpSpPr>
+        <a:xfrm>
+          <a:off x="0" y="0"/>
+          <a:ext cx="0" cy="0"/>
+          <a:chOff x="0" y="0"/>
+          <a:chExt cx="0" cy="0"/>
+        </a:xfrm>
+      </p:grpSpPr>
+    </p:spTree>
+  </p:cSld>
+  <p:clrMap bg1="lt1" tx1="dk1" bg2="lt2" tx2="dk2" accent1="accent1" accent2="accent2" accent3="accent3" accent4="accent4" accent5="accent5" accent6="accent6" hlink="hlink" folHlink="folHlink"/>
+  <p:sldLayoutIdLst>
+    <p:sldLayoutId id="2147483649" r:id="rId1"/>
+  </p:sldLayoutIdLst>
+  <p:txStyles>
+    <p:titleStyle>
+      <p:lvl1pPr algn="l" defTabSz="914400" rtl="0" eaLnBrk="1" latinLnBrk="0" hangingPunct="1">
+        <p:spcBef>
+          <a:spcPct val="0"/>
+        </p:spcBef>
+        <p:buFont typeface="Arial"/>
+        <p:buNone/>
+        <a:defRPr sz="4400" kern="1200">
+          <a:solidFill>
+            <a:schemeClr val="tx1"/>
+          </a:solidFill>
+          <a:latin typeface="Calibri"/>
+          <a:ea typeface=""/>
+          <a:cs typeface=""/>
+        </a:defRPr>
+      </p:lvl1pPr>
+    </p:titleStyle>
+    <p:bodyStyle>
+      <p:lvl1pPr algn="l" defTabSz="914400" rtl="0" eaLnBrk="1" latinLnBrk="0" hangingPunct="1">
+        <a:defRPr sz="1800" kern="1200">
+          <a:solidFill>
+            <a:schemeClr val="tx1"/>
+          </a:solidFill>
+          <a:latin typeface="Calibri"/>
+        </a:defRPr>
+      </p:lvl1pPr>
+    </p:bodyStyle>
+    <p:otherStyle>
+      <p:defPPr>
+        <a:defRPr lang="en-US"/>
+      </p:defPPr>
+    </p:otherStyle>
+  </p:txStyles>
+</p:sldMaster>
+</file>
+
 <file path=ppt/slides/slide1.xml><?xml version="1.0" encoding="utf-8"?>
 <p:sld xmlns:a="http://schemas.openxmlformats.org/drawingml/2006/main" xmlns:r="http://schemas.openxmlformats.org/officeDocument/2006/relationships" xmlns:p="http://schemas.openxmlformats.org/presentationml/2006/main">
   <p:cSld>
@@ -49,7 +145,9 @@
             <a:ext cx="12192000" cy="6858000"/>
           </a:xfrm>
           <a:prstGeom prst="roundRect">
-            <a:avLst/>
+            <a:avLst>
+              <a:gd name="adj" fmla="val 6000"/>
+            </a:avLst>
           </a:prstGeom>
           <a:solidFill>
             <a:srgbClr val="0F172A"/>
@@ -78,7 +176,9 @@
             <a:ext cx="1800000" cy="70000"/>
           </a:xfrm>
           <a:prstGeom prst="roundRect">
-            <a:avLst/>
+            <a:avLst>
+              <a:gd name="adj" fmla="val 6000"/>
+            </a:avLst>
           </a:prstGeom>
           <a:solidFill>
             <a:srgbClr val="C5A46E"/>
@@ -112,7 +212,7 @@
           <a:noFill/>
         </p:spPr>
         <p:txBody>
-          <a:bodyPr wrap="square" anchor="t"/>
+          <a:bodyPr wrap="square" anchor="t" lIns="45720" tIns="22860" rIns="45720" bIns="22860"/>
           <a:lstStyle/>
           <a:p>
             <a:pPr algn="l"/>
@@ -121,8 +221,9 @@
                 <a:solidFill>
                   <a:srgbClr val="C5A46E"/>
                 </a:solidFill>
-              </a:rPr>
-              <a:t>SUPREME PRIVACY</a:t>
+                <a:latin typeface="Calibri" pitchFamily="34" charset="0"/>
+              </a:rPr>
+              <a:t xml:space="preserve">SUPREME PRIVACY</a:t>
             </a:r>
           </a:p>
         </p:txBody>
@@ -144,7 +245,7 @@
           <a:noFill/>
         </p:spPr>
         <p:txBody>
-          <a:bodyPr wrap="square" anchor="t"/>
+          <a:bodyPr wrap="square" anchor="t" lIns="45720" tIns="22860" rIns="45720" bIns="22860"/>
           <a:lstStyle/>
           <a:p>
             <a:pPr algn="l"/>
@@ -153,8 +254,9 @@
                 <a:solidFill>
                   <a:srgbClr val="FFFFFF"/>
                 </a:solidFill>
-              </a:rPr>
-              <a:t>Board Risk Committee report</a:t>
+                <a:latin typeface="Calibri" pitchFamily="34" charset="0"/>
+              </a:rPr>
+              <a:t xml:space="preserve">Board Risk Committee report</a:t>
             </a:r>
           </a:p>
         </p:txBody>
@@ -176,7 +278,7 @@
           <a:noFill/>
         </p:spPr>
         <p:txBody>
-          <a:bodyPr wrap="square" anchor="t"/>
+          <a:bodyPr wrap="square" anchor="t" lIns="45720" tIns="22860" rIns="45720" bIns="22860"/>
           <a:lstStyle/>
           <a:p>
             <a:pPr algn="l"/>
@@ -185,8 +287,9 @@
                 <a:solidFill>
                   <a:srgbClr val="E2E8F0"/>
                 </a:solidFill>
-              </a:rPr>
-              <a:t>Elite Claims</a:t>
+                <a:latin typeface="Calibri" pitchFamily="34" charset="0"/>
+              </a:rPr>
+              <a:t xml:space="preserve">Elite Claims</a:t>
             </a:r>
           </a:p>
         </p:txBody>
@@ -208,7 +311,7 @@
           <a:noFill/>
         </p:spPr>
         <p:txBody>
-          <a:bodyPr wrap="square" anchor="t"/>
+          <a:bodyPr wrap="square" anchor="t" lIns="45720" tIns="22860" rIns="45720" bIns="22860"/>
           <a:lstStyle/>
           <a:p>
             <a:pPr algn="l"/>
@@ -217,8 +320,9 @@
                 <a:solidFill>
                   <a:srgbClr val="94A3B8"/>
                 </a:solidFill>
-              </a:rPr>
-              <a:t>2026-09-13  ·  Live tenant records only  ·  No trend available</a:t>
+                <a:latin typeface="Calibri" pitchFamily="34" charset="0"/>
+              </a:rPr>
+              <a:t xml:space="preserve">2026-09-13 · Live tenant records only · No trend available</a:t>
             </a:r>
           </a:p>
         </p:txBody>
@@ -240,7 +344,7 @@
           <a:noFill/>
         </p:spPr>
         <p:txBody>
-          <a:bodyPr wrap="square" anchor="t"/>
+          <a:bodyPr wrap="square" anchor="t" lIns="45720" tIns="22860" rIns="45720" bIns="22860"/>
           <a:lstStyle/>
           <a:p>
             <a:pPr algn="l"/>
@@ -249,8 +353,9 @@
                 <a:solidFill>
                   <a:srgbClr val="CBD5E1"/>
                 </a:solidFill>
-              </a:rPr>
-              <a:t>Prepared for CPO, DPO, General Counsel, CISO, CRO, and the Board Risk Committee.</a:t>
+                <a:latin typeface="Calibri" pitchFamily="34" charset="0"/>
+              </a:rPr>
+              <a:t xml:space="preserve">Prepared for CPO, DPO, General Counsel, CISO, CRO, and the Board Risk Committee.</a:t>
             </a:r>
           </a:p>
         </p:txBody>
@@ -264,25 +369,26 @@
         <p:spPr>
           <a:xfrm>
             <a:off x="420000" y="5880000"/>
-            <a:ext cx="11000000" cy="600000"/>
-          </a:xfrm>
-          <a:prstGeom prst="rect">
-            <a:avLst/>
-          </a:prstGeom>
-          <a:noFill/>
-        </p:spPr>
-        <p:txBody>
-          <a:bodyPr wrap="square" anchor="t"/>
+            <a:ext cx="11000000" cy="420000"/>
+          </a:xfrm>
+          <a:prstGeom prst="rect">
+            <a:avLst/>
+          </a:prstGeom>
+          <a:noFill/>
+        </p:spPr>
+        <p:txBody>
+          <a:bodyPr wrap="square" anchor="t" lIns="45720" tIns="22860" rIns="45720" bIns="22860"/>
           <a:lstStyle/>
           <a:p>
             <a:pPr algn="l"/>
             <a:r>
-              <a:rPr lang="en-US" sz="1000" b="0" dirty="0">
+              <a:rPr lang="en-US" sz="1100" b="0" dirty="0">
                 <a:solidFill>
                   <a:srgbClr val="94A3B8"/>
                 </a:solidFill>
-              </a:rPr>
-              <a:t>A recorded legal basis is not a finding that processing is lawful. A DPIA is not a claim that GDPR is satisfied. A configured deadline is not legal advice. A closed deletion task is not proof the data is gone. Consent co</a:t>
+                <a:latin typeface="Calibri" pitchFamily="34" charset="0"/>
+              </a:rPr>
+              <a:t xml:space="preserve">Recorded operations are not a finding that processing is lawful. Not legal advice.</a:t>
             </a:r>
           </a:p>
         </p:txBody>
@@ -324,7 +430,9 @@
             <a:ext cx="12192000" cy="1180000"/>
           </a:xfrm>
           <a:prstGeom prst="roundRect">
-            <a:avLst/>
+            <a:avLst>
+              <a:gd name="adj" fmla="val 6000"/>
+            </a:avLst>
           </a:prstGeom>
           <a:solidFill>
             <a:srgbClr val="0F172A"/>
@@ -353,7 +461,9 @@
             <a:ext cx="12192000" cy="50000"/>
           </a:xfrm>
           <a:prstGeom prst="roundRect">
-            <a:avLst/>
+            <a:avLst>
+              <a:gd name="adj" fmla="val 6000"/>
+            </a:avLst>
           </a:prstGeom>
           <a:solidFill>
             <a:srgbClr val="C5A46E"/>
@@ -387,7 +497,7 @@
           <a:noFill/>
         </p:spPr>
         <p:txBody>
-          <a:bodyPr wrap="square" anchor="t"/>
+          <a:bodyPr wrap="square" anchor="t" lIns="45720" tIns="22860" rIns="45720" bIns="22860"/>
           <a:lstStyle/>
           <a:p>
             <a:pPr algn="l"/>
@@ -396,8 +506,9 @@
                 <a:solidFill>
                   <a:srgbClr val="FFFFFF"/>
                 </a:solidFill>
-              </a:rPr>
-              <a:t>Evidence / control health</a:t>
+                <a:latin typeface="Calibri" pitchFamily="34" charset="0"/>
+              </a:rPr>
+              <a:t xml:space="preserve">Evidence / control health</a:t>
             </a:r>
           </a:p>
         </p:txBody>
@@ -419,7 +530,7 @@
           <a:noFill/>
         </p:spPr>
         <p:txBody>
-          <a:bodyPr wrap="square" anchor="t"/>
+          <a:bodyPr wrap="square" anchor="t" lIns="45720" tIns="22860" rIns="45720" bIns="22860"/>
           <a:lstStyle/>
           <a:p>
             <a:pPr algn="l"/>
@@ -428,8 +539,9 @@
                 <a:solidFill>
                   <a:srgbClr val="CBD5E1"/>
                 </a:solidFill>
-              </a:rPr>
-              <a:t>CLEAN presence is not proof. Shared #14 evidence is reused.</a:t>
+                <a:latin typeface="Calibri" pitchFamily="34" charset="0"/>
+              </a:rPr>
+              <a:t xml:space="preserve">CLEAN presence is not proof. Shared #14 evidence is reused.</a:t>
             </a:r>
           </a:p>
         </p:txBody>
@@ -446,7 +558,9 @@
             <a:ext cx="2500000" cy="1280000"/>
           </a:xfrm>
           <a:prstGeom prst="roundRect">
-            <a:avLst/>
+            <a:avLst>
+              <a:gd name="adj" fmla="val 6000"/>
+            </a:avLst>
           </a:prstGeom>
           <a:solidFill>
             <a:srgbClr val="F8FAFC"/>
@@ -474,15 +588,15 @@
         <p:spPr>
           <a:xfrm>
             <a:off x="420000" y="1780000"/>
-            <a:ext cx="2500000" cy="700000"/>
-          </a:xfrm>
-          <a:prstGeom prst="rect">
-            <a:avLst/>
-          </a:prstGeom>
-          <a:noFill/>
-        </p:spPr>
-        <p:txBody>
-          <a:bodyPr wrap="square" anchor="t"/>
+            <a:ext cx="2500000" cy="640000"/>
+          </a:xfrm>
+          <a:prstGeom prst="rect">
+            <a:avLst/>
+          </a:prstGeom>
+          <a:noFill/>
+        </p:spPr>
+        <p:txBody>
+          <a:bodyPr wrap="square" anchor="t" lIns="45720" tIns="22860" rIns="45720" bIns="22860"/>
           <a:lstStyle/>
           <a:p>
             <a:pPr algn="ctr"/>
@@ -491,8 +605,9 @@
                 <a:solidFill>
                   <a:srgbClr val="0F172A"/>
                 </a:solidFill>
-              </a:rPr>
-              <a:t>0</a:t>
+                <a:latin typeface="Calibri" pitchFamily="34" charset="0"/>
+              </a:rPr>
+              <a:t xml:space="preserve">0</a:t>
             </a:r>
           </a:p>
         </p:txBody>
@@ -505,16 +620,16 @@
         </p:nvSpPr>
         <p:spPr>
           <a:xfrm>
-            <a:off x="420000" y="2480000"/>
-            <a:ext cx="2500000" cy="360000"/>
-          </a:xfrm>
-          <a:prstGeom prst="rect">
-            <a:avLst/>
-          </a:prstGeom>
-          <a:noFill/>
-        </p:spPr>
-        <p:txBody>
-          <a:bodyPr wrap="square" anchor="t"/>
+            <a:off x="420000" y="2420000"/>
+            <a:ext cx="2500000" cy="420000"/>
+          </a:xfrm>
+          <a:prstGeom prst="rect">
+            <a:avLst/>
+          </a:prstGeom>
+          <a:noFill/>
+        </p:spPr>
+        <p:txBody>
+          <a:bodyPr wrap="square" anchor="t" lIns="45720" tIns="22860" rIns="45720" bIns="22860"/>
           <a:lstStyle/>
           <a:p>
             <a:pPr algn="ctr"/>
@@ -523,8 +638,9 @@
                 <a:solidFill>
                   <a:srgbClr val="475569"/>
                 </a:solidFill>
-              </a:rPr>
-              <a:t>Evidence refresh</a:t>
+                <a:latin typeface="Calibri" pitchFamily="34" charset="0"/>
+              </a:rPr>
+              <a:t xml:space="preserve">Evidence refresh</a:t>
             </a:r>
           </a:p>
         </p:txBody>
@@ -541,7 +657,9 @@
             <a:ext cx="2500000" cy="1280000"/>
           </a:xfrm>
           <a:prstGeom prst="roundRect">
-            <a:avLst/>
+            <a:avLst>
+              <a:gd name="adj" fmla="val 6000"/>
+            </a:avLst>
           </a:prstGeom>
           <a:solidFill>
             <a:srgbClr val="F8FAFC"/>
@@ -569,15 +687,15 @@
         <p:spPr>
           <a:xfrm>
             <a:off x="3120000" y="1780000"/>
-            <a:ext cx="2500000" cy="700000"/>
-          </a:xfrm>
-          <a:prstGeom prst="rect">
-            <a:avLst/>
-          </a:prstGeom>
-          <a:noFill/>
-        </p:spPr>
-        <p:txBody>
-          <a:bodyPr wrap="square" anchor="t"/>
+            <a:ext cx="2500000" cy="640000"/>
+          </a:xfrm>
+          <a:prstGeom prst="rect">
+            <a:avLst/>
+          </a:prstGeom>
+          <a:noFill/>
+        </p:spPr>
+        <p:txBody>
+          <a:bodyPr wrap="square" anchor="t" lIns="45720" tIns="22860" rIns="45720" bIns="22860"/>
           <a:lstStyle/>
           <a:p>
             <a:pPr algn="ctr"/>
@@ -586,8 +704,9 @@
                 <a:solidFill>
                   <a:srgbClr val="0F172A"/>
                 </a:solidFill>
-              </a:rPr>
-              <a:t>4</a:t>
+                <a:latin typeface="Calibri" pitchFamily="34" charset="0"/>
+              </a:rPr>
+              <a:t xml:space="preserve">4</a:t>
             </a:r>
           </a:p>
         </p:txBody>
@@ -600,16 +719,16 @@
         </p:nvSpPr>
         <p:spPr>
           <a:xfrm>
-            <a:off x="3120000" y="2480000"/>
-            <a:ext cx="2500000" cy="360000"/>
-          </a:xfrm>
-          <a:prstGeom prst="rect">
-            <a:avLst/>
-          </a:prstGeom>
-          <a:noFill/>
-        </p:spPr>
-        <p:txBody>
-          <a:bodyPr wrap="square" anchor="t"/>
+            <a:off x="3120000" y="2420000"/>
+            <a:ext cx="2500000" cy="420000"/>
+          </a:xfrm>
+          <a:prstGeom prst="rect">
+            <a:avLst/>
+          </a:prstGeom>
+          <a:noFill/>
+        </p:spPr>
+        <p:txBody>
+          <a:bodyPr wrap="square" anchor="t" lIns="45720" tIns="22860" rIns="45720" bIns="22860"/>
           <a:lstStyle/>
           <a:p>
             <a:pPr algn="ctr"/>
@@ -618,8 +737,9 @@
                 <a:solidFill>
                   <a:srgbClr val="475569"/>
                 </a:solidFill>
-              </a:rPr>
-              <a:t>Open gaps</a:t>
+                <a:latin typeface="Calibri" pitchFamily="34" charset="0"/>
+              </a:rPr>
+              <a:t xml:space="preserve">Open gaps</a:t>
             </a:r>
           </a:p>
         </p:txBody>
@@ -636,7 +756,9 @@
             <a:ext cx="2500000" cy="1280000"/>
           </a:xfrm>
           <a:prstGeom prst="roundRect">
-            <a:avLst/>
+            <a:avLst>
+              <a:gd name="adj" fmla="val 6000"/>
+            </a:avLst>
           </a:prstGeom>
           <a:solidFill>
             <a:srgbClr val="F8FAFC"/>
@@ -664,15 +786,15 @@
         <p:spPr>
           <a:xfrm>
             <a:off x="5820000" y="1780000"/>
-            <a:ext cx="2500000" cy="700000"/>
-          </a:xfrm>
-          <a:prstGeom prst="rect">
-            <a:avLst/>
-          </a:prstGeom>
-          <a:noFill/>
-        </p:spPr>
-        <p:txBody>
-          <a:bodyPr wrap="square" anchor="t"/>
+            <a:ext cx="2500000" cy="640000"/>
+          </a:xfrm>
+          <a:prstGeom prst="rect">
+            <a:avLst/>
+          </a:prstGeom>
+          <a:noFill/>
+        </p:spPr>
+        <p:txBody>
+          <a:bodyPr wrap="square" anchor="t" lIns="45720" tIns="22860" rIns="45720" bIns="22860"/>
           <a:lstStyle/>
           <a:p>
             <a:pPr algn="ctr"/>
@@ -681,8 +803,9 @@
                 <a:solidFill>
                   <a:srgbClr val="0F172A"/>
                 </a:solidFill>
-              </a:rPr>
-              <a:t>Shared</a:t>
+                <a:latin typeface="Calibri" pitchFamily="34" charset="0"/>
+              </a:rPr>
+              <a:t xml:space="preserve">Shared</a:t>
             </a:r>
           </a:p>
         </p:txBody>
@@ -695,16 +818,16 @@
         </p:nvSpPr>
         <p:spPr>
           <a:xfrm>
-            <a:off x="5820000" y="2480000"/>
-            <a:ext cx="2500000" cy="360000"/>
-          </a:xfrm>
-          <a:prstGeom prst="rect">
-            <a:avLst/>
-          </a:prstGeom>
-          <a:noFill/>
-        </p:spPr>
-        <p:txBody>
-          <a:bodyPr wrap="square" anchor="t"/>
+            <a:off x="5820000" y="2420000"/>
+            <a:ext cx="2500000" cy="420000"/>
+          </a:xfrm>
+          <a:prstGeom prst="rect">
+            <a:avLst/>
+          </a:prstGeom>
+          <a:noFill/>
+        </p:spPr>
+        <p:txBody>
+          <a:bodyPr wrap="square" anchor="t" lIns="45720" tIns="22860" rIns="45720" bIns="22860"/>
           <a:lstStyle/>
           <a:p>
             <a:pPr algn="ctr"/>
@@ -713,8 +836,9 @@
                 <a:solidFill>
                   <a:srgbClr val="475569"/>
                 </a:solidFill>
-              </a:rPr>
-              <a:t>Control plane</a:t>
+                <a:latin typeface="Calibri" pitchFamily="34" charset="0"/>
+              </a:rPr>
+              <a:t xml:space="preserve">Control plane</a:t>
             </a:r>
           </a:p>
         </p:txBody>
@@ -731,7 +855,9 @@
             <a:ext cx="2500000" cy="1280000"/>
           </a:xfrm>
           <a:prstGeom prst="roundRect">
-            <a:avLst/>
+            <a:avLst>
+              <a:gd name="adj" fmla="val 6000"/>
+            </a:avLst>
           </a:prstGeom>
           <a:solidFill>
             <a:srgbClr val="F8FAFC"/>
@@ -759,15 +885,15 @@
         <p:spPr>
           <a:xfrm>
             <a:off x="8520000" y="1780000"/>
-            <a:ext cx="2500000" cy="700000"/>
-          </a:xfrm>
-          <a:prstGeom prst="rect">
-            <a:avLst/>
-          </a:prstGeom>
-          <a:noFill/>
-        </p:spPr>
-        <p:txBody>
-          <a:bodyPr wrap="square" anchor="t"/>
+            <a:ext cx="2500000" cy="640000"/>
+          </a:xfrm>
+          <a:prstGeom prst="rect">
+            <a:avLst/>
+          </a:prstGeom>
+          <a:noFill/>
+        </p:spPr>
+        <p:txBody>
+          <a:bodyPr wrap="square" anchor="t" lIns="45720" tIns="22860" rIns="45720" bIns="22860"/>
           <a:lstStyle/>
           <a:p>
             <a:pPr algn="ctr"/>
@@ -776,8 +902,9 @@
                 <a:solidFill>
                   <a:srgbClr val="0F172A"/>
                 </a:solidFill>
-              </a:rPr>
-              <a:t>Fail-closed</a:t>
+                <a:latin typeface="Calibri" pitchFamily="34" charset="0"/>
+              </a:rPr>
+              <a:t xml:space="preserve">Closed</a:t>
             </a:r>
           </a:p>
         </p:txBody>
@@ -790,16 +917,16 @@
         </p:nvSpPr>
         <p:spPr>
           <a:xfrm>
-            <a:off x="8520000" y="2480000"/>
-            <a:ext cx="2500000" cy="360000"/>
-          </a:xfrm>
-          <a:prstGeom prst="rect">
-            <a:avLst/>
-          </a:prstGeom>
-          <a:noFill/>
-        </p:spPr>
-        <p:txBody>
-          <a:bodyPr wrap="square" anchor="t"/>
+            <a:off x="8520000" y="2420000"/>
+            <a:ext cx="2500000" cy="420000"/>
+          </a:xfrm>
+          <a:prstGeom prst="rect">
+            <a:avLst/>
+          </a:prstGeom>
+          <a:noFill/>
+        </p:spPr>
+        <p:txBody>
+          <a:bodyPr wrap="square" anchor="t" lIns="45720" tIns="22860" rIns="45720" bIns="22860"/>
           <a:lstStyle/>
           <a:p>
             <a:pPr algn="ctr"/>
@@ -808,8 +935,9 @@
                 <a:solidFill>
                   <a:srgbClr val="475569"/>
                 </a:solidFill>
-              </a:rPr>
-              <a:t>Malware policy</a:t>
+                <a:latin typeface="Calibri" pitchFamily="34" charset="0"/>
+              </a:rPr>
+              <a:t xml:space="preserve">Malware fail-closed</a:t>
             </a:r>
           </a:p>
         </p:txBody>
@@ -823,25 +951,26 @@
         <p:spPr>
           <a:xfrm>
             <a:off x="420000" y="3200000"/>
-            <a:ext cx="11000000" cy="360000"/>
-          </a:xfrm>
-          <a:prstGeom prst="rect">
-            <a:avLst/>
-          </a:prstGeom>
-          <a:noFill/>
-        </p:spPr>
-        <p:txBody>
-          <a:bodyPr wrap="square" anchor="t"/>
+            <a:ext cx="11300000" cy="420000"/>
+          </a:xfrm>
+          <a:prstGeom prst="rect">
+            <a:avLst/>
+          </a:prstGeom>
+          <a:noFill/>
+        </p:spPr>
+        <p:txBody>
+          <a:bodyPr wrap="square" anchor="t" lIns="45720" tIns="22860" rIns="45720" bIns="22860"/>
           <a:lstStyle/>
           <a:p>
             <a:pPr algn="l"/>
             <a:r>
-              <a:rPr lang="en-US" sz="1400" b="0" dirty="0">
+              <a:rPr lang="en-US" sz="1300" b="0" dirty="0">
                 <a:solidFill>
                   <a:srgbClr val="0F172A"/>
                 </a:solidFill>
-              </a:rPr>
-              <a:t>GAP-00001  Open privacy-related gap: GAP-00001 500.07 is mapped to controls that are not implemented. A gap is remaining work, not a legal conclusion.</a:t>
+                <a:latin typeface="Calibri" pitchFamily="34" charset="0"/>
+              </a:rPr>
+              <a:t xml:space="preserve">GAP-00001 Open privacy-related gap: GAP-00001 500.07 is mapped to controls that are not implemented. A gap is remaining work, not a legal co</a:t>
             </a:r>
           </a:p>
         </p:txBody>
@@ -854,26 +983,27 @@
         </p:nvSpPr>
         <p:spPr>
           <a:xfrm>
-            <a:off x="420000" y="3580000"/>
-            <a:ext cx="11000000" cy="360000"/>
-          </a:xfrm>
-          <a:prstGeom prst="rect">
-            <a:avLst/>
-          </a:prstGeom>
-          <a:noFill/>
-        </p:spPr>
-        <p:txBody>
-          <a:bodyPr wrap="square" anchor="t"/>
+            <a:off x="420000" y="3660000"/>
+            <a:ext cx="11300000" cy="420000"/>
+          </a:xfrm>
+          <a:prstGeom prst="rect">
+            <a:avLst/>
+          </a:prstGeom>
+          <a:noFill/>
+        </p:spPr>
+        <p:txBody>
+          <a:bodyPr wrap="square" anchor="t" lIns="45720" tIns="22860" rIns="45720" bIns="22860"/>
           <a:lstStyle/>
           <a:p>
             <a:pPr algn="l"/>
             <a:r>
-              <a:rPr lang="en-US" sz="1400" b="0" dirty="0">
+              <a:rPr lang="en-US" sz="1300" b="0" dirty="0">
                 <a:solidFill>
                   <a:srgbClr val="0F172A"/>
                 </a:solidFill>
-              </a:rPr>
-              <a:t>GAP-00003  Open privacy-related gap: GAP-00003 A.15 is mapped to controls that are not implemented. A gap is remaining work, not a legal conclusion.</a:t>
+                <a:latin typeface="Calibri" pitchFamily="34" charset="0"/>
+              </a:rPr>
+              <a:t xml:space="preserve">GAP-00003 Open privacy-related gap: GAP-00003 A.15 is mapped to controls that are not implemented. A gap is remaining work, not a legal conc</a:t>
             </a:r>
           </a:p>
         </p:txBody>
@@ -886,26 +1016,27 @@
         </p:nvSpPr>
         <p:spPr>
           <a:xfrm>
-            <a:off x="420000" y="3960000"/>
-            <a:ext cx="11000000" cy="360000"/>
-          </a:xfrm>
-          <a:prstGeom prst="rect">
-            <a:avLst/>
-          </a:prstGeom>
-          <a:noFill/>
-        </p:spPr>
-        <p:txBody>
-          <a:bodyPr wrap="square" anchor="t"/>
+            <a:off x="420000" y="4120000"/>
+            <a:ext cx="11300000" cy="420000"/>
+          </a:xfrm>
+          <a:prstGeom prst="rect">
+            <a:avLst/>
+          </a:prstGeom>
+          <a:noFill/>
+        </p:spPr>
+        <p:txBody>
+          <a:bodyPr wrap="square" anchor="t" lIns="45720" tIns="22860" rIns="45720" bIns="22860"/>
           <a:lstStyle/>
           <a:p>
             <a:pPr algn="l"/>
             <a:r>
-              <a:rPr lang="en-US" sz="1400" b="0" dirty="0">
+              <a:rPr lang="en-US" sz="1300" b="0" dirty="0">
                 <a:solidFill>
                   <a:srgbClr val="0F172A"/>
                 </a:solidFill>
-              </a:rPr>
-              <a:t>GAP-00002  Open privacy-related gap: GAP-00002 500.07 has no current CLEAN evidence. A gap is remaining work, not a legal conclusion.</a:t>
+                <a:latin typeface="Calibri" pitchFamily="34" charset="0"/>
+              </a:rPr>
+              <a:t xml:space="preserve">GAP-00002 Open privacy-related gap: GAP-00002 500.07 has no current CLEAN evidence. A gap is remaining work, not a legal conclusion.</a:t>
             </a:r>
           </a:p>
         </p:txBody>
@@ -918,58 +1049,27 @@
         </p:nvSpPr>
         <p:spPr>
           <a:xfrm>
-            <a:off x="420000" y="4340000"/>
-            <a:ext cx="11000000" cy="360000"/>
-          </a:xfrm>
-          <a:prstGeom prst="rect">
-            <a:avLst/>
-          </a:prstGeom>
-          <a:noFill/>
-        </p:spPr>
-        <p:txBody>
-          <a:bodyPr wrap="square" anchor="t"/>
+            <a:off x="420000" y="4580000"/>
+            <a:ext cx="11300000" cy="420000"/>
+          </a:xfrm>
+          <a:prstGeom prst="rect">
+            <a:avLst/>
+          </a:prstGeom>
+          <a:noFill/>
+        </p:spPr>
+        <p:txBody>
+          <a:bodyPr wrap="square" anchor="t" lIns="45720" tIns="22860" rIns="45720" bIns="22860"/>
           <a:lstStyle/>
           <a:p>
             <a:pPr algn="l"/>
             <a:r>
-              <a:rPr lang="en-US" sz="1400" b="0" dirty="0">
+              <a:rPr lang="en-US" sz="1300" b="0" dirty="0">
                 <a:solidFill>
                   <a:srgbClr val="0F172A"/>
                 </a:solidFill>
-              </a:rPr>
-              <a:t>GAP-00004  Open privacy-related gap: GAP-00004 A.15 has no current CLEAN evidence. A gap is remaining work, not a legal conclusion.</a:t>
-            </a:r>
-          </a:p>
-        </p:txBody>
-      </p:sp>
-      <p:sp>
-        <p:nvSpPr>
-          <p:cNvPr id="90" name="t90"/>
-          <p:cNvSpPr txBox="1"/>
-          <p:nvPr/>
-        </p:nvSpPr>
-        <p:spPr>
-          <a:xfrm>
-            <a:off x="420000" y="5800000"/>
-            <a:ext cx="11000000" cy="300000"/>
-          </a:xfrm>
-          <a:prstGeom prst="rect">
-            <a:avLst/>
-          </a:prstGeom>
-          <a:noFill/>
-        </p:spPr>
-        <p:txBody>
-          <a:bodyPr wrap="square" anchor="t"/>
-          <a:lstStyle/>
-          <a:p>
-            <a:pPr algn="l"/>
-            <a:r>
-              <a:rPr lang="en-US" sz="1200" b="0" dirty="0">
-                <a:solidFill>
-                  <a:srgbClr val="64748B"/>
-                </a:solidFill>
-              </a:rPr>
-              <a:t/>
+                <a:latin typeface="Calibri" pitchFamily="34" charset="0"/>
+              </a:rPr>
+              <a:t xml:space="preserve">GAP-00004 Open privacy-related gap: GAP-00004 A.15 has no current CLEAN evidence. A gap is remaining work, not a legal conclusion.</a:t>
             </a:r>
           </a:p>
         </p:txBody>
@@ -986,7 +1086,9 @@
             <a:ext cx="12192000" cy="340000"/>
           </a:xfrm>
           <a:prstGeom prst="roundRect">
-            <a:avLst/>
+            <a:avLst>
+              <a:gd name="adj" fmla="val 6000"/>
+            </a:avLst>
           </a:prstGeom>
           <a:solidFill>
             <a:srgbClr val="F1F5F9"/>
@@ -1020,7 +1122,7 @@
           <a:noFill/>
         </p:spPr>
         <p:txBody>
-          <a:bodyPr wrap="square" anchor="t"/>
+          <a:bodyPr wrap="square" anchor="t" lIns="45720" tIns="22860" rIns="45720" bIns="22860"/>
           <a:lstStyle/>
           <a:p>
             <a:pPr algn="l"/>
@@ -1029,8 +1131,9 @@
                 <a:solidFill>
                   <a:srgbClr val="64748B"/>
                 </a:solidFill>
-              </a:rPr>
-              <a:t>Supreme Privacy Board Report  ·  Confidential  ·  Not legal advice</a:t>
+                <a:latin typeface="Calibri" pitchFamily="34" charset="0"/>
+              </a:rPr>
+              <a:t xml:space="preserve">Supreme Privacy Board Report · Confidential · Not legal advice</a:t>
             </a:r>
           </a:p>
         </p:txBody>
@@ -1052,7 +1155,7 @@
           <a:noFill/>
         </p:spPr>
         <p:txBody>
-          <a:bodyPr wrap="square" anchor="t"/>
+          <a:bodyPr wrap="square" anchor="t" lIns="45720" tIns="22860" rIns="45720" bIns="22860"/>
           <a:lstStyle/>
           <a:p>
             <a:pPr algn="r"/>
@@ -1061,8 +1164,9 @@
                 <a:solidFill>
                   <a:srgbClr val="64748B"/>
                 </a:solidFill>
-              </a:rPr>
-              <a:t>10 / 12</a:t>
+                <a:latin typeface="Calibri" pitchFamily="34" charset="0"/>
+              </a:rPr>
+              <a:t xml:space="preserve">10 / 12</a:t>
             </a:r>
           </a:p>
         </p:txBody>
@@ -1104,7 +1208,9 @@
             <a:ext cx="12192000" cy="1180000"/>
           </a:xfrm>
           <a:prstGeom prst="roundRect">
-            <a:avLst/>
+            <a:avLst>
+              <a:gd name="adj" fmla="val 6000"/>
+            </a:avLst>
           </a:prstGeom>
           <a:solidFill>
             <a:srgbClr val="0F172A"/>
@@ -1133,7 +1239,9 @@
             <a:ext cx="12192000" cy="50000"/>
           </a:xfrm>
           <a:prstGeom prst="roundRect">
-            <a:avLst/>
+            <a:avLst>
+              <a:gd name="adj" fmla="val 6000"/>
+            </a:avLst>
           </a:prstGeom>
           <a:solidFill>
             <a:srgbClr val="C5A46E"/>
@@ -1167,7 +1275,7 @@
           <a:noFill/>
         </p:spPr>
         <p:txBody>
-          <a:bodyPr wrap="square" anchor="t"/>
+          <a:bodyPr wrap="square" anchor="t" lIns="45720" tIns="22860" rIns="45720" bIns="22860"/>
           <a:lstStyle/>
           <a:p>
             <a:pPr algn="l"/>
@@ -1176,8 +1284,9 @@
                 <a:solidFill>
                   <a:srgbClr val="FFFFFF"/>
                 </a:solidFill>
-              </a:rPr>
-              <a:t>Key decisions required</a:t>
+                <a:latin typeface="Calibri" pitchFamily="34" charset="0"/>
+              </a:rPr>
+              <a:t xml:space="preserve">Key decisions required</a:t>
             </a:r>
           </a:p>
         </p:txBody>
@@ -1199,7 +1308,7 @@
           <a:noFill/>
         </p:spPr>
         <p:txBody>
-          <a:bodyPr wrap="square" anchor="t"/>
+          <a:bodyPr wrap="square" anchor="t" lIns="45720" tIns="22860" rIns="45720" bIns="22860"/>
           <a:lstStyle/>
           <a:p>
             <a:pPr algn="l"/>
@@ -1208,8 +1317,9 @@
                 <a:solidFill>
                   <a:srgbClr val="CBD5E1"/>
                 </a:solidFill>
-              </a:rPr>
-              <a:t>Human-authoritative. Supreme does not issue legal conclusions.</a:t>
+                <a:latin typeface="Calibri" pitchFamily="34" charset="0"/>
+              </a:rPr>
+              <a:t xml:space="preserve">Human-authoritative. Supreme does not issue legal conclusions.</a:t>
             </a:r>
           </a:p>
         </p:txBody>
@@ -1222,26 +1332,27 @@
         </p:nvSpPr>
         <p:spPr>
           <a:xfrm>
-            <a:off x="420000" y="1600000"/>
-            <a:ext cx="11000000" cy="360000"/>
-          </a:xfrm>
-          <a:prstGeom prst="rect">
-            <a:avLst/>
-          </a:prstGeom>
-          <a:noFill/>
-        </p:spPr>
-        <p:txBody>
-          <a:bodyPr wrap="square" anchor="t"/>
+            <a:off x="420000" y="1680000"/>
+            <a:ext cx="11300000" cy="420000"/>
+          </a:xfrm>
+          <a:prstGeom prst="rect">
+            <a:avLst/>
+          </a:prstGeom>
+          <a:noFill/>
+        </p:spPr>
+        <p:txBody>
+          <a:bodyPr wrap="square" anchor="t" lIns="45720" tIns="22860" rIns="45720" bIns="22860"/>
           <a:lstStyle/>
           <a:p>
             <a:pPr algn="l"/>
             <a:r>
-              <a:rPr lang="en-US" sz="1400" b="0" dirty="0">
+              <a:rPr lang="en-US" sz="1300" b="0" dirty="0">
                 <a:solidFill>
                   <a:srgbClr val="0F172A"/>
                 </a:solidFill>
-              </a:rPr>
-              <a:t>XFR-00001  Transfer requiring review — XFR-00001 US-NY → IE is recorded as review required. This is not a lawfulness finding.</a:t>
+                <a:latin typeface="Calibri" pitchFamily="34" charset="0"/>
+              </a:rPr>
+              <a:t xml:space="preserve">XFR-00001 Transfer requiring review — XFR-00001 US-NY → IE is recorded as review required. This is not a lawfulness finding.</a:t>
             </a:r>
           </a:p>
         </p:txBody>
@@ -1254,26 +1365,27 @@
         </p:nvSpPr>
         <p:spPr>
           <a:xfrm>
-            <a:off x="420000" y="1980000"/>
-            <a:ext cx="11000000" cy="360000"/>
-          </a:xfrm>
-          <a:prstGeom prst="rect">
-            <a:avLst/>
-          </a:prstGeom>
-          <a:noFill/>
-        </p:spPr>
-        <p:txBody>
-          <a:bodyPr wrap="square" anchor="t"/>
+            <a:off x="420000" y="2140000"/>
+            <a:ext cx="11300000" cy="420000"/>
+          </a:xfrm>
+          <a:prstGeom prst="rect">
+            <a:avLst/>
+          </a:prstGeom>
+          <a:noFill/>
+        </p:spPr>
+        <p:txBody>
+          <a:bodyPr wrap="square" anchor="t" lIns="45720" tIns="22860" rIns="45720" bIns="22860"/>
           <a:lstStyle/>
           <a:p>
             <a:pPr algn="l"/>
             <a:r>
-              <a:rPr lang="en-US" sz="1400" b="0" dirty="0">
+              <a:rPr lang="en-US" sz="1300" b="0" dirty="0">
                 <a:solidFill>
                   <a:srgbClr val="0F172A"/>
                 </a:solidFill>
-              </a:rPr>
-              <a:t>XFR-00002  Transfer requiring review — XFR-00002 US-NY → IE is recorded as review required. This is not a lawfulness finding.</a:t>
+                <a:latin typeface="Calibri" pitchFamily="34" charset="0"/>
+              </a:rPr>
+              <a:t xml:space="preserve">XFR-00002 Transfer requiring review — XFR-00002 US-NY → IE is recorded as review required. This is not a lawfulness finding.</a:t>
             </a:r>
           </a:p>
         </p:txBody>
@@ -1286,26 +1398,27 @@
         </p:nvSpPr>
         <p:spPr>
           <a:xfrm>
-            <a:off x="420000" y="2360000"/>
-            <a:ext cx="11000000" cy="360000"/>
-          </a:xfrm>
-          <a:prstGeom prst="rect">
-            <a:avLst/>
-          </a:prstGeom>
-          <a:noFill/>
-        </p:spPr>
-        <p:txBody>
-          <a:bodyPr wrap="square" anchor="t"/>
+            <a:off x="420000" y="2600000"/>
+            <a:ext cx="11300000" cy="420000"/>
+          </a:xfrm>
+          <a:prstGeom prst="rect">
+            <a:avLst/>
+          </a:prstGeom>
+          <a:noFill/>
+        </p:spPr>
+        <p:txBody>
+          <a:bodyPr wrap="square" anchor="t" lIns="45720" tIns="22860" rIns="45720" bIns="22860"/>
           <a:lstStyle/>
           <a:p>
             <a:pPr algn="l"/>
             <a:r>
-              <a:rPr lang="en-US" sz="1400" b="0" dirty="0">
+              <a:rPr lang="en-US" sz="1300" b="0" dirty="0">
                 <a:solidFill>
                   <a:srgbClr val="0F172A"/>
                 </a:solidFill>
-              </a:rPr>
-              <a:t>XFR-00003  Transfer requiring review — XFR-00003 US-NY → IE is recorded as review required. This is not a lawfulness finding.</a:t>
+                <a:latin typeface="Calibri" pitchFamily="34" charset="0"/>
+              </a:rPr>
+              <a:t xml:space="preserve">XFR-00003 Transfer requiring review — XFR-00003 US-NY → IE is recorded as review required. This is not a lawfulness finding.</a:t>
             </a:r>
           </a:p>
         </p:txBody>
@@ -1318,26 +1431,27 @@
         </p:nvSpPr>
         <p:spPr>
           <a:xfrm>
-            <a:off x="420000" y="2740000"/>
-            <a:ext cx="11000000" cy="360000"/>
-          </a:xfrm>
-          <a:prstGeom prst="rect">
-            <a:avLst/>
-          </a:prstGeom>
-          <a:noFill/>
-        </p:spPr>
-        <p:txBody>
-          <a:bodyPr wrap="square" anchor="t"/>
+            <a:off x="420000" y="3060000"/>
+            <a:ext cx="11300000" cy="420000"/>
+          </a:xfrm>
+          <a:prstGeom prst="rect">
+            <a:avLst/>
+          </a:prstGeom>
+          <a:noFill/>
+        </p:spPr>
+        <p:txBody>
+          <a:bodyPr wrap="square" anchor="t" lIns="45720" tIns="22860" rIns="45720" bIns="22860"/>
           <a:lstStyle/>
           <a:p>
             <a:pPr algn="l"/>
             <a:r>
-              <a:rPr lang="en-US" sz="1400" b="0" dirty="0">
+              <a:rPr lang="en-US" sz="1300" b="0" dirty="0">
                 <a:solidFill>
                   <a:srgbClr val="0F172A"/>
                 </a:solidFill>
-              </a:rPr>
-              <a:t>GAP-00001  Open privacy-related gap — GAP-00001 500.07 is mapped to controls that are not implemented. A gap is remaining work, not a legal conclusion.</a:t>
+                <a:latin typeface="Calibri" pitchFamily="34" charset="0"/>
+              </a:rPr>
+              <a:t xml:space="preserve">XFR-00004 Transfer requiring review — XFR-00004 US-NY → IE is recorded as review required. This is not a lawfulness finding.</a:t>
             </a:r>
           </a:p>
         </p:txBody>
@@ -1350,90 +1464,27 @@
         </p:nvSpPr>
         <p:spPr>
           <a:xfrm>
-            <a:off x="420000" y="3120000"/>
-            <a:ext cx="11000000" cy="360000"/>
-          </a:xfrm>
-          <a:prstGeom prst="rect">
-            <a:avLst/>
-          </a:prstGeom>
-          <a:noFill/>
-        </p:spPr>
-        <p:txBody>
-          <a:bodyPr wrap="square" anchor="t"/>
+            <a:off x="420000" y="3520000"/>
+            <a:ext cx="11300000" cy="420000"/>
+          </a:xfrm>
+          <a:prstGeom prst="rect">
+            <a:avLst/>
+          </a:prstGeom>
+          <a:noFill/>
+        </p:spPr>
+        <p:txBody>
+          <a:bodyPr wrap="square" anchor="t" lIns="45720" tIns="22860" rIns="45720" bIns="22860"/>
           <a:lstStyle/>
           <a:p>
             <a:pPr algn="l"/>
             <a:r>
-              <a:rPr lang="en-US" sz="1400" b="0" dirty="0">
+              <a:rPr lang="en-US" sz="1300" b="0" dirty="0">
                 <a:solidFill>
                   <a:srgbClr val="0F172A"/>
                 </a:solidFill>
-              </a:rPr>
-              <a:t>GAP-00003  Open privacy-related gap — GAP-00003 A.15 is mapped to controls that are not implemented. A gap is remaining work, not a legal conclusion.</a:t>
-            </a:r>
-          </a:p>
-        </p:txBody>
-      </p:sp>
-      <p:sp>
-        <p:nvSpPr>
-          <p:cNvPr id="25" name="t25"/>
-          <p:cNvSpPr txBox="1"/>
-          <p:nvPr/>
-        </p:nvSpPr>
-        <p:spPr>
-          <a:xfrm>
-            <a:off x="420000" y="3500000"/>
-            <a:ext cx="11000000" cy="360000"/>
-          </a:xfrm>
-          <a:prstGeom prst="rect">
-            <a:avLst/>
-          </a:prstGeom>
-          <a:noFill/>
-        </p:spPr>
-        <p:txBody>
-          <a:bodyPr wrap="square" anchor="t"/>
-          <a:lstStyle/>
-          <a:p>
-            <a:pPr algn="l"/>
-            <a:r>
-              <a:rPr lang="en-US" sz="1400" b="0" dirty="0">
-                <a:solidFill>
-                  <a:srgbClr val="0F172A"/>
-                </a:solidFill>
-              </a:rPr>
-              <a:t>GAP-00002  Open privacy-related gap — GAP-00002 500.07 has no current CLEAN evidence. A gap is remaining work, not a legal conclusion.</a:t>
-            </a:r>
-          </a:p>
-        </p:txBody>
-      </p:sp>
-      <p:sp>
-        <p:nvSpPr>
-          <p:cNvPr id="26" name="t26"/>
-          <p:cNvSpPr txBox="1"/>
-          <p:nvPr/>
-        </p:nvSpPr>
-        <p:spPr>
-          <a:xfrm>
-            <a:off x="420000" y="3880000"/>
-            <a:ext cx="11000000" cy="360000"/>
-          </a:xfrm>
-          <a:prstGeom prst="rect">
-            <a:avLst/>
-          </a:prstGeom>
-          <a:noFill/>
-        </p:spPr>
-        <p:txBody>
-          <a:bodyPr wrap="square" anchor="t"/>
-          <a:lstStyle/>
-          <a:p>
-            <a:pPr algn="l"/>
-            <a:r>
-              <a:rPr lang="en-US" sz="1400" b="0" dirty="0">
-                <a:solidFill>
-                  <a:srgbClr val="0F172A"/>
-                </a:solidFill>
-              </a:rPr>
-              <a:t>GAP-00004  Open privacy-related gap — GAP-00004 A.15 has no current CLEAN evidence. A gap is remaining work, not a legal conclusion.</a:t>
+                <a:latin typeface="Calibri" pitchFamily="34" charset="0"/>
+              </a:rPr>
+              <a:t xml:space="preserve">GAP-00001 Open privacy-related gap — GAP-00001 500.07 is mapped to controls that are not implemented. A gap is remaining work, not a legal c</a:t>
             </a:r>
           </a:p>
         </p:txBody>
@@ -1450,7 +1501,9 @@
             <a:ext cx="12192000" cy="340000"/>
           </a:xfrm>
           <a:prstGeom prst="roundRect">
-            <a:avLst/>
+            <a:avLst>
+              <a:gd name="adj" fmla="val 6000"/>
+            </a:avLst>
           </a:prstGeom>
           <a:solidFill>
             <a:srgbClr val="F1F5F9"/>
@@ -1484,7 +1537,7 @@
           <a:noFill/>
         </p:spPr>
         <p:txBody>
-          <a:bodyPr wrap="square" anchor="t"/>
+          <a:bodyPr wrap="square" anchor="t" lIns="45720" tIns="22860" rIns="45720" bIns="22860"/>
           <a:lstStyle/>
           <a:p>
             <a:pPr algn="l"/>
@@ -1493,8 +1546,9 @@
                 <a:solidFill>
                   <a:srgbClr val="64748B"/>
                 </a:solidFill>
-              </a:rPr>
-              <a:t>Supreme Privacy Board Report  ·  Confidential  ·  Not legal advice</a:t>
+                <a:latin typeface="Calibri" pitchFamily="34" charset="0"/>
+              </a:rPr>
+              <a:t xml:space="preserve">Supreme Privacy Board Report · Confidential · Not legal advice</a:t>
             </a:r>
           </a:p>
         </p:txBody>
@@ -1516,7 +1570,7 @@
           <a:noFill/>
         </p:spPr>
         <p:txBody>
-          <a:bodyPr wrap="square" anchor="t"/>
+          <a:bodyPr wrap="square" anchor="t" lIns="45720" tIns="22860" rIns="45720" bIns="22860"/>
           <a:lstStyle/>
           <a:p>
             <a:pPr algn="r"/>
@@ -1525,8 +1579,9 @@
                 <a:solidFill>
                   <a:srgbClr val="64748B"/>
                 </a:solidFill>
-              </a:rPr>
-              <a:t>11 / 12</a:t>
+                <a:latin typeface="Calibri" pitchFamily="34" charset="0"/>
+              </a:rPr>
+              <a:t xml:space="preserve">11 / 12</a:t>
             </a:r>
           </a:p>
         </p:txBody>
@@ -1568,7 +1623,9 @@
             <a:ext cx="12192000" cy="1180000"/>
           </a:xfrm>
           <a:prstGeom prst="roundRect">
-            <a:avLst/>
+            <a:avLst>
+              <a:gd name="adj" fmla="val 6000"/>
+            </a:avLst>
           </a:prstGeom>
           <a:solidFill>
             <a:srgbClr val="0F172A"/>
@@ -1597,7 +1654,9 @@
             <a:ext cx="12192000" cy="50000"/>
           </a:xfrm>
           <a:prstGeom prst="roundRect">
-            <a:avLst/>
+            <a:avLst>
+              <a:gd name="adj" fmla="val 6000"/>
+            </a:avLst>
           </a:prstGeom>
           <a:solidFill>
             <a:srgbClr val="C5A46E"/>
@@ -1631,7 +1690,7 @@
           <a:noFill/>
         </p:spPr>
         <p:txBody>
-          <a:bodyPr wrap="square" anchor="t"/>
+          <a:bodyPr wrap="square" anchor="t" lIns="45720" tIns="22860" rIns="45720" bIns="22860"/>
           <a:lstStyle/>
           <a:p>
             <a:pPr algn="l"/>
@@ -1640,8 +1699,9 @@
                 <a:solidFill>
                   <a:srgbClr val="FFFFFF"/>
                 </a:solidFill>
-              </a:rPr>
-              <a:t>Priority actions / next 90 days</a:t>
+                <a:latin typeface="Calibri" pitchFamily="34" charset="0"/>
+              </a:rPr>
+              <a:t xml:space="preserve">Priority actions / next 90 days</a:t>
             </a:r>
           </a:p>
         </p:txBody>
@@ -1663,7 +1723,7 @@
           <a:noFill/>
         </p:spPr>
         <p:txBody>
-          <a:bodyPr wrap="square" anchor="t"/>
+          <a:bodyPr wrap="square" anchor="t" lIns="45720" tIns="22860" rIns="45720" bIns="22860"/>
           <a:lstStyle/>
           <a:p>
             <a:pPr algn="l"/>
@@ -1672,8 +1732,9 @@
                 <a:solidFill>
                   <a:srgbClr val="CBD5E1"/>
                 </a:solidFill>
-              </a:rPr>
-              <a:t>Taken from the live attention queue. No invented program.</a:t>
+                <a:latin typeface="Calibri" pitchFamily="34" charset="0"/>
+              </a:rPr>
+              <a:t xml:space="preserve">Taken from the live attention queue. No invented program.</a:t>
             </a:r>
           </a:p>
         </p:txBody>
@@ -1686,26 +1747,27 @@
         </p:nvSpPr>
         <p:spPr>
           <a:xfrm>
-            <a:off x="420000" y="1600000"/>
-            <a:ext cx="11000000" cy="360000"/>
-          </a:xfrm>
-          <a:prstGeom prst="rect">
-            <a:avLst/>
-          </a:prstGeom>
-          <a:noFill/>
-        </p:spPr>
-        <p:txBody>
-          <a:bodyPr wrap="square" anchor="t"/>
+            <a:off x="420000" y="1680000"/>
+            <a:ext cx="11300000" cy="420000"/>
+          </a:xfrm>
+          <a:prstGeom prst="rect">
+            <a:avLst/>
+          </a:prstGeom>
+          <a:noFill/>
+        </p:spPr>
+        <p:txBody>
+          <a:bodyPr wrap="square" anchor="t" lIns="45720" tIns="22860" rIns="45720" bIns="22860"/>
           <a:lstStyle/>
           <a:p>
             <a:pPr algn="l"/>
             <a:r>
-              <a:rPr lang="en-US" sz="1400" b="0" dirty="0">
+              <a:rPr lang="en-US" sz="1300" b="0" dirty="0">
                 <a:solidFill>
                   <a:srgbClr val="0F172A"/>
                 </a:solidFill>
-              </a:rPr>
-              <a:t>1. Review XFR-00001 — Transfer requiring review</a:t>
+                <a:latin typeface="Calibri" pitchFamily="34" charset="0"/>
+              </a:rPr>
+              <a:t xml:space="preserve">1. Review XFR-00001 — Transfer requiring review</a:t>
             </a:r>
           </a:p>
         </p:txBody>
@@ -1718,26 +1780,27 @@
         </p:nvSpPr>
         <p:spPr>
           <a:xfrm>
-            <a:off x="420000" y="1980000"/>
-            <a:ext cx="11000000" cy="360000"/>
-          </a:xfrm>
-          <a:prstGeom prst="rect">
-            <a:avLst/>
-          </a:prstGeom>
-          <a:noFill/>
-        </p:spPr>
-        <p:txBody>
-          <a:bodyPr wrap="square" anchor="t"/>
+            <a:off x="420000" y="2140000"/>
+            <a:ext cx="11300000" cy="420000"/>
+          </a:xfrm>
+          <a:prstGeom prst="rect">
+            <a:avLst/>
+          </a:prstGeom>
+          <a:noFill/>
+        </p:spPr>
+        <p:txBody>
+          <a:bodyPr wrap="square" anchor="t" lIns="45720" tIns="22860" rIns="45720" bIns="22860"/>
           <a:lstStyle/>
           <a:p>
             <a:pPr algn="l"/>
             <a:r>
-              <a:rPr lang="en-US" sz="1400" b="0" dirty="0">
+              <a:rPr lang="en-US" sz="1300" b="0" dirty="0">
                 <a:solidFill>
                   <a:srgbClr val="0F172A"/>
                 </a:solidFill>
-              </a:rPr>
-              <a:t>2. Review XFR-00002 — Transfer requiring review</a:t>
+                <a:latin typeface="Calibri" pitchFamily="34" charset="0"/>
+              </a:rPr>
+              <a:t xml:space="preserve">2. Review XFR-00002 — Transfer requiring review</a:t>
             </a:r>
           </a:p>
         </p:txBody>
@@ -1750,26 +1813,27 @@
         </p:nvSpPr>
         <p:spPr>
           <a:xfrm>
-            <a:off x="420000" y="2360000"/>
-            <a:ext cx="11000000" cy="360000"/>
-          </a:xfrm>
-          <a:prstGeom prst="rect">
-            <a:avLst/>
-          </a:prstGeom>
-          <a:noFill/>
-        </p:spPr>
-        <p:txBody>
-          <a:bodyPr wrap="square" anchor="t"/>
+            <a:off x="420000" y="2600000"/>
+            <a:ext cx="11300000" cy="420000"/>
+          </a:xfrm>
+          <a:prstGeom prst="rect">
+            <a:avLst/>
+          </a:prstGeom>
+          <a:noFill/>
+        </p:spPr>
+        <p:txBody>
+          <a:bodyPr wrap="square" anchor="t" lIns="45720" tIns="22860" rIns="45720" bIns="22860"/>
           <a:lstStyle/>
           <a:p>
             <a:pPr algn="l"/>
             <a:r>
-              <a:rPr lang="en-US" sz="1400" b="0" dirty="0">
+              <a:rPr lang="en-US" sz="1300" b="0" dirty="0">
                 <a:solidFill>
                   <a:srgbClr val="0F172A"/>
                 </a:solidFill>
-              </a:rPr>
-              <a:t>3. Review XFR-00003 — Transfer requiring review</a:t>
+                <a:latin typeface="Calibri" pitchFamily="34" charset="0"/>
+              </a:rPr>
+              <a:t xml:space="preserve">3. Review XFR-00003 — Transfer requiring review</a:t>
             </a:r>
           </a:p>
         </p:txBody>
@@ -1782,26 +1846,27 @@
         </p:nvSpPr>
         <p:spPr>
           <a:xfrm>
-            <a:off x="420000" y="2740000"/>
-            <a:ext cx="11000000" cy="360000"/>
-          </a:xfrm>
-          <a:prstGeom prst="rect">
-            <a:avLst/>
-          </a:prstGeom>
-          <a:noFill/>
-        </p:spPr>
-        <p:txBody>
-          <a:bodyPr wrap="square" anchor="t"/>
+            <a:off x="420000" y="3060000"/>
+            <a:ext cx="11300000" cy="420000"/>
+          </a:xfrm>
+          <a:prstGeom prst="rect">
+            <a:avLst/>
+          </a:prstGeom>
+          <a:noFill/>
+        </p:spPr>
+        <p:txBody>
+          <a:bodyPr wrap="square" anchor="t" lIns="45720" tIns="22860" rIns="45720" bIns="22860"/>
           <a:lstStyle/>
           <a:p>
             <a:pPr algn="l"/>
             <a:r>
-              <a:rPr lang="en-US" sz="1400" b="0" dirty="0">
+              <a:rPr lang="en-US" sz="1300" b="0" dirty="0">
                 <a:solidFill>
                   <a:srgbClr val="0F172A"/>
                 </a:solidFill>
-              </a:rPr>
-              <a:t>4. Review GAP-00001 — Open privacy-related gap</a:t>
+                <a:latin typeface="Calibri" pitchFamily="34" charset="0"/>
+              </a:rPr>
+              <a:t xml:space="preserve">4. Review XFR-00004 — Transfer requiring review</a:t>
             </a:r>
           </a:p>
         </p:txBody>
@@ -1814,90 +1879,27 @@
         </p:nvSpPr>
         <p:spPr>
           <a:xfrm>
-            <a:off x="420000" y="3120000"/>
-            <a:ext cx="11000000" cy="360000"/>
-          </a:xfrm>
-          <a:prstGeom prst="rect">
-            <a:avLst/>
-          </a:prstGeom>
-          <a:noFill/>
-        </p:spPr>
-        <p:txBody>
-          <a:bodyPr wrap="square" anchor="t"/>
+            <a:off x="420000" y="3520000"/>
+            <a:ext cx="11300000" cy="420000"/>
+          </a:xfrm>
+          <a:prstGeom prst="rect">
+            <a:avLst/>
+          </a:prstGeom>
+          <a:noFill/>
+        </p:spPr>
+        <p:txBody>
+          <a:bodyPr wrap="square" anchor="t" lIns="45720" tIns="22860" rIns="45720" bIns="22860"/>
           <a:lstStyle/>
           <a:p>
             <a:pPr algn="l"/>
             <a:r>
-              <a:rPr lang="en-US" sz="1400" b="0" dirty="0">
+              <a:rPr lang="en-US" sz="1300" b="0" dirty="0">
                 <a:solidFill>
                   <a:srgbClr val="0F172A"/>
                 </a:solidFill>
-              </a:rPr>
-              <a:t>5. Review GAP-00003 — Open privacy-related gap</a:t>
-            </a:r>
-          </a:p>
-        </p:txBody>
-      </p:sp>
-      <p:sp>
-        <p:nvSpPr>
-          <p:cNvPr id="25" name="t25"/>
-          <p:cNvSpPr txBox="1"/>
-          <p:nvPr/>
-        </p:nvSpPr>
-        <p:spPr>
-          <a:xfrm>
-            <a:off x="420000" y="3500000"/>
-            <a:ext cx="11000000" cy="360000"/>
-          </a:xfrm>
-          <a:prstGeom prst="rect">
-            <a:avLst/>
-          </a:prstGeom>
-          <a:noFill/>
-        </p:spPr>
-        <p:txBody>
-          <a:bodyPr wrap="square" anchor="t"/>
-          <a:lstStyle/>
-          <a:p>
-            <a:pPr algn="l"/>
-            <a:r>
-              <a:rPr lang="en-US" sz="1400" b="0" dirty="0">
-                <a:solidFill>
-                  <a:srgbClr val="0F172A"/>
-                </a:solidFill>
-              </a:rPr>
-              <a:t>6. Review GAP-00002 — Open privacy-related gap</a:t>
-            </a:r>
-          </a:p>
-        </p:txBody>
-      </p:sp>
-      <p:sp>
-        <p:nvSpPr>
-          <p:cNvPr id="26" name="t26"/>
-          <p:cNvSpPr txBox="1"/>
-          <p:nvPr/>
-        </p:nvSpPr>
-        <p:spPr>
-          <a:xfrm>
-            <a:off x="420000" y="3880000"/>
-            <a:ext cx="11000000" cy="360000"/>
-          </a:xfrm>
-          <a:prstGeom prst="rect">
-            <a:avLst/>
-          </a:prstGeom>
-          <a:noFill/>
-        </p:spPr>
-        <p:txBody>
-          <a:bodyPr wrap="square" anchor="t"/>
-          <a:lstStyle/>
-          <a:p>
-            <a:pPr algn="l"/>
-            <a:r>
-              <a:rPr lang="en-US" sz="1400" b="0" dirty="0">
-                <a:solidFill>
-                  <a:srgbClr val="0F172A"/>
-                </a:solidFill>
-              </a:rPr>
-              <a:t>7. Review GAP-00004 — Open privacy-related gap</a:t>
+                <a:latin typeface="Calibri" pitchFamily="34" charset="0"/>
+              </a:rPr>
+              <a:t xml:space="preserve">5. Review GAP-00001 — Open privacy-related gap</a:t>
             </a:r>
           </a:p>
         </p:txBody>
@@ -1919,7 +1921,7 @@
           <a:noFill/>
         </p:spPr>
         <p:txBody>
-          <a:bodyPr wrap="square" anchor="t"/>
+          <a:bodyPr wrap="square" anchor="t" lIns="45720" tIns="22860" rIns="45720" bIns="22860"/>
           <a:lstStyle/>
           <a:p>
             <a:pPr algn="l"/>
@@ -1928,8 +1930,9 @@
                 <a:solidFill>
                   <a:srgbClr val="64748B"/>
                 </a:solidFill>
-              </a:rPr>
-              <a:t>Consent collector remains not configured / manual. No trend available.</a:t>
+                <a:latin typeface="Calibri" pitchFamily="34" charset="0"/>
+              </a:rPr>
+              <a:t xml:space="preserve">Consent collector remains not configured / manual. No trend available.</a:t>
             </a:r>
           </a:p>
         </p:txBody>
@@ -1946,7 +1949,9 @@
             <a:ext cx="12192000" cy="340000"/>
           </a:xfrm>
           <a:prstGeom prst="roundRect">
-            <a:avLst/>
+            <a:avLst>
+              <a:gd name="adj" fmla="val 6000"/>
+            </a:avLst>
           </a:prstGeom>
           <a:solidFill>
             <a:srgbClr val="F1F5F9"/>
@@ -1980,7 +1985,7 @@
           <a:noFill/>
         </p:spPr>
         <p:txBody>
-          <a:bodyPr wrap="square" anchor="t"/>
+          <a:bodyPr wrap="square" anchor="t" lIns="45720" tIns="22860" rIns="45720" bIns="22860"/>
           <a:lstStyle/>
           <a:p>
             <a:pPr algn="l"/>
@@ -1989,8 +1994,9 @@
                 <a:solidFill>
                   <a:srgbClr val="64748B"/>
                 </a:solidFill>
-              </a:rPr>
-              <a:t>Supreme Privacy Board Report  ·  Confidential  ·  Not legal advice</a:t>
+                <a:latin typeface="Calibri" pitchFamily="34" charset="0"/>
+              </a:rPr>
+              <a:t xml:space="preserve">Supreme Privacy Board Report · Confidential · Not legal advice</a:t>
             </a:r>
           </a:p>
         </p:txBody>
@@ -2012,7 +2018,7 @@
           <a:noFill/>
         </p:spPr>
         <p:txBody>
-          <a:bodyPr wrap="square" anchor="t"/>
+          <a:bodyPr wrap="square" anchor="t" lIns="45720" tIns="22860" rIns="45720" bIns="22860"/>
           <a:lstStyle/>
           <a:p>
             <a:pPr algn="r"/>
@@ -2021,8 +2027,9 @@
                 <a:solidFill>
                   <a:srgbClr val="64748B"/>
                 </a:solidFill>
-              </a:rPr>
-              <a:t>12 / 12</a:t>
+                <a:latin typeface="Calibri" pitchFamily="34" charset="0"/>
+              </a:rPr>
+              <a:t xml:space="preserve">12 / 12</a:t>
             </a:r>
           </a:p>
         </p:txBody>
@@ -2064,7 +2071,9 @@
             <a:ext cx="12192000" cy="1180000"/>
           </a:xfrm>
           <a:prstGeom prst="roundRect">
-            <a:avLst/>
+            <a:avLst>
+              <a:gd name="adj" fmla="val 6000"/>
+            </a:avLst>
           </a:prstGeom>
           <a:solidFill>
             <a:srgbClr val="0F172A"/>
@@ -2093,7 +2102,9 @@
             <a:ext cx="12192000" cy="50000"/>
           </a:xfrm>
           <a:prstGeom prst="roundRect">
-            <a:avLst/>
+            <a:avLst>
+              <a:gd name="adj" fmla="val 6000"/>
+            </a:avLst>
           </a:prstGeom>
           <a:solidFill>
             <a:srgbClr val="C5A46E"/>
@@ -2127,7 +2138,7 @@
           <a:noFill/>
         </p:spPr>
         <p:txBody>
-          <a:bodyPr wrap="square" anchor="t"/>
+          <a:bodyPr wrap="square" anchor="t" lIns="45720" tIns="22860" rIns="45720" bIns="22860"/>
           <a:lstStyle/>
           <a:p>
             <a:pPr algn="l"/>
@@ -2136,8 +2147,9 @@
                 <a:solidFill>
                   <a:srgbClr val="FFFFFF"/>
                 </a:solidFill>
-              </a:rPr>
-              <a:t>Privacy posture at a glance</a:t>
+                <a:latin typeface="Calibri" pitchFamily="34" charset="0"/>
+              </a:rPr>
+              <a:t xml:space="preserve">Privacy posture at a glance</a:t>
             </a:r>
           </a:p>
         </p:txBody>
@@ -2159,7 +2171,7 @@
           <a:noFill/>
         </p:spPr>
         <p:txBody>
-          <a:bodyPr wrap="square" anchor="t"/>
+          <a:bodyPr wrap="square" anchor="t" lIns="45720" tIns="22860" rIns="45720" bIns="22860"/>
           <a:lstStyle/>
           <a:p>
             <a:pPr algn="l"/>
@@ -2168,8 +2180,9 @@
                 <a:solidFill>
                   <a:srgbClr val="CBD5E1"/>
                 </a:solidFill>
-              </a:rPr>
-              <a:t>Recorded operations, not a finding that processing is lawful.</a:t>
+                <a:latin typeface="Calibri" pitchFamily="34" charset="0"/>
+              </a:rPr>
+              <a:t xml:space="preserve">Recorded operations, not a finding that processing is lawful.</a:t>
             </a:r>
           </a:p>
         </p:txBody>
@@ -2186,7 +2199,9 @@
             <a:ext cx="2500000" cy="1280000"/>
           </a:xfrm>
           <a:prstGeom prst="roundRect">
-            <a:avLst/>
+            <a:avLst>
+              <a:gd name="adj" fmla="val 6000"/>
+            </a:avLst>
           </a:prstGeom>
           <a:solidFill>
             <a:srgbClr val="F8FAFC"/>
@@ -2214,15 +2229,15 @@
         <p:spPr>
           <a:xfrm>
             <a:off x="420000" y="1780000"/>
-            <a:ext cx="2500000" cy="700000"/>
-          </a:xfrm>
-          <a:prstGeom prst="rect">
-            <a:avLst/>
-          </a:prstGeom>
-          <a:noFill/>
-        </p:spPr>
-        <p:txBody>
-          <a:bodyPr wrap="square" anchor="t"/>
+            <a:ext cx="2500000" cy="640000"/>
+          </a:xfrm>
+          <a:prstGeom prst="rect">
+            <a:avLst/>
+          </a:prstGeom>
+          <a:noFill/>
+        </p:spPr>
+        <p:txBody>
+          <a:bodyPr wrap="square" anchor="t" lIns="45720" tIns="22860" rIns="45720" bIns="22860"/>
           <a:lstStyle/>
           <a:p>
             <a:pPr algn="ctr"/>
@@ -2231,8 +2246,9 @@
                 <a:solidFill>
                   <a:srgbClr val="0F172A"/>
                 </a:solidFill>
-              </a:rPr>
-              <a:t>3</a:t>
+                <a:latin typeface="Calibri" pitchFamily="34" charset="0"/>
+              </a:rPr>
+              <a:t xml:space="preserve">4</a:t>
             </a:r>
           </a:p>
         </p:txBody>
@@ -2245,16 +2261,16 @@
         </p:nvSpPr>
         <p:spPr>
           <a:xfrm>
-            <a:off x="420000" y="2480000"/>
-            <a:ext cx="2500000" cy="360000"/>
-          </a:xfrm>
-          <a:prstGeom prst="rect">
-            <a:avLst/>
-          </a:prstGeom>
-          <a:noFill/>
-        </p:spPr>
-        <p:txBody>
-          <a:bodyPr wrap="square" anchor="t"/>
+            <a:off x="420000" y="2420000"/>
+            <a:ext cx="2500000" cy="420000"/>
+          </a:xfrm>
+          <a:prstGeom prst="rect">
+            <a:avLst/>
+          </a:prstGeom>
+          <a:noFill/>
+        </p:spPr>
+        <p:txBody>
+          <a:bodyPr wrap="square" anchor="t" lIns="45720" tIns="22860" rIns="45720" bIns="22860"/>
           <a:lstStyle/>
           <a:p>
             <a:pPr algn="ctr"/>
@@ -2263,8 +2279,9 @@
                 <a:solidFill>
                   <a:srgbClr val="475569"/>
                 </a:solidFill>
-              </a:rPr>
-              <a:t>Active processing</a:t>
+                <a:latin typeface="Calibri" pitchFamily="34" charset="0"/>
+              </a:rPr>
+              <a:t xml:space="preserve">Active processing</a:t>
             </a:r>
           </a:p>
         </p:txBody>
@@ -2281,7 +2298,9 @@
             <a:ext cx="2500000" cy="1280000"/>
           </a:xfrm>
           <a:prstGeom prst="roundRect">
-            <a:avLst/>
+            <a:avLst>
+              <a:gd name="adj" fmla="val 6000"/>
+            </a:avLst>
           </a:prstGeom>
           <a:solidFill>
             <a:srgbClr val="F8FAFC"/>
@@ -2309,15 +2328,15 @@
         <p:spPr>
           <a:xfrm>
             <a:off x="3120000" y="1780000"/>
-            <a:ext cx="2500000" cy="700000"/>
-          </a:xfrm>
-          <a:prstGeom prst="rect">
-            <a:avLst/>
-          </a:prstGeom>
-          <a:noFill/>
-        </p:spPr>
-        <p:txBody>
-          <a:bodyPr wrap="square" anchor="t"/>
+            <a:ext cx="2500000" cy="640000"/>
+          </a:xfrm>
+          <a:prstGeom prst="rect">
+            <a:avLst/>
+          </a:prstGeom>
+          <a:noFill/>
+        </p:spPr>
+        <p:txBody>
+          <a:bodyPr wrap="square" anchor="t" lIns="45720" tIns="22860" rIns="45720" bIns="22860"/>
           <a:lstStyle/>
           <a:p>
             <a:pPr algn="ctr"/>
@@ -2326,8 +2345,9 @@
                 <a:solidFill>
                   <a:srgbClr val="0F172A"/>
                 </a:solidFill>
-              </a:rPr>
-              <a:t>3</a:t>
+                <a:latin typeface="Calibri" pitchFamily="34" charset="0"/>
+              </a:rPr>
+              <a:t xml:space="preserve">4</a:t>
             </a:r>
           </a:p>
         </p:txBody>
@@ -2340,16 +2360,16 @@
         </p:nvSpPr>
         <p:spPr>
           <a:xfrm>
-            <a:off x="3120000" y="2480000"/>
-            <a:ext cx="2500000" cy="360000"/>
-          </a:xfrm>
-          <a:prstGeom prst="rect">
-            <a:avLst/>
-          </a:prstGeom>
-          <a:noFill/>
-        </p:spPr>
-        <p:txBody>
-          <a:bodyPr wrap="square" anchor="t"/>
+            <a:off x="3120000" y="2420000"/>
+            <a:ext cx="2500000" cy="420000"/>
+          </a:xfrm>
+          <a:prstGeom prst="rect">
+            <a:avLst/>
+          </a:prstGeom>
+          <a:noFill/>
+        </p:spPr>
+        <p:txBody>
+          <a:bodyPr wrap="square" anchor="t" lIns="45720" tIns="22860" rIns="45720" bIns="22860"/>
           <a:lstStyle/>
           <a:p>
             <a:pPr algn="ctr"/>
@@ -2358,8 +2378,9 @@
                 <a:solidFill>
                   <a:srgbClr val="475569"/>
                 </a:solidFill>
-              </a:rPr>
-              <a:t>Open rights requests</a:t>
+                <a:latin typeface="Calibri" pitchFamily="34" charset="0"/>
+              </a:rPr>
+              <a:t xml:space="preserve">Open rights requests</a:t>
             </a:r>
           </a:p>
         </p:txBody>
@@ -2376,7 +2397,9 @@
             <a:ext cx="2500000" cy="1280000"/>
           </a:xfrm>
           <a:prstGeom prst="roundRect">
-            <a:avLst/>
+            <a:avLst>
+              <a:gd name="adj" fmla="val 6000"/>
+            </a:avLst>
           </a:prstGeom>
           <a:solidFill>
             <a:srgbClr val="F8FAFC"/>
@@ -2404,15 +2427,15 @@
         <p:spPr>
           <a:xfrm>
             <a:off x="5820000" y="1780000"/>
-            <a:ext cx="2500000" cy="700000"/>
-          </a:xfrm>
-          <a:prstGeom prst="rect">
-            <a:avLst/>
-          </a:prstGeom>
-          <a:noFill/>
-        </p:spPr>
-        <p:txBody>
-          <a:bodyPr wrap="square" anchor="t"/>
+            <a:ext cx="2500000" cy="640000"/>
+          </a:xfrm>
+          <a:prstGeom prst="rect">
+            <a:avLst/>
+          </a:prstGeom>
+          <a:noFill/>
+        </p:spPr>
+        <p:txBody>
+          <a:bodyPr wrap="square" anchor="t" lIns="45720" tIns="22860" rIns="45720" bIns="22860"/>
           <a:lstStyle/>
           <a:p>
             <a:pPr algn="ctr"/>
@@ -2421,8 +2444,9 @@
                 <a:solidFill>
                   <a:srgbClr val="0F172A"/>
                 </a:solidFill>
-              </a:rPr>
-              <a:t>3</a:t>
+                <a:latin typeface="Calibri" pitchFamily="34" charset="0"/>
+              </a:rPr>
+              <a:t xml:space="preserve">4</a:t>
             </a:r>
           </a:p>
         </p:txBody>
@@ -2435,16 +2459,16 @@
         </p:nvSpPr>
         <p:spPr>
           <a:xfrm>
-            <a:off x="5820000" y="2480000"/>
-            <a:ext cx="2500000" cy="360000"/>
-          </a:xfrm>
-          <a:prstGeom prst="rect">
-            <a:avLst/>
-          </a:prstGeom>
-          <a:noFill/>
-        </p:spPr>
-        <p:txBody>
-          <a:bodyPr wrap="square" anchor="t"/>
+            <a:off x="5820000" y="2420000"/>
+            <a:ext cx="2500000" cy="420000"/>
+          </a:xfrm>
+          <a:prstGeom prst="rect">
+            <a:avLst/>
+          </a:prstGeom>
+          <a:noFill/>
+        </p:spPr>
+        <p:txBody>
+          <a:bodyPr wrap="square" anchor="t" lIns="45720" tIns="22860" rIns="45720" bIns="22860"/>
           <a:lstStyle/>
           <a:p>
             <a:pPr algn="ctr"/>
@@ -2453,8 +2477,9 @@
                 <a:solidFill>
                   <a:srgbClr val="475569"/>
                 </a:solidFill>
-              </a:rPr>
-              <a:t>Transfers in review</a:t>
+                <a:latin typeface="Calibri" pitchFamily="34" charset="0"/>
+              </a:rPr>
+              <a:t xml:space="preserve">Transfers in review</a:t>
             </a:r>
           </a:p>
         </p:txBody>
@@ -2471,7 +2496,9 @@
             <a:ext cx="2500000" cy="1280000"/>
           </a:xfrm>
           <a:prstGeom prst="roundRect">
-            <a:avLst/>
+            <a:avLst>
+              <a:gd name="adj" fmla="val 6000"/>
+            </a:avLst>
           </a:prstGeom>
           <a:solidFill>
             <a:srgbClr val="F8FAFC"/>
@@ -2499,15 +2526,15 @@
         <p:spPr>
           <a:xfrm>
             <a:off x="8520000" y="1780000"/>
-            <a:ext cx="2500000" cy="700000"/>
-          </a:xfrm>
-          <a:prstGeom prst="rect">
-            <a:avLst/>
-          </a:prstGeom>
-          <a:noFill/>
-        </p:spPr>
-        <p:txBody>
-          <a:bodyPr wrap="square" anchor="t"/>
+            <a:ext cx="2500000" cy="640000"/>
+          </a:xfrm>
+          <a:prstGeom prst="rect">
+            <a:avLst/>
+          </a:prstGeom>
+          <a:noFill/>
+        </p:spPr>
+        <p:txBody>
+          <a:bodyPr wrap="square" anchor="t" lIns="45720" tIns="22860" rIns="45720" bIns="22860"/>
           <a:lstStyle/>
           <a:p>
             <a:pPr algn="ctr"/>
@@ -2516,8 +2543,9 @@
                 <a:solidFill>
                   <a:srgbClr val="0F172A"/>
                 </a:solidFill>
-              </a:rPr>
-              <a:t>3</a:t>
+                <a:latin typeface="Calibri" pitchFamily="34" charset="0"/>
+              </a:rPr>
+              <a:t xml:space="preserve">4</a:t>
             </a:r>
           </a:p>
         </p:txBody>
@@ -2530,16 +2558,16 @@
         </p:nvSpPr>
         <p:spPr>
           <a:xfrm>
-            <a:off x="8520000" y="2480000"/>
-            <a:ext cx="2500000" cy="360000"/>
-          </a:xfrm>
-          <a:prstGeom prst="rect">
-            <a:avLst/>
-          </a:prstGeom>
-          <a:noFill/>
-        </p:spPr>
-        <p:txBody>
-          <a:bodyPr wrap="square" anchor="t"/>
+            <a:off x="8520000" y="2420000"/>
+            <a:ext cx="2500000" cy="420000"/>
+          </a:xfrm>
+          <a:prstGeom prst="rect">
+            <a:avLst/>
+          </a:prstGeom>
+          <a:noFill/>
+        </p:spPr>
+        <p:txBody>
+          <a:bodyPr wrap="square" anchor="t" lIns="45720" tIns="22860" rIns="45720" bIns="22860"/>
           <a:lstStyle/>
           <a:p>
             <a:pPr algn="ctr"/>
@@ -2548,8 +2576,9 @@
                 <a:solidFill>
                   <a:srgbClr val="475569"/>
                 </a:solidFill>
-              </a:rPr>
-              <a:t>High-risk processing</a:t>
+                <a:latin typeface="Calibri" pitchFamily="34" charset="0"/>
+              </a:rPr>
+              <a:t xml:space="preserve">High-risk processing</a:t>
             </a:r>
           </a:p>
         </p:txBody>
@@ -2571,7 +2600,7 @@
           <a:noFill/>
         </p:spPr>
         <p:txBody>
-          <a:bodyPr wrap="square" anchor="t"/>
+          <a:bodyPr wrap="square" anchor="t" lIns="45720" tIns="22860" rIns="45720" bIns="22860"/>
           <a:lstStyle/>
           <a:p>
             <a:pPr algn="l"/>
@@ -2580,8 +2609,9 @@
                 <a:solidFill>
                   <a:srgbClr val="64748B"/>
                 </a:solidFill>
-              </a:rPr>
-              <a:t>No trend available. Supreme does not invent arrows when history is insufficient.</a:t>
+                <a:latin typeface="Calibri" pitchFamily="34" charset="0"/>
+              </a:rPr>
+              <a:t xml:space="preserve">No trend available. Supreme does not invent arrows when history is insufficient.</a:t>
             </a:r>
           </a:p>
         </p:txBody>
@@ -2603,7 +2633,7 @@
           <a:noFill/>
         </p:spPr>
         <p:txBody>
-          <a:bodyPr wrap="square" anchor="t"/>
+          <a:bodyPr wrap="square" anchor="t" lIns="45720" tIns="22860" rIns="45720" bIns="22860"/>
           <a:lstStyle/>
           <a:p>
             <a:pPr algn="l"/>
@@ -2612,8 +2642,9 @@
                 <a:solidFill>
                   <a:srgbClr val="475569"/>
                 </a:solidFill>
-              </a:rPr>
-              <a:t>Active processing  3</a:t>
+                <a:latin typeface="Calibri" pitchFamily="34" charset="0"/>
+              </a:rPr>
+              <a:t xml:space="preserve">Active processing 4</a:t>
             </a:r>
           </a:p>
         </p:txBody>
@@ -2630,7 +2661,9 @@
             <a:ext cx="5200000" cy="160000"/>
           </a:xfrm>
           <a:prstGeom prst="roundRect">
-            <a:avLst/>
+            <a:avLst>
+              <a:gd name="adj" fmla="val 6000"/>
+            </a:avLst>
           </a:prstGeom>
           <a:solidFill>
             <a:srgbClr val="E2E8F0"/>
@@ -2659,7 +2692,9 @@
             <a:ext cx="5200000" cy="160000"/>
           </a:xfrm>
           <a:prstGeom prst="roundRect">
-            <a:avLst/>
+            <a:avLst>
+              <a:gd name="adj" fmla="val 6000"/>
+            </a:avLst>
           </a:prstGeom>
           <a:solidFill>
             <a:srgbClr val="0F172A"/>
@@ -2693,7 +2728,7 @@
           <a:noFill/>
         </p:spPr>
         <p:txBody>
-          <a:bodyPr wrap="square" anchor="t"/>
+          <a:bodyPr wrap="square" anchor="t" lIns="45720" tIns="22860" rIns="45720" bIns="22860"/>
           <a:lstStyle/>
           <a:p>
             <a:pPr algn="l"/>
@@ -2702,8 +2737,9 @@
                 <a:solidFill>
                   <a:srgbClr val="475569"/>
                 </a:solidFill>
-              </a:rPr>
-              <a:t>Open rights  3</a:t>
+                <a:latin typeface="Calibri" pitchFamily="34" charset="0"/>
+              </a:rPr>
+              <a:t xml:space="preserve">Open rights 4</a:t>
             </a:r>
           </a:p>
         </p:txBody>
@@ -2720,7 +2756,9 @@
             <a:ext cx="5200000" cy="160000"/>
           </a:xfrm>
           <a:prstGeom prst="roundRect">
-            <a:avLst/>
+            <a:avLst>
+              <a:gd name="adj" fmla="val 6000"/>
+            </a:avLst>
           </a:prstGeom>
           <a:solidFill>
             <a:srgbClr val="E2E8F0"/>
@@ -2749,7 +2787,9 @@
             <a:ext cx="5200000" cy="160000"/>
           </a:xfrm>
           <a:prstGeom prst="roundRect">
-            <a:avLst/>
+            <a:avLst>
+              <a:gd name="adj" fmla="val 6000"/>
+            </a:avLst>
           </a:prstGeom>
           <a:solidFill>
             <a:srgbClr val="0F172A"/>
@@ -2783,7 +2823,7 @@
           <a:noFill/>
         </p:spPr>
         <p:txBody>
-          <a:bodyPr wrap="square" anchor="t"/>
+          <a:bodyPr wrap="square" anchor="t" lIns="45720" tIns="22860" rIns="45720" bIns="22860"/>
           <a:lstStyle/>
           <a:p>
             <a:pPr algn="l"/>
@@ -2792,8 +2832,9 @@
                 <a:solidFill>
                   <a:srgbClr val="475569"/>
                 </a:solidFill>
-              </a:rPr>
-              <a:t>Transfers in review  3</a:t>
+                <a:latin typeface="Calibri" pitchFamily="34" charset="0"/>
+              </a:rPr>
+              <a:t xml:space="preserve">Transfers in review 4</a:t>
             </a:r>
           </a:p>
         </p:txBody>
@@ -2810,7 +2851,9 @@
             <a:ext cx="5200000" cy="160000"/>
           </a:xfrm>
           <a:prstGeom prst="roundRect">
-            <a:avLst/>
+            <a:avLst>
+              <a:gd name="adj" fmla="val 6000"/>
+            </a:avLst>
           </a:prstGeom>
           <a:solidFill>
             <a:srgbClr val="E2E8F0"/>
@@ -2839,7 +2882,9 @@
             <a:ext cx="5200000" cy="160000"/>
           </a:xfrm>
           <a:prstGeom prst="roundRect">
-            <a:avLst/>
+            <a:avLst>
+              <a:gd name="adj" fmla="val 6000"/>
+            </a:avLst>
           </a:prstGeom>
           <a:solidFill>
             <a:srgbClr val="0F172A"/>
@@ -2873,7 +2918,7 @@
           <a:noFill/>
         </p:spPr>
         <p:txBody>
-          <a:bodyPr wrap="square" anchor="t"/>
+          <a:bodyPr wrap="square" anchor="t" lIns="45720" tIns="22860" rIns="45720" bIns="22860"/>
           <a:lstStyle/>
           <a:p>
             <a:pPr algn="l"/>
@@ -2882,8 +2927,9 @@
                 <a:solidFill>
                   <a:srgbClr val="475569"/>
                 </a:solidFill>
-              </a:rPr>
-              <a:t>High-risk processing  3</a:t>
+                <a:latin typeface="Calibri" pitchFamily="34" charset="0"/>
+              </a:rPr>
+              <a:t xml:space="preserve">High-risk processing 4</a:t>
             </a:r>
           </a:p>
         </p:txBody>
@@ -2900,7 +2946,9 @@
             <a:ext cx="5200000" cy="160000"/>
           </a:xfrm>
           <a:prstGeom prst="roundRect">
-            <a:avLst/>
+            <a:avLst>
+              <a:gd name="adj" fmla="val 6000"/>
+            </a:avLst>
           </a:prstGeom>
           <a:solidFill>
             <a:srgbClr val="E2E8F0"/>
@@ -2929,7 +2977,9 @@
             <a:ext cx="5200000" cy="160000"/>
           </a:xfrm>
           <a:prstGeom prst="roundRect">
-            <a:avLst/>
+            <a:avLst>
+              <a:gd name="adj" fmla="val 6000"/>
+            </a:avLst>
           </a:prstGeom>
           <a:solidFill>
             <a:srgbClr val="0F172A"/>
@@ -2958,7 +3008,9 @@
             <a:ext cx="12192000" cy="340000"/>
           </a:xfrm>
           <a:prstGeom prst="roundRect">
-            <a:avLst/>
+            <a:avLst>
+              <a:gd name="adj" fmla="val 6000"/>
+            </a:avLst>
           </a:prstGeom>
           <a:solidFill>
             <a:srgbClr val="F1F5F9"/>
@@ -2992,7 +3044,7 @@
           <a:noFill/>
         </p:spPr>
         <p:txBody>
-          <a:bodyPr wrap="square" anchor="t"/>
+          <a:bodyPr wrap="square" anchor="t" lIns="45720" tIns="22860" rIns="45720" bIns="22860"/>
           <a:lstStyle/>
           <a:p>
             <a:pPr algn="l"/>
@@ -3001,8 +3053,9 @@
                 <a:solidFill>
                   <a:srgbClr val="64748B"/>
                 </a:solidFill>
-              </a:rPr>
-              <a:t>Supreme Privacy Board Report  ·  Confidential  ·  Not legal advice</a:t>
+                <a:latin typeface="Calibri" pitchFamily="34" charset="0"/>
+              </a:rPr>
+              <a:t xml:space="preserve">Supreme Privacy Board Report · Confidential · Not legal advice</a:t>
             </a:r>
           </a:p>
         </p:txBody>
@@ -3024,7 +3077,7 @@
           <a:noFill/>
         </p:spPr>
         <p:txBody>
-          <a:bodyPr wrap="square" anchor="t"/>
+          <a:bodyPr wrap="square" anchor="t" lIns="45720" tIns="22860" rIns="45720" bIns="22860"/>
           <a:lstStyle/>
           <a:p>
             <a:pPr algn="r"/>
@@ -3033,8 +3086,9 @@
                 <a:solidFill>
                   <a:srgbClr val="64748B"/>
                 </a:solidFill>
-              </a:rPr>
-              <a:t>2 / 12</a:t>
+                <a:latin typeface="Calibri" pitchFamily="34" charset="0"/>
+              </a:rPr>
+              <a:t xml:space="preserve">2 / 12</a:t>
             </a:r>
           </a:p>
         </p:txBody>
@@ -3076,7 +3130,9 @@
             <a:ext cx="12192000" cy="1180000"/>
           </a:xfrm>
           <a:prstGeom prst="roundRect">
-            <a:avLst/>
+            <a:avLst>
+              <a:gd name="adj" fmla="val 6000"/>
+            </a:avLst>
           </a:prstGeom>
           <a:solidFill>
             <a:srgbClr val="0F172A"/>
@@ -3105,7 +3161,9 @@
             <a:ext cx="12192000" cy="50000"/>
           </a:xfrm>
           <a:prstGeom prst="roundRect">
-            <a:avLst/>
+            <a:avLst>
+              <a:gd name="adj" fmla="val 6000"/>
+            </a:avLst>
           </a:prstGeom>
           <a:solidFill>
             <a:srgbClr val="C5A46E"/>
@@ -3139,7 +3197,7 @@
           <a:noFill/>
         </p:spPr>
         <p:txBody>
-          <a:bodyPr wrap="square" anchor="t"/>
+          <a:bodyPr wrap="square" anchor="t" lIns="45720" tIns="22860" rIns="45720" bIns="22860"/>
           <a:lstStyle/>
           <a:p>
             <a:pPr algn="l"/>
@@ -3148,8 +3206,9 @@
                 <a:solidFill>
                   <a:srgbClr val="FFFFFF"/>
                 </a:solidFill>
-              </a:rPr>
-              <a:t>Processing and data footprint</a:t>
+                <a:latin typeface="Calibri" pitchFamily="34" charset="0"/>
+              </a:rPr>
+              <a:t xml:space="preserve">Processing and data footprint</a:t>
             </a:r>
           </a:p>
         </p:txBody>
@@ -3171,7 +3230,7 @@
           <a:noFill/>
         </p:spPr>
         <p:txBody>
-          <a:bodyPr wrap="square" anchor="t"/>
+          <a:bodyPr wrap="square" anchor="t" lIns="45720" tIns="22860" rIns="45720" bIns="22860"/>
           <a:lstStyle/>
           <a:p>
             <a:pPr algn="l"/>
@@ -3180,8 +3239,9 @@
                 <a:solidFill>
                   <a:srgbClr val="CBD5E1"/>
                 </a:solidFill>
-              </a:rPr>
-              <a:t>Where personal data is recorded to be processed.</a:t>
+                <a:latin typeface="Calibri" pitchFamily="34" charset="0"/>
+              </a:rPr>
+              <a:t xml:space="preserve">Where personal data is recorded to be processed.</a:t>
             </a:r>
           </a:p>
         </p:txBody>
@@ -3198,7 +3258,9 @@
             <a:ext cx="2500000" cy="1280000"/>
           </a:xfrm>
           <a:prstGeom prst="roundRect">
-            <a:avLst/>
+            <a:avLst>
+              <a:gd name="adj" fmla="val 6000"/>
+            </a:avLst>
           </a:prstGeom>
           <a:solidFill>
             <a:srgbClr val="F8FAFC"/>
@@ -3226,15 +3288,15 @@
         <p:spPr>
           <a:xfrm>
             <a:off x="420000" y="1780000"/>
-            <a:ext cx="2500000" cy="700000"/>
-          </a:xfrm>
-          <a:prstGeom prst="rect">
-            <a:avLst/>
-          </a:prstGeom>
-          <a:noFill/>
-        </p:spPr>
-        <p:txBody>
-          <a:bodyPr wrap="square" anchor="t"/>
+            <a:ext cx="2500000" cy="640000"/>
+          </a:xfrm>
+          <a:prstGeom prst="rect">
+            <a:avLst/>
+          </a:prstGeom>
+          <a:noFill/>
+        </p:spPr>
+        <p:txBody>
+          <a:bodyPr wrap="square" anchor="t" lIns="45720" tIns="22860" rIns="45720" bIns="22860"/>
           <a:lstStyle/>
           <a:p>
             <a:pPr algn="ctr"/>
@@ -3243,8 +3305,9 @@
                 <a:solidFill>
                   <a:srgbClr val="0F172A"/>
                 </a:solidFill>
-              </a:rPr>
-              <a:t>3</a:t>
+                <a:latin typeface="Calibri" pitchFamily="34" charset="0"/>
+              </a:rPr>
+              <a:t xml:space="preserve">4</a:t>
             </a:r>
           </a:p>
         </p:txBody>
@@ -3257,16 +3320,16 @@
         </p:nvSpPr>
         <p:spPr>
           <a:xfrm>
-            <a:off x="420000" y="2480000"/>
-            <a:ext cx="2500000" cy="360000"/>
-          </a:xfrm>
-          <a:prstGeom prst="rect">
-            <a:avLst/>
-          </a:prstGeom>
-          <a:noFill/>
-        </p:spPr>
-        <p:txBody>
-          <a:bodyPr wrap="square" anchor="t"/>
+            <a:off x="420000" y="2420000"/>
+            <a:ext cx="2500000" cy="420000"/>
+          </a:xfrm>
+          <a:prstGeom prst="rect">
+            <a:avLst/>
+          </a:prstGeom>
+          <a:noFill/>
+        </p:spPr>
+        <p:txBody>
+          <a:bodyPr wrap="square" anchor="t" lIns="45720" tIns="22860" rIns="45720" bIns="22860"/>
           <a:lstStyle/>
           <a:p>
             <a:pPr algn="ctr"/>
@@ -3275,8 +3338,9 @@
                 <a:solidFill>
                   <a:srgbClr val="475569"/>
                 </a:solidFill>
-              </a:rPr>
-              <a:t>Activities in view</a:t>
+                <a:latin typeface="Calibri" pitchFamily="34" charset="0"/>
+              </a:rPr>
+              <a:t xml:space="preserve">Activities in view</a:t>
             </a:r>
           </a:p>
         </p:txBody>
@@ -3293,7 +3357,9 @@
             <a:ext cx="2500000" cy="1280000"/>
           </a:xfrm>
           <a:prstGeom prst="roundRect">
-            <a:avLst/>
+            <a:avLst>
+              <a:gd name="adj" fmla="val 6000"/>
+            </a:avLst>
           </a:prstGeom>
           <a:solidFill>
             <a:srgbClr val="F8FAFC"/>
@@ -3321,15 +3387,15 @@
         <p:spPr>
           <a:xfrm>
             <a:off x="3120000" y="1780000"/>
-            <a:ext cx="2500000" cy="700000"/>
-          </a:xfrm>
-          <a:prstGeom prst="rect">
-            <a:avLst/>
-          </a:prstGeom>
-          <a:noFill/>
-        </p:spPr>
-        <p:txBody>
-          <a:bodyPr wrap="square" anchor="t"/>
+            <a:ext cx="2500000" cy="640000"/>
+          </a:xfrm>
+          <a:prstGeom prst="rect">
+            <a:avLst/>
+          </a:prstGeom>
+          <a:noFill/>
+        </p:spPr>
+        <p:txBody>
+          <a:bodyPr wrap="square" anchor="t" lIns="45720" tIns="22860" rIns="45720" bIns="22860"/>
           <a:lstStyle/>
           <a:p>
             <a:pPr algn="ctr"/>
@@ -3338,8 +3404,9 @@
                 <a:solidFill>
                   <a:srgbClr val="0F172A"/>
                 </a:solidFill>
-              </a:rPr>
-              <a:t>2</a:t>
+                <a:latin typeface="Calibri" pitchFamily="34" charset="0"/>
+              </a:rPr>
+              <a:t xml:space="preserve">2</a:t>
             </a:r>
           </a:p>
         </p:txBody>
@@ -3352,16 +3419,16 @@
         </p:nvSpPr>
         <p:spPr>
           <a:xfrm>
-            <a:off x="3120000" y="2480000"/>
-            <a:ext cx="2500000" cy="360000"/>
-          </a:xfrm>
-          <a:prstGeom prst="rect">
-            <a:avLst/>
-          </a:prstGeom>
-          <a:noFill/>
-        </p:spPr>
-        <p:txBody>
-          <a:bodyPr wrap="square" anchor="t"/>
+            <a:off x="3120000" y="2420000"/>
+            <a:ext cx="2500000" cy="420000"/>
+          </a:xfrm>
+          <a:prstGeom prst="rect">
+            <a:avLst/>
+          </a:prstGeom>
+          <a:noFill/>
+        </p:spPr>
+        <p:txBody>
+          <a:bodyPr wrap="square" anchor="t" lIns="45720" tIns="22860" rIns="45720" bIns="22860"/>
           <a:lstStyle/>
           <a:p>
             <a:pPr algn="ctr"/>
@@ -3370,8 +3437,9 @@
                 <a:solidFill>
                   <a:srgbClr val="475569"/>
                 </a:solidFill>
-              </a:rPr>
-              <a:t>Jurisdictions</a:t>
+                <a:latin typeface="Calibri" pitchFamily="34" charset="0"/>
+              </a:rPr>
+              <a:t xml:space="preserve">Jurisdictions</a:t>
             </a:r>
           </a:p>
         </p:txBody>
@@ -3388,7 +3456,9 @@
             <a:ext cx="2500000" cy="1280000"/>
           </a:xfrm>
           <a:prstGeom prst="roundRect">
-            <a:avLst/>
+            <a:avLst>
+              <a:gd name="adj" fmla="val 6000"/>
+            </a:avLst>
           </a:prstGeom>
           <a:solidFill>
             <a:srgbClr val="F8FAFC"/>
@@ -3416,15 +3486,15 @@
         <p:spPr>
           <a:xfrm>
             <a:off x="5820000" y="1780000"/>
-            <a:ext cx="2500000" cy="700000"/>
-          </a:xfrm>
-          <a:prstGeom prst="rect">
-            <a:avLst/>
-          </a:prstGeom>
-          <a:noFill/>
-        </p:spPr>
-        <p:txBody>
-          <a:bodyPr wrap="square" anchor="t"/>
+            <a:ext cx="2500000" cy="640000"/>
+          </a:xfrm>
+          <a:prstGeom prst="rect">
+            <a:avLst/>
+          </a:prstGeom>
+          <a:noFill/>
+        </p:spPr>
+        <p:txBody>
+          <a:bodyPr wrap="square" anchor="t" lIns="45720" tIns="22860" rIns="45720" bIns="22860"/>
           <a:lstStyle/>
           <a:p>
             <a:pPr algn="ctr"/>
@@ -3433,8 +3503,9 @@
                 <a:solidFill>
                   <a:srgbClr val="0F172A"/>
                 </a:solidFill>
-              </a:rPr>
-              <a:t>1</a:t>
+                <a:latin typeface="Calibri" pitchFamily="34" charset="0"/>
+              </a:rPr>
+              <a:t xml:space="preserve">1</a:t>
             </a:r>
           </a:p>
         </p:txBody>
@@ -3447,16 +3518,16 @@
         </p:nvSpPr>
         <p:spPr>
           <a:xfrm>
-            <a:off x="5820000" y="2480000"/>
-            <a:ext cx="2500000" cy="360000"/>
-          </a:xfrm>
-          <a:prstGeom prst="rect">
-            <a:avLst/>
-          </a:prstGeom>
-          <a:noFill/>
-        </p:spPr>
-        <p:txBody>
-          <a:bodyPr wrap="square" anchor="t"/>
+            <a:off x="5820000" y="2420000"/>
+            <a:ext cx="2500000" cy="420000"/>
+          </a:xfrm>
+          <a:prstGeom prst="rect">
+            <a:avLst/>
+          </a:prstGeom>
+          <a:noFill/>
+        </p:spPr>
+        <p:txBody>
+          <a:bodyPr wrap="square" anchor="t" lIns="45720" tIns="22860" rIns="45720" bIns="22860"/>
           <a:lstStyle/>
           <a:p>
             <a:pPr algn="ctr"/>
@@ -3465,8 +3536,9 @@
                 <a:solidFill>
                   <a:srgbClr val="475569"/>
                 </a:solidFill>
-              </a:rPr>
-              <a:t>Data categories</a:t>
+                <a:latin typeface="Calibri" pitchFamily="34" charset="0"/>
+              </a:rPr>
+              <a:t xml:space="preserve">Data categories</a:t>
             </a:r>
           </a:p>
         </p:txBody>
@@ -3483,7 +3555,9 @@
             <a:ext cx="2500000" cy="1280000"/>
           </a:xfrm>
           <a:prstGeom prst="roundRect">
-            <a:avLst/>
+            <a:avLst>
+              <a:gd name="adj" fmla="val 6000"/>
+            </a:avLst>
           </a:prstGeom>
           <a:solidFill>
             <a:srgbClr val="F8FAFC"/>
@@ -3511,15 +3585,15 @@
         <p:spPr>
           <a:xfrm>
             <a:off x="8520000" y="1780000"/>
-            <a:ext cx="2500000" cy="700000"/>
-          </a:xfrm>
-          <a:prstGeom prst="rect">
-            <a:avLst/>
-          </a:prstGeom>
-          <a:noFill/>
-        </p:spPr>
-        <p:txBody>
-          <a:bodyPr wrap="square" anchor="t"/>
+            <a:ext cx="2500000" cy="640000"/>
+          </a:xfrm>
+          <a:prstGeom prst="rect">
+            <a:avLst/>
+          </a:prstGeom>
+          <a:noFill/>
+        </p:spPr>
+        <p:txBody>
+          <a:bodyPr wrap="square" anchor="t" lIns="45720" tIns="22860" rIns="45720" bIns="22860"/>
           <a:lstStyle/>
           <a:p>
             <a:pPr algn="ctr"/>
@@ -3528,8 +3602,9 @@
                 <a:solidFill>
                   <a:srgbClr val="0F172A"/>
                 </a:solidFill>
-              </a:rPr>
-              <a:t>1</a:t>
+                <a:latin typeface="Calibri" pitchFamily="34" charset="0"/>
+              </a:rPr>
+              <a:t xml:space="preserve">1</a:t>
             </a:r>
           </a:p>
         </p:txBody>
@@ -3542,16 +3617,16 @@
         </p:nvSpPr>
         <p:spPr>
           <a:xfrm>
-            <a:off x="8520000" y="2480000"/>
-            <a:ext cx="2500000" cy="360000"/>
-          </a:xfrm>
-          <a:prstGeom prst="rect">
-            <a:avLst/>
-          </a:prstGeom>
-          <a:noFill/>
-        </p:spPr>
-        <p:txBody>
-          <a:bodyPr wrap="square" anchor="t"/>
+            <a:off x="8520000" y="2420000"/>
+            <a:ext cx="2500000" cy="420000"/>
+          </a:xfrm>
+          <a:prstGeom prst="rect">
+            <a:avLst/>
+          </a:prstGeom>
+          <a:noFill/>
+        </p:spPr>
+        <p:txBody>
+          <a:bodyPr wrap="square" anchor="t" lIns="45720" tIns="22860" rIns="45720" bIns="22860"/>
           <a:lstStyle/>
           <a:p>
             <a:pPr algn="ctr"/>
@@ -3560,8 +3635,9 @@
                 <a:solidFill>
                   <a:srgbClr val="475569"/>
                 </a:solidFill>
-              </a:rPr>
-              <a:t>Linked processors</a:t>
+                <a:latin typeface="Calibri" pitchFamily="34" charset="0"/>
+              </a:rPr>
+              <a:t xml:space="preserve">Linked processors</a:t>
             </a:r>
           </a:p>
         </p:txBody>
@@ -3575,25 +3651,26 @@
         <p:spPr>
           <a:xfrm>
             <a:off x="420000" y="3200000"/>
-            <a:ext cx="11000000" cy="360000"/>
-          </a:xfrm>
-          <a:prstGeom prst="rect">
-            <a:avLst/>
-          </a:prstGeom>
-          <a:noFill/>
-        </p:spPr>
-        <p:txBody>
-          <a:bodyPr wrap="square" anchor="t"/>
+            <a:ext cx="11300000" cy="420000"/>
+          </a:xfrm>
+          <a:prstGeom prst="rect">
+            <a:avLst/>
+          </a:prstGeom>
+          <a:noFill/>
+        </p:spPr>
+        <p:txBody>
+          <a:bodyPr wrap="square" anchor="t" lIns="45720" tIns="22860" rIns="45720" bIns="22860"/>
           <a:lstStyle/>
           <a:p>
             <a:pPr algn="l"/>
             <a:r>
-              <a:rPr lang="en-US" sz="1400" b="0" dirty="0">
+              <a:rPr lang="en-US" sz="1300" b="0" dirty="0">
                 <a:solidFill>
                   <a:srgbClr val="0F172A"/>
                 </a:solidFill>
-              </a:rPr>
-              <a:t>PA-00001  Claims servicing  ·  Active  ·  US-NY, IE</a:t>
+                <a:latin typeface="Calibri" pitchFamily="34" charset="0"/>
+              </a:rPr>
+              <a:t xml:space="preserve">PA-00001 Claims servicing · Active · US-NY, IE</a:t>
             </a:r>
           </a:p>
         </p:txBody>
@@ -3606,26 +3683,27 @@
         </p:nvSpPr>
         <p:spPr>
           <a:xfrm>
-            <a:off x="420000" y="3580000"/>
-            <a:ext cx="11000000" cy="360000"/>
-          </a:xfrm>
-          <a:prstGeom prst="rect">
-            <a:avLst/>
-          </a:prstGeom>
-          <a:noFill/>
-        </p:spPr>
-        <p:txBody>
-          <a:bodyPr wrap="square" anchor="t"/>
+            <a:off x="420000" y="3660000"/>
+            <a:ext cx="11300000" cy="420000"/>
+          </a:xfrm>
+          <a:prstGeom prst="rect">
+            <a:avLst/>
+          </a:prstGeom>
+          <a:noFill/>
+        </p:spPr>
+        <p:txBody>
+          <a:bodyPr wrap="square" anchor="t" lIns="45720" tIns="22860" rIns="45720" bIns="22860"/>
           <a:lstStyle/>
           <a:p>
             <a:pPr algn="l"/>
             <a:r>
-              <a:rPr lang="en-US" sz="1400" b="0" dirty="0">
+              <a:rPr lang="en-US" sz="1300" b="0" dirty="0">
                 <a:solidFill>
                   <a:srgbClr val="0F172A"/>
                 </a:solidFill>
-              </a:rPr>
-              <a:t>PA-00002  Claims servicing  ·  Active  ·  US-NY, IE</a:t>
+                <a:latin typeface="Calibri" pitchFamily="34" charset="0"/>
+              </a:rPr>
+              <a:t xml:space="preserve">PA-00002 Claims servicing · Active · US-NY, IE</a:t>
             </a:r>
           </a:p>
         </p:txBody>
@@ -3638,26 +3716,60 @@
         </p:nvSpPr>
         <p:spPr>
           <a:xfrm>
-            <a:off x="420000" y="3960000"/>
-            <a:ext cx="11000000" cy="360000"/>
-          </a:xfrm>
-          <a:prstGeom prst="rect">
-            <a:avLst/>
-          </a:prstGeom>
-          <a:noFill/>
-        </p:spPr>
-        <p:txBody>
-          <a:bodyPr wrap="square" anchor="t"/>
+            <a:off x="420000" y="4120000"/>
+            <a:ext cx="11300000" cy="420000"/>
+          </a:xfrm>
+          <a:prstGeom prst="rect">
+            <a:avLst/>
+          </a:prstGeom>
+          <a:noFill/>
+        </p:spPr>
+        <p:txBody>
+          <a:bodyPr wrap="square" anchor="t" lIns="45720" tIns="22860" rIns="45720" bIns="22860"/>
           <a:lstStyle/>
           <a:p>
             <a:pPr algn="l"/>
             <a:r>
-              <a:rPr lang="en-US" sz="1400" b="0" dirty="0">
+              <a:rPr lang="en-US" sz="1300" b="0" dirty="0">
                 <a:solidFill>
                   <a:srgbClr val="0F172A"/>
                 </a:solidFill>
-              </a:rPr>
-              <a:t>PA-00003  Claims servicing  ·  Active  ·  US-NY, IE</a:t>
+                <a:latin typeface="Calibri" pitchFamily="34" charset="0"/>
+              </a:rPr>
+              <a:t xml:space="preserve">PA-00003 Claims servicing · Active · US-NY, IE</a:t>
+            </a:r>
+          </a:p>
+        </p:txBody>
+      </p:sp>
+      <p:sp>
+        <p:nvSpPr>
+          <p:cNvPr id="63" name="t63"/>
+          <p:cNvSpPr txBox="1"/>
+          <p:nvPr/>
+        </p:nvSpPr>
+        <p:spPr>
+          <a:xfrm>
+            <a:off x="420000" y="4580000"/>
+            <a:ext cx="11300000" cy="420000"/>
+          </a:xfrm>
+          <a:prstGeom prst="rect">
+            <a:avLst/>
+          </a:prstGeom>
+          <a:noFill/>
+        </p:spPr>
+        <p:txBody>
+          <a:bodyPr wrap="square" anchor="t" lIns="45720" tIns="22860" rIns="45720" bIns="22860"/>
+          <a:lstStyle/>
+          <a:p>
+            <a:pPr algn="l"/>
+            <a:r>
+              <a:rPr lang="en-US" sz="1300" b="0" dirty="0">
+                <a:solidFill>
+                  <a:srgbClr val="0F172A"/>
+                </a:solidFill>
+                <a:latin typeface="Calibri" pitchFamily="34" charset="0"/>
+              </a:rPr>
+              <a:t xml:space="preserve">PA-00004 Claims servicing · Active · US-NY, IE</a:t>
             </a:r>
           </a:p>
         </p:txBody>
@@ -3674,7 +3786,9 @@
             <a:ext cx="12192000" cy="340000"/>
           </a:xfrm>
           <a:prstGeom prst="roundRect">
-            <a:avLst/>
+            <a:avLst>
+              <a:gd name="adj" fmla="val 6000"/>
+            </a:avLst>
           </a:prstGeom>
           <a:solidFill>
             <a:srgbClr val="F1F5F9"/>
@@ -3708,7 +3822,7 @@
           <a:noFill/>
         </p:spPr>
         <p:txBody>
-          <a:bodyPr wrap="square" anchor="t"/>
+          <a:bodyPr wrap="square" anchor="t" lIns="45720" tIns="22860" rIns="45720" bIns="22860"/>
           <a:lstStyle/>
           <a:p>
             <a:pPr algn="l"/>
@@ -3717,8 +3831,9 @@
                 <a:solidFill>
                   <a:srgbClr val="64748B"/>
                 </a:solidFill>
-              </a:rPr>
-              <a:t>Supreme Privacy Board Report  ·  Confidential  ·  Not legal advice</a:t>
+                <a:latin typeface="Calibri" pitchFamily="34" charset="0"/>
+              </a:rPr>
+              <a:t xml:space="preserve">Supreme Privacy Board Report · Confidential · Not legal advice</a:t>
             </a:r>
           </a:p>
         </p:txBody>
@@ -3740,7 +3855,7 @@
           <a:noFill/>
         </p:spPr>
         <p:txBody>
-          <a:bodyPr wrap="square" anchor="t"/>
+          <a:bodyPr wrap="square" anchor="t" lIns="45720" tIns="22860" rIns="45720" bIns="22860"/>
           <a:lstStyle/>
           <a:p>
             <a:pPr algn="r"/>
@@ -3749,8 +3864,9 @@
                 <a:solidFill>
                   <a:srgbClr val="64748B"/>
                 </a:solidFill>
-              </a:rPr>
-              <a:t>3 / 12</a:t>
+                <a:latin typeface="Calibri" pitchFamily="34" charset="0"/>
+              </a:rPr>
+              <a:t xml:space="preserve">3 / 12</a:t>
             </a:r>
           </a:p>
         </p:txBody>
@@ -3792,7 +3908,9 @@
             <a:ext cx="12192000" cy="1180000"/>
           </a:xfrm>
           <a:prstGeom prst="roundRect">
-            <a:avLst/>
+            <a:avLst>
+              <a:gd name="adj" fmla="val 6000"/>
+            </a:avLst>
           </a:prstGeom>
           <a:solidFill>
             <a:srgbClr val="0F172A"/>
@@ -3821,7 +3939,9 @@
             <a:ext cx="12192000" cy="50000"/>
           </a:xfrm>
           <a:prstGeom prst="roundRect">
-            <a:avLst/>
+            <a:avLst>
+              <a:gd name="adj" fmla="val 6000"/>
+            </a:avLst>
           </a:prstGeom>
           <a:solidFill>
             <a:srgbClr val="C5A46E"/>
@@ -3855,7 +3975,7 @@
           <a:noFill/>
         </p:spPr>
         <p:txBody>
-          <a:bodyPr wrap="square" anchor="t"/>
+          <a:bodyPr wrap="square" anchor="t" lIns="45720" tIns="22860" rIns="45720" bIns="22860"/>
           <a:lstStyle/>
           <a:p>
             <a:pPr algn="l"/>
@@ -3864,8 +3984,9 @@
                 <a:solidFill>
                   <a:srgbClr val="FFFFFF"/>
                 </a:solidFill>
-              </a:rPr>
-              <a:t>Highest privacy risks</a:t>
+                <a:latin typeface="Calibri" pitchFamily="34" charset="0"/>
+              </a:rPr>
+              <a:t xml:space="preserve">Highest privacy risks</a:t>
             </a:r>
           </a:p>
         </p:txBody>
@@ -3887,7 +4008,7 @@
           <a:noFill/>
         </p:spPr>
         <p:txBody>
-          <a:bodyPr wrap="square" anchor="t"/>
+          <a:bodyPr wrap="square" anchor="t" lIns="45720" tIns="22860" rIns="45720" bIns="22860"/>
           <a:lstStyle/>
           <a:p>
             <a:pPr algn="l"/>
@@ -3896,8 +4017,9 @@
                 <a:solidFill>
                   <a:srgbClr val="CBD5E1"/>
                 </a:solidFill>
-              </a:rPr>
-              <a:t>Linked Supreme Risk records only. No invented residual scores.</a:t>
+                <a:latin typeface="Calibri" pitchFamily="34" charset="0"/>
+              </a:rPr>
+              <a:t xml:space="preserve">Linked Supreme Risk records only. No invented residual scores.</a:t>
             </a:r>
           </a:p>
         </p:txBody>
@@ -3914,7 +4036,9 @@
             <a:ext cx="2500000" cy="1280000"/>
           </a:xfrm>
           <a:prstGeom prst="roundRect">
-            <a:avLst/>
+            <a:avLst>
+              <a:gd name="adj" fmla="val 6000"/>
+            </a:avLst>
           </a:prstGeom>
           <a:solidFill>
             <a:srgbClr val="F8FAFC"/>
@@ -3942,15 +4066,15 @@
         <p:spPr>
           <a:xfrm>
             <a:off x="420000" y="1780000"/>
-            <a:ext cx="2500000" cy="700000"/>
-          </a:xfrm>
-          <a:prstGeom prst="rect">
-            <a:avLst/>
-          </a:prstGeom>
-          <a:noFill/>
-        </p:spPr>
-        <p:txBody>
-          <a:bodyPr wrap="square" anchor="t"/>
+            <a:ext cx="2500000" cy="640000"/>
+          </a:xfrm>
+          <a:prstGeom prst="rect">
+            <a:avLst/>
+          </a:prstGeom>
+          <a:noFill/>
+        </p:spPr>
+        <p:txBody>
+          <a:bodyPr wrap="square" anchor="t" lIns="45720" tIns="22860" rIns="45720" bIns="22860"/>
           <a:lstStyle/>
           <a:p>
             <a:pPr algn="ctr"/>
@@ -3959,8 +4083,9 @@
                 <a:solidFill>
                   <a:srgbClr val="0F172A"/>
                 </a:solidFill>
-              </a:rPr>
-              <a:t>3</a:t>
+                <a:latin typeface="Calibri" pitchFamily="34" charset="0"/>
+              </a:rPr>
+              <a:t xml:space="preserve">4</a:t>
             </a:r>
           </a:p>
         </p:txBody>
@@ -3973,16 +4098,16 @@
         </p:nvSpPr>
         <p:spPr>
           <a:xfrm>
-            <a:off x="420000" y="2480000"/>
-            <a:ext cx="2500000" cy="360000"/>
-          </a:xfrm>
-          <a:prstGeom prst="rect">
-            <a:avLst/>
-          </a:prstGeom>
-          <a:noFill/>
-        </p:spPr>
-        <p:txBody>
-          <a:bodyPr wrap="square" anchor="t"/>
+            <a:off x="420000" y="2420000"/>
+            <a:ext cx="2500000" cy="420000"/>
+          </a:xfrm>
+          <a:prstGeom prst="rect">
+            <a:avLst/>
+          </a:prstGeom>
+          <a:noFill/>
+        </p:spPr>
+        <p:txBody>
+          <a:bodyPr wrap="square" anchor="t" lIns="45720" tIns="22860" rIns="45720" bIns="22860"/>
           <a:lstStyle/>
           <a:p>
             <a:pPr algn="ctr"/>
@@ -3991,8 +4116,9 @@
                 <a:solidFill>
                   <a:srgbClr val="475569"/>
                 </a:solidFill>
-              </a:rPr>
-              <a:t>High-risk activities</a:t>
+                <a:latin typeface="Calibri" pitchFamily="34" charset="0"/>
+              </a:rPr>
+              <a:t xml:space="preserve">High-risk activities</a:t>
             </a:r>
           </a:p>
         </p:txBody>
@@ -4009,7 +4135,9 @@
             <a:ext cx="2500000" cy="1280000"/>
           </a:xfrm>
           <a:prstGeom prst="roundRect">
-            <a:avLst/>
+            <a:avLst>
+              <a:gd name="adj" fmla="val 6000"/>
+            </a:avLst>
           </a:prstGeom>
           <a:solidFill>
             <a:srgbClr val="F8FAFC"/>
@@ -4037,15 +4165,15 @@
         <p:spPr>
           <a:xfrm>
             <a:off x="3120000" y="1780000"/>
-            <a:ext cx="2500000" cy="700000"/>
-          </a:xfrm>
-          <a:prstGeom prst="rect">
-            <a:avLst/>
-          </a:prstGeom>
-          <a:noFill/>
-        </p:spPr>
-        <p:txBody>
-          <a:bodyPr wrap="square" anchor="t"/>
+            <a:ext cx="2500000" cy="640000"/>
+          </a:xfrm>
+          <a:prstGeom prst="rect">
+            <a:avLst/>
+          </a:prstGeom>
+          <a:noFill/>
+        </p:spPr>
+        <p:txBody>
+          <a:bodyPr wrap="square" anchor="t" lIns="45720" tIns="22860" rIns="45720" bIns="22860"/>
           <a:lstStyle/>
           <a:p>
             <a:pPr algn="ctr"/>
@@ -4054,8 +4182,9 @@
                 <a:solidFill>
                   <a:srgbClr val="0F172A"/>
                 </a:solidFill>
-              </a:rPr>
-              <a:t>4</a:t>
+                <a:latin typeface="Calibri" pitchFamily="34" charset="0"/>
+              </a:rPr>
+              <a:t xml:space="preserve">4</a:t>
             </a:r>
           </a:p>
         </p:txBody>
@@ -4068,16 +4197,16 @@
         </p:nvSpPr>
         <p:spPr>
           <a:xfrm>
-            <a:off x="3120000" y="2480000"/>
-            <a:ext cx="2500000" cy="360000"/>
-          </a:xfrm>
-          <a:prstGeom prst="rect">
-            <a:avLst/>
-          </a:prstGeom>
-          <a:noFill/>
-        </p:spPr>
-        <p:txBody>
-          <a:bodyPr wrap="square" anchor="t"/>
+            <a:off x="3120000" y="2420000"/>
+            <a:ext cx="2500000" cy="420000"/>
+          </a:xfrm>
+          <a:prstGeom prst="rect">
+            <a:avLst/>
+          </a:prstGeom>
+          <a:noFill/>
+        </p:spPr>
+        <p:txBody>
+          <a:bodyPr wrap="square" anchor="t" lIns="45720" tIns="22860" rIns="45720" bIns="22860"/>
           <a:lstStyle/>
           <a:p>
             <a:pPr algn="ctr"/>
@@ -4086,8 +4215,9 @@
                 <a:solidFill>
                   <a:srgbClr val="475569"/>
                 </a:solidFill>
-              </a:rPr>
-              <a:t>Open gaps</a:t>
+                <a:latin typeface="Calibri" pitchFamily="34" charset="0"/>
+              </a:rPr>
+              <a:t xml:space="preserve">Open gaps</a:t>
             </a:r>
           </a:p>
         </p:txBody>
@@ -4104,7 +4234,9 @@
             <a:ext cx="2500000" cy="1280000"/>
           </a:xfrm>
           <a:prstGeom prst="roundRect">
-            <a:avLst/>
+            <a:avLst>
+              <a:gd name="adj" fmla="val 6000"/>
+            </a:avLst>
           </a:prstGeom>
           <a:solidFill>
             <a:srgbClr val="F8FAFC"/>
@@ -4132,15 +4264,15 @@
         <p:spPr>
           <a:xfrm>
             <a:off x="5820000" y="1780000"/>
-            <a:ext cx="2500000" cy="700000"/>
-          </a:xfrm>
-          <a:prstGeom prst="rect">
-            <a:avLst/>
-          </a:prstGeom>
-          <a:noFill/>
-        </p:spPr>
-        <p:txBody>
-          <a:bodyPr wrap="square" anchor="t"/>
+            <a:ext cx="2500000" cy="640000"/>
+          </a:xfrm>
+          <a:prstGeom prst="rect">
+            <a:avLst/>
+          </a:prstGeom>
+          <a:noFill/>
+        </p:spPr>
+        <p:txBody>
+          <a:bodyPr wrap="square" anchor="t" lIns="45720" tIns="22860" rIns="45720" bIns="22860"/>
           <a:lstStyle/>
           <a:p>
             <a:pPr algn="ctr"/>
@@ -4149,8 +4281,9 @@
                 <a:solidFill>
                   <a:srgbClr val="0F172A"/>
                 </a:solidFill>
-              </a:rPr>
-              <a:t>1</a:t>
+                <a:latin typeface="Calibri" pitchFamily="34" charset="0"/>
+              </a:rPr>
+              <a:t xml:space="preserve">1</a:t>
             </a:r>
           </a:p>
         </p:txBody>
@@ -4163,16 +4296,16 @@
         </p:nvSpPr>
         <p:spPr>
           <a:xfrm>
-            <a:off x="5820000" y="2480000"/>
-            <a:ext cx="2500000" cy="360000"/>
-          </a:xfrm>
-          <a:prstGeom prst="rect">
-            <a:avLst/>
-          </a:prstGeom>
-          <a:noFill/>
-        </p:spPr>
-        <p:txBody>
-          <a:bodyPr wrap="square" anchor="t"/>
+            <a:off x="5820000" y="2420000"/>
+            <a:ext cx="2500000" cy="420000"/>
+          </a:xfrm>
+          <a:prstGeom prst="rect">
+            <a:avLst/>
+          </a:prstGeom>
+          <a:noFill/>
+        </p:spPr>
+        <p:txBody>
+          <a:bodyPr wrap="square" anchor="t" lIns="45720" tIns="22860" rIns="45720" bIns="22860"/>
           <a:lstStyle/>
           <a:p>
             <a:pPr algn="ctr"/>
@@ -4181,8 +4314,9 @@
                 <a:solidFill>
                   <a:srgbClr val="475569"/>
                 </a:solidFill>
-              </a:rPr>
-              <a:t>Processors with issues</a:t>
+                <a:latin typeface="Calibri" pitchFamily="34" charset="0"/>
+              </a:rPr>
+              <a:t xml:space="preserve">Processors with issues</a:t>
             </a:r>
           </a:p>
         </p:txBody>
@@ -4199,7 +4333,9 @@
             <a:ext cx="2500000" cy="1280000"/>
           </a:xfrm>
           <a:prstGeom prst="roundRect">
-            <a:avLst/>
+            <a:avLst>
+              <a:gd name="adj" fmla="val 6000"/>
+            </a:avLst>
           </a:prstGeom>
           <a:solidFill>
             <a:srgbClr val="F8FAFC"/>
@@ -4227,15 +4363,15 @@
         <p:spPr>
           <a:xfrm>
             <a:off x="8520000" y="1780000"/>
-            <a:ext cx="2500000" cy="700000"/>
-          </a:xfrm>
-          <a:prstGeom prst="rect">
-            <a:avLst/>
-          </a:prstGeom>
-          <a:noFill/>
-        </p:spPr>
-        <p:txBody>
-          <a:bodyPr wrap="square" anchor="t"/>
+            <a:ext cx="2500000" cy="640000"/>
+          </a:xfrm>
+          <a:prstGeom prst="rect">
+            <a:avLst/>
+          </a:prstGeom>
+          <a:noFill/>
+        </p:spPr>
+        <p:txBody>
+          <a:bodyPr wrap="square" anchor="t" lIns="45720" tIns="22860" rIns="45720" bIns="22860"/>
           <a:lstStyle/>
           <a:p>
             <a:pPr algn="ctr"/>
@@ -4244,8 +4380,9 @@
                 <a:solidFill>
                   <a:srgbClr val="0F172A"/>
                 </a:solidFill>
-              </a:rPr>
-              <a:t>0</a:t>
+                <a:latin typeface="Calibri" pitchFamily="34" charset="0"/>
+              </a:rPr>
+              <a:t xml:space="preserve">0</a:t>
             </a:r>
           </a:p>
         </p:txBody>
@@ -4258,16 +4395,16 @@
         </p:nvSpPr>
         <p:spPr>
           <a:xfrm>
-            <a:off x="8520000" y="2480000"/>
-            <a:ext cx="2500000" cy="360000"/>
-          </a:xfrm>
-          <a:prstGeom prst="rect">
-            <a:avLst/>
-          </a:prstGeom>
-          <a:noFill/>
-        </p:spPr>
-        <p:txBody>
-          <a:bodyPr wrap="square" anchor="t"/>
+            <a:off x="8520000" y="2420000"/>
+            <a:ext cx="2500000" cy="420000"/>
+          </a:xfrm>
+          <a:prstGeom prst="rect">
+            <a:avLst/>
+          </a:prstGeom>
+          <a:noFill/>
+        </p:spPr>
+        <p:txBody>
+          <a:bodyPr wrap="square" anchor="t" lIns="45720" tIns="22860" rIns="45720" bIns="22860"/>
           <a:lstStyle/>
           <a:p>
             <a:pPr algn="ctr"/>
@@ -4276,8 +4413,9 @@
                 <a:solidFill>
                   <a:srgbClr val="475569"/>
                 </a:solidFill>
-              </a:rPr>
-              <a:t>Evidence refresh</a:t>
+                <a:latin typeface="Calibri" pitchFamily="34" charset="0"/>
+              </a:rPr>
+              <a:t xml:space="preserve">Evidence refresh</a:t>
             </a:r>
           </a:p>
         </p:txBody>
@@ -4291,25 +4429,26 @@
         <p:spPr>
           <a:xfrm>
             <a:off x="420000" y="3200000"/>
-            <a:ext cx="11000000" cy="360000"/>
-          </a:xfrm>
-          <a:prstGeom prst="rect">
-            <a:avLst/>
-          </a:prstGeom>
-          <a:noFill/>
-        </p:spPr>
-        <p:txBody>
-          <a:bodyPr wrap="square" anchor="t"/>
+            <a:ext cx="11300000" cy="420000"/>
+          </a:xfrm>
+          <a:prstGeom prst="rect">
+            <a:avLst/>
+          </a:prstGeom>
+          <a:noFill/>
+        </p:spPr>
+        <p:txBody>
+          <a:bodyPr wrap="square" anchor="t" lIns="45720" tIns="22860" rIns="45720" bIns="22860"/>
           <a:lstStyle/>
           <a:p>
             <a:pPr algn="l"/>
             <a:r>
-              <a:rPr lang="en-US" sz="1400" b="0" dirty="0">
+              <a:rPr lang="en-US" sz="1300" b="0" dirty="0">
                 <a:solidFill>
                   <a:srgbClr val="0F172A"/>
                 </a:solidFill>
-              </a:rPr>
-              <a:t>PA-00001  Claims servicing  ·  risk High</a:t>
+                <a:latin typeface="Calibri" pitchFamily="34" charset="0"/>
+              </a:rPr>
+              <a:t xml:space="preserve">PA-00001 Claims servicing · High</a:t>
             </a:r>
           </a:p>
         </p:txBody>
@@ -4322,26 +4461,27 @@
         </p:nvSpPr>
         <p:spPr>
           <a:xfrm>
-            <a:off x="420000" y="3580000"/>
-            <a:ext cx="11000000" cy="360000"/>
-          </a:xfrm>
-          <a:prstGeom prst="rect">
-            <a:avLst/>
-          </a:prstGeom>
-          <a:noFill/>
-        </p:spPr>
-        <p:txBody>
-          <a:bodyPr wrap="square" anchor="t"/>
+            <a:off x="420000" y="3660000"/>
+            <a:ext cx="11300000" cy="420000"/>
+          </a:xfrm>
+          <a:prstGeom prst="rect">
+            <a:avLst/>
+          </a:prstGeom>
+          <a:noFill/>
+        </p:spPr>
+        <p:txBody>
+          <a:bodyPr wrap="square" anchor="t" lIns="45720" tIns="22860" rIns="45720" bIns="22860"/>
           <a:lstStyle/>
           <a:p>
             <a:pPr algn="l"/>
             <a:r>
-              <a:rPr lang="en-US" sz="1400" b="0" dirty="0">
+              <a:rPr lang="en-US" sz="1300" b="0" dirty="0">
                 <a:solidFill>
                   <a:srgbClr val="0F172A"/>
                 </a:solidFill>
-              </a:rPr>
-              <a:t>PA-00002  Claims servicing  ·  risk High</a:t>
+                <a:latin typeface="Calibri" pitchFamily="34" charset="0"/>
+              </a:rPr>
+              <a:t xml:space="preserve">PA-00002 Claims servicing · High</a:t>
             </a:r>
           </a:p>
         </p:txBody>
@@ -4354,26 +4494,60 @@
         </p:nvSpPr>
         <p:spPr>
           <a:xfrm>
-            <a:off x="420000" y="3960000"/>
-            <a:ext cx="11000000" cy="360000"/>
-          </a:xfrm>
-          <a:prstGeom prst="rect">
-            <a:avLst/>
-          </a:prstGeom>
-          <a:noFill/>
-        </p:spPr>
-        <p:txBody>
-          <a:bodyPr wrap="square" anchor="t"/>
+            <a:off x="420000" y="4120000"/>
+            <a:ext cx="11300000" cy="420000"/>
+          </a:xfrm>
+          <a:prstGeom prst="rect">
+            <a:avLst/>
+          </a:prstGeom>
+          <a:noFill/>
+        </p:spPr>
+        <p:txBody>
+          <a:bodyPr wrap="square" anchor="t" lIns="45720" tIns="22860" rIns="45720" bIns="22860"/>
           <a:lstStyle/>
           <a:p>
             <a:pPr algn="l"/>
             <a:r>
-              <a:rPr lang="en-US" sz="1400" b="0" dirty="0">
+              <a:rPr lang="en-US" sz="1300" b="0" dirty="0">
                 <a:solidFill>
                   <a:srgbClr val="0F172A"/>
                 </a:solidFill>
-              </a:rPr>
-              <a:t>PA-00003  Claims servicing  ·  risk High</a:t>
+                <a:latin typeface="Calibri" pitchFamily="34" charset="0"/>
+              </a:rPr>
+              <a:t xml:space="preserve">PA-00003 Claims servicing · High</a:t>
+            </a:r>
+          </a:p>
+        </p:txBody>
+      </p:sp>
+      <p:sp>
+        <p:nvSpPr>
+          <p:cNvPr id="63" name="t63"/>
+          <p:cNvSpPr txBox="1"/>
+          <p:nvPr/>
+        </p:nvSpPr>
+        <p:spPr>
+          <a:xfrm>
+            <a:off x="420000" y="4580000"/>
+            <a:ext cx="11300000" cy="420000"/>
+          </a:xfrm>
+          <a:prstGeom prst="rect">
+            <a:avLst/>
+          </a:prstGeom>
+          <a:noFill/>
+        </p:spPr>
+        <p:txBody>
+          <a:bodyPr wrap="square" anchor="t" lIns="45720" tIns="22860" rIns="45720" bIns="22860"/>
+          <a:lstStyle/>
+          <a:p>
+            <a:pPr algn="l"/>
+            <a:r>
+              <a:rPr lang="en-US" sz="1300" b="0" dirty="0">
+                <a:solidFill>
+                  <a:srgbClr val="0F172A"/>
+                </a:solidFill>
+                <a:latin typeface="Calibri" pitchFamily="34" charset="0"/>
+              </a:rPr>
+              <a:t xml:space="preserve">PA-00004 Claims servicing · High</a:t>
             </a:r>
           </a:p>
         </p:txBody>
@@ -4386,7 +4560,7 @@
         </p:nvSpPr>
         <p:spPr>
           <a:xfrm>
-            <a:off x="420000" y="5800000"/>
+            <a:off x="420000" y="5600000"/>
             <a:ext cx="11000000" cy="300000"/>
           </a:xfrm>
           <a:prstGeom prst="rect">
@@ -4395,7 +4569,7 @@
           <a:noFill/>
         </p:spPr>
         <p:txBody>
-          <a:bodyPr wrap="square" anchor="t"/>
+          <a:bodyPr wrap="square" anchor="t" lIns="45720" tIns="22860" rIns="45720" bIns="22860"/>
           <a:lstStyle/>
           <a:p>
             <a:pPr algn="l"/>
@@ -4404,8 +4578,9 @@
                 <a:solidFill>
                   <a:srgbClr val="64748B"/>
                 </a:solidFill>
-              </a:rPr>
-              <a:t/>
+                <a:latin typeface="Calibri" pitchFamily="34" charset="0"/>
+              </a:rPr>
+              <a:t xml:space="preserve">Highest recorded privacy risk activities.</a:t>
             </a:r>
           </a:p>
         </p:txBody>
@@ -4422,7 +4597,9 @@
             <a:ext cx="12192000" cy="340000"/>
           </a:xfrm>
           <a:prstGeom prst="roundRect">
-            <a:avLst/>
+            <a:avLst>
+              <a:gd name="adj" fmla="val 6000"/>
+            </a:avLst>
           </a:prstGeom>
           <a:solidFill>
             <a:srgbClr val="F1F5F9"/>
@@ -4456,7 +4633,7 @@
           <a:noFill/>
         </p:spPr>
         <p:txBody>
-          <a:bodyPr wrap="square" anchor="t"/>
+          <a:bodyPr wrap="square" anchor="t" lIns="45720" tIns="22860" rIns="45720" bIns="22860"/>
           <a:lstStyle/>
           <a:p>
             <a:pPr algn="l"/>
@@ -4465,8 +4642,9 @@
                 <a:solidFill>
                   <a:srgbClr val="64748B"/>
                 </a:solidFill>
-              </a:rPr>
-              <a:t>Supreme Privacy Board Report  ·  Confidential  ·  Not legal advice</a:t>
+                <a:latin typeface="Calibri" pitchFamily="34" charset="0"/>
+              </a:rPr>
+              <a:t xml:space="preserve">Supreme Privacy Board Report · Confidential · Not legal advice</a:t>
             </a:r>
           </a:p>
         </p:txBody>
@@ -4488,7 +4666,7 @@
           <a:noFill/>
         </p:spPr>
         <p:txBody>
-          <a:bodyPr wrap="square" anchor="t"/>
+          <a:bodyPr wrap="square" anchor="t" lIns="45720" tIns="22860" rIns="45720" bIns="22860"/>
           <a:lstStyle/>
           <a:p>
             <a:pPr algn="r"/>
@@ -4497,8 +4675,9 @@
                 <a:solidFill>
                   <a:srgbClr val="64748B"/>
                 </a:solidFill>
-              </a:rPr>
-              <a:t>4 / 12</a:t>
+                <a:latin typeface="Calibri" pitchFamily="34" charset="0"/>
+              </a:rPr>
+              <a:t xml:space="preserve">4 / 12</a:t>
             </a:r>
           </a:p>
         </p:txBody>
@@ -4540,7 +4719,9 @@
             <a:ext cx="12192000" cy="1180000"/>
           </a:xfrm>
           <a:prstGeom prst="roundRect">
-            <a:avLst/>
+            <a:avLst>
+              <a:gd name="adj" fmla="val 6000"/>
+            </a:avLst>
           </a:prstGeom>
           <a:solidFill>
             <a:srgbClr val="0F172A"/>
@@ -4569,7 +4750,9 @@
             <a:ext cx="12192000" cy="50000"/>
           </a:xfrm>
           <a:prstGeom prst="roundRect">
-            <a:avLst/>
+            <a:avLst>
+              <a:gd name="adj" fmla="val 6000"/>
+            </a:avLst>
           </a:prstGeom>
           <a:solidFill>
             <a:srgbClr val="C5A46E"/>
@@ -4603,7 +4786,7 @@
           <a:noFill/>
         </p:spPr>
         <p:txBody>
-          <a:bodyPr wrap="square" anchor="t"/>
+          <a:bodyPr wrap="square" anchor="t" lIns="45720" tIns="22860" rIns="45720" bIns="22860"/>
           <a:lstStyle/>
           <a:p>
             <a:pPr algn="l"/>
@@ -4612,8 +4795,9 @@
                 <a:solidFill>
                   <a:srgbClr val="FFFFFF"/>
                 </a:solidFill>
-              </a:rPr>
-              <a:t>International transfer posture</a:t>
+                <a:latin typeface="Calibri" pitchFamily="34" charset="0"/>
+              </a:rPr>
+              <a:t xml:space="preserve">International transfer posture</a:t>
             </a:r>
           </a:p>
         </p:txBody>
@@ -4635,7 +4819,7 @@
           <a:noFill/>
         </p:spPr>
         <p:txBody>
-          <a:bodyPr wrap="square" anchor="t"/>
+          <a:bodyPr wrap="square" anchor="t" lIns="45720" tIns="22860" rIns="45720" bIns="22860"/>
           <a:lstStyle/>
           <a:p>
             <a:pPr algn="l"/>
@@ -4644,8 +4828,9 @@
                 <a:solidFill>
                   <a:srgbClr val="CBD5E1"/>
                 </a:solidFill>
-              </a:rPr>
-              <a:t>A recorded mechanism is not a finding that a transfer is lawful.</a:t>
+                <a:latin typeface="Calibri" pitchFamily="34" charset="0"/>
+              </a:rPr>
+              <a:t xml:space="preserve">A recorded mechanism is not a finding that a transfer is lawful.</a:t>
             </a:r>
           </a:p>
         </p:txBody>
@@ -4662,7 +4847,9 @@
             <a:ext cx="2500000" cy="1280000"/>
           </a:xfrm>
           <a:prstGeom prst="roundRect">
-            <a:avLst/>
+            <a:avLst>
+              <a:gd name="adj" fmla="val 6000"/>
+            </a:avLst>
           </a:prstGeom>
           <a:solidFill>
             <a:srgbClr val="F8FAFC"/>
@@ -4690,15 +4877,15 @@
         <p:spPr>
           <a:xfrm>
             <a:off x="420000" y="1780000"/>
-            <a:ext cx="2500000" cy="700000"/>
-          </a:xfrm>
-          <a:prstGeom prst="rect">
-            <a:avLst/>
-          </a:prstGeom>
-          <a:noFill/>
-        </p:spPr>
-        <p:txBody>
-          <a:bodyPr wrap="square" anchor="t"/>
+            <a:ext cx="2500000" cy="640000"/>
+          </a:xfrm>
+          <a:prstGeom prst="rect">
+            <a:avLst/>
+          </a:prstGeom>
+          <a:noFill/>
+        </p:spPr>
+        <p:txBody>
+          <a:bodyPr wrap="square" anchor="t" lIns="45720" tIns="22860" rIns="45720" bIns="22860"/>
           <a:lstStyle/>
           <a:p>
             <a:pPr algn="ctr"/>
@@ -4707,8 +4894,9 @@
                 <a:solidFill>
                   <a:srgbClr val="0F172A"/>
                 </a:solidFill>
-              </a:rPr>
-              <a:t>3</a:t>
+                <a:latin typeface="Calibri" pitchFamily="34" charset="0"/>
+              </a:rPr>
+              <a:t xml:space="preserve">4</a:t>
             </a:r>
           </a:p>
         </p:txBody>
@@ -4721,16 +4909,16 @@
         </p:nvSpPr>
         <p:spPr>
           <a:xfrm>
-            <a:off x="420000" y="2480000"/>
-            <a:ext cx="2500000" cy="360000"/>
-          </a:xfrm>
-          <a:prstGeom prst="rect">
-            <a:avLst/>
-          </a:prstGeom>
-          <a:noFill/>
-        </p:spPr>
-        <p:txBody>
-          <a:bodyPr wrap="square" anchor="t"/>
+            <a:off x="420000" y="2420000"/>
+            <a:ext cx="2500000" cy="420000"/>
+          </a:xfrm>
+          <a:prstGeom prst="rect">
+            <a:avLst/>
+          </a:prstGeom>
+          <a:noFill/>
+        </p:spPr>
+        <p:txBody>
+          <a:bodyPr wrap="square" anchor="t" lIns="45720" tIns="22860" rIns="45720" bIns="22860"/>
           <a:lstStyle/>
           <a:p>
             <a:pPr algn="ctr"/>
@@ -4739,8 +4927,9 @@
                 <a:solidFill>
                   <a:srgbClr val="475569"/>
                 </a:solidFill>
-              </a:rPr>
-              <a:t>Transfers recorded</a:t>
+                <a:latin typeface="Calibri" pitchFamily="34" charset="0"/>
+              </a:rPr>
+              <a:t xml:space="preserve">Transfers recorded</a:t>
             </a:r>
           </a:p>
         </p:txBody>
@@ -4757,7 +4946,9 @@
             <a:ext cx="2500000" cy="1280000"/>
           </a:xfrm>
           <a:prstGeom prst="roundRect">
-            <a:avLst/>
+            <a:avLst>
+              <a:gd name="adj" fmla="val 6000"/>
+            </a:avLst>
           </a:prstGeom>
           <a:solidFill>
             <a:srgbClr val="F8FAFC"/>
@@ -4785,15 +4976,15 @@
         <p:spPr>
           <a:xfrm>
             <a:off x="3120000" y="1780000"/>
-            <a:ext cx="2500000" cy="700000"/>
-          </a:xfrm>
-          <a:prstGeom prst="rect">
-            <a:avLst/>
-          </a:prstGeom>
-          <a:noFill/>
-        </p:spPr>
-        <p:txBody>
-          <a:bodyPr wrap="square" anchor="t"/>
+            <a:ext cx="2500000" cy="640000"/>
+          </a:xfrm>
+          <a:prstGeom prst="rect">
+            <a:avLst/>
+          </a:prstGeom>
+          <a:noFill/>
+        </p:spPr>
+        <p:txBody>
+          <a:bodyPr wrap="square" anchor="t" lIns="45720" tIns="22860" rIns="45720" bIns="22860"/>
           <a:lstStyle/>
           <a:p>
             <a:pPr algn="ctr"/>
@@ -4802,8 +4993,9 @@
                 <a:solidFill>
                   <a:srgbClr val="0F172A"/>
                 </a:solidFill>
-              </a:rPr>
-              <a:t>3</a:t>
+                <a:latin typeface="Calibri" pitchFamily="34" charset="0"/>
+              </a:rPr>
+              <a:t xml:space="preserve">4</a:t>
             </a:r>
           </a:p>
         </p:txBody>
@@ -4816,16 +5008,16 @@
         </p:nvSpPr>
         <p:spPr>
           <a:xfrm>
-            <a:off x="3120000" y="2480000"/>
-            <a:ext cx="2500000" cy="360000"/>
-          </a:xfrm>
-          <a:prstGeom prst="rect">
-            <a:avLst/>
-          </a:prstGeom>
-          <a:noFill/>
-        </p:spPr>
-        <p:txBody>
-          <a:bodyPr wrap="square" anchor="t"/>
+            <a:off x="3120000" y="2420000"/>
+            <a:ext cx="2500000" cy="420000"/>
+          </a:xfrm>
+          <a:prstGeom prst="rect">
+            <a:avLst/>
+          </a:prstGeom>
+          <a:noFill/>
+        </p:spPr>
+        <p:txBody>
+          <a:bodyPr wrap="square" anchor="t" lIns="45720" tIns="22860" rIns="45720" bIns="22860"/>
           <a:lstStyle/>
           <a:p>
             <a:pPr algn="ctr"/>
@@ -4834,8 +5026,9 @@
                 <a:solidFill>
                   <a:srgbClr val="475569"/>
                 </a:solidFill>
-              </a:rPr>
-              <a:t>Review required</a:t>
+                <a:latin typeface="Calibri" pitchFamily="34" charset="0"/>
+              </a:rPr>
+              <a:t xml:space="preserve">Review required</a:t>
             </a:r>
           </a:p>
         </p:txBody>
@@ -4852,7 +5045,9 @@
             <a:ext cx="2500000" cy="1280000"/>
           </a:xfrm>
           <a:prstGeom prst="roundRect">
-            <a:avLst/>
+            <a:avLst>
+              <a:gd name="adj" fmla="val 6000"/>
+            </a:avLst>
           </a:prstGeom>
           <a:solidFill>
             <a:srgbClr val="F8FAFC"/>
@@ -4880,15 +5075,15 @@
         <p:spPr>
           <a:xfrm>
             <a:off x="5820000" y="1780000"/>
-            <a:ext cx="2500000" cy="700000"/>
-          </a:xfrm>
-          <a:prstGeom prst="rect">
-            <a:avLst/>
-          </a:prstGeom>
-          <a:noFill/>
-        </p:spPr>
-        <p:txBody>
-          <a:bodyPr wrap="square" anchor="t"/>
+            <a:ext cx="2500000" cy="640000"/>
+          </a:xfrm>
+          <a:prstGeom prst="rect">
+            <a:avLst/>
+          </a:prstGeom>
+          <a:noFill/>
+        </p:spPr>
+        <p:txBody>
+          <a:bodyPr wrap="square" anchor="t" lIns="45720" tIns="22860" rIns="45720" bIns="22860"/>
           <a:lstStyle/>
           <a:p>
             <a:pPr algn="ctr"/>
@@ -4897,8 +5092,9 @@
                 <a:solidFill>
                   <a:srgbClr val="0F172A"/>
                 </a:solidFill>
-              </a:rPr>
-              <a:t>3</a:t>
+                <a:latin typeface="Calibri" pitchFamily="34" charset="0"/>
+              </a:rPr>
+              <a:t xml:space="preserve">4</a:t>
             </a:r>
           </a:p>
         </p:txBody>
@@ -4911,16 +5107,16 @@
         </p:nvSpPr>
         <p:spPr>
           <a:xfrm>
-            <a:off x="5820000" y="2480000"/>
-            <a:ext cx="2500000" cy="360000"/>
-          </a:xfrm>
-          <a:prstGeom prst="rect">
-            <a:avLst/>
-          </a:prstGeom>
-          <a:noFill/>
-        </p:spPr>
-        <p:txBody>
-          <a:bodyPr wrap="square" anchor="t"/>
+            <a:off x="5820000" y="2420000"/>
+            <a:ext cx="2500000" cy="420000"/>
+          </a:xfrm>
+          <a:prstGeom prst="rect">
+            <a:avLst/>
+          </a:prstGeom>
+          <a:noFill/>
+        </p:spPr>
+        <p:txBody>
+          <a:bodyPr wrap="square" anchor="t" lIns="45720" tIns="22860" rIns="45720" bIns="22860"/>
           <a:lstStyle/>
           <a:p>
             <a:pPr algn="ctr"/>
@@ -4929,8 +5125,9 @@
                 <a:solidFill>
                   <a:srgbClr val="475569"/>
                 </a:solidFill>
-              </a:rPr>
-              <a:t>Mechanism recorded</a:t>
+                <a:latin typeface="Calibri" pitchFamily="34" charset="0"/>
+              </a:rPr>
+              <a:t xml:space="preserve">Mechanism recorded</a:t>
             </a:r>
           </a:p>
         </p:txBody>
@@ -4947,7 +5144,9 @@
             <a:ext cx="2500000" cy="1280000"/>
           </a:xfrm>
           <a:prstGeom prst="roundRect">
-            <a:avLst/>
+            <a:avLst>
+              <a:gd name="adj" fmla="val 6000"/>
+            </a:avLst>
           </a:prstGeom>
           <a:solidFill>
             <a:srgbClr val="F8FAFC"/>
@@ -4975,15 +5174,15 @@
         <p:spPr>
           <a:xfrm>
             <a:off x="8520000" y="1780000"/>
-            <a:ext cx="2500000" cy="700000"/>
-          </a:xfrm>
-          <a:prstGeom prst="rect">
-            <a:avLst/>
-          </a:prstGeom>
-          <a:noFill/>
-        </p:spPr>
-        <p:txBody>
-          <a:bodyPr wrap="square" anchor="t"/>
+            <a:ext cx="2500000" cy="640000"/>
+          </a:xfrm>
+          <a:prstGeom prst="rect">
+            <a:avLst/>
+          </a:prstGeom>
+          <a:noFill/>
+        </p:spPr>
+        <p:txBody>
+          <a:bodyPr wrap="square" anchor="t" lIns="45720" tIns="22860" rIns="45720" bIns="22860"/>
           <a:lstStyle/>
           <a:p>
             <a:pPr algn="ctr"/>
@@ -4992,8 +5191,9 @@
                 <a:solidFill>
                   <a:srgbClr val="0F172A"/>
                 </a:solidFill>
-              </a:rPr>
-              <a:t>None invented</a:t>
+                <a:latin typeface="Calibri" pitchFamily="34" charset="0"/>
+              </a:rPr>
+              <a:t xml:space="preserve">None</a:t>
             </a:r>
           </a:p>
         </p:txBody>
@@ -5006,16 +5206,16 @@
         </p:nvSpPr>
         <p:spPr>
           <a:xfrm>
-            <a:off x="8520000" y="2480000"/>
-            <a:ext cx="2500000" cy="360000"/>
-          </a:xfrm>
-          <a:prstGeom prst="rect">
-            <a:avLst/>
-          </a:prstGeom>
-          <a:noFill/>
-        </p:spPr>
-        <p:txBody>
-          <a:bodyPr wrap="square" anchor="t"/>
+            <a:off x="8520000" y="2420000"/>
+            <a:ext cx="2500000" cy="420000"/>
+          </a:xfrm>
+          <a:prstGeom prst="rect">
+            <a:avLst/>
+          </a:prstGeom>
+          <a:noFill/>
+        </p:spPr>
+        <p:txBody>
+          <a:bodyPr wrap="square" anchor="t" lIns="45720" tIns="22860" rIns="45720" bIns="22860"/>
           <a:lstStyle/>
           <a:p>
             <a:pPr algn="ctr"/>
@@ -5024,8 +5224,9 @@
                 <a:solidFill>
                   <a:srgbClr val="475569"/>
                 </a:solidFill>
-              </a:rPr>
-              <a:t>Lawfulness finding</a:t>
+                <a:latin typeface="Calibri" pitchFamily="34" charset="0"/>
+              </a:rPr>
+              <a:t xml:space="preserve">Lawfulness claimed</a:t>
             </a:r>
           </a:p>
         </p:txBody>
@@ -5039,25 +5240,26 @@
         <p:spPr>
           <a:xfrm>
             <a:off x="420000" y="3200000"/>
-            <a:ext cx="11000000" cy="360000"/>
-          </a:xfrm>
-          <a:prstGeom prst="rect">
-            <a:avLst/>
-          </a:prstGeom>
-          <a:noFill/>
-        </p:spPr>
-        <p:txBody>
-          <a:bodyPr wrap="square" anchor="t"/>
+            <a:ext cx="11300000" cy="420000"/>
+          </a:xfrm>
+          <a:prstGeom prst="rect">
+            <a:avLst/>
+          </a:prstGeom>
+          <a:noFill/>
+        </p:spPr>
+        <p:txBody>
+          <a:bodyPr wrap="square" anchor="t" lIns="45720" tIns="22860" rIns="45720" bIns="22860"/>
           <a:lstStyle/>
           <a:p>
             <a:pPr algn="l"/>
             <a:r>
-              <a:rPr lang="en-US" sz="1400" b="0" dirty="0">
+              <a:rPr lang="en-US" sz="1300" b="0" dirty="0">
                 <a:solidFill>
                   <a:srgbClr val="0F172A"/>
                 </a:solidFill>
-              </a:rPr>
-              <a:t>XFR-00001  US-NY → IE  ·  Scc  ·  Review Required</a:t>
+                <a:latin typeface="Calibri" pitchFamily="34" charset="0"/>
+              </a:rPr>
+              <a:t xml:space="preserve">XFR-00001 US-NY to IE · Scc · Review Required</a:t>
             </a:r>
           </a:p>
         </p:txBody>
@@ -5070,26 +5272,27 @@
         </p:nvSpPr>
         <p:spPr>
           <a:xfrm>
-            <a:off x="420000" y="3580000"/>
-            <a:ext cx="11000000" cy="360000"/>
-          </a:xfrm>
-          <a:prstGeom prst="rect">
-            <a:avLst/>
-          </a:prstGeom>
-          <a:noFill/>
-        </p:spPr>
-        <p:txBody>
-          <a:bodyPr wrap="square" anchor="t"/>
+            <a:off x="420000" y="3660000"/>
+            <a:ext cx="11300000" cy="420000"/>
+          </a:xfrm>
+          <a:prstGeom prst="rect">
+            <a:avLst/>
+          </a:prstGeom>
+          <a:noFill/>
+        </p:spPr>
+        <p:txBody>
+          <a:bodyPr wrap="square" anchor="t" lIns="45720" tIns="22860" rIns="45720" bIns="22860"/>
           <a:lstStyle/>
           <a:p>
             <a:pPr algn="l"/>
             <a:r>
-              <a:rPr lang="en-US" sz="1400" b="0" dirty="0">
+              <a:rPr lang="en-US" sz="1300" b="0" dirty="0">
                 <a:solidFill>
                   <a:srgbClr val="0F172A"/>
                 </a:solidFill>
-              </a:rPr>
-              <a:t>XFR-00002  US-NY → IE  ·  Scc  ·  Review Required</a:t>
+                <a:latin typeface="Calibri" pitchFamily="34" charset="0"/>
+              </a:rPr>
+              <a:t xml:space="preserve">XFR-00002 US-NY to IE · Scc · Review Required</a:t>
             </a:r>
           </a:p>
         </p:txBody>
@@ -5102,26 +5305,60 @@
         </p:nvSpPr>
         <p:spPr>
           <a:xfrm>
-            <a:off x="420000" y="3960000"/>
-            <a:ext cx="11000000" cy="360000"/>
-          </a:xfrm>
-          <a:prstGeom prst="rect">
-            <a:avLst/>
-          </a:prstGeom>
-          <a:noFill/>
-        </p:spPr>
-        <p:txBody>
-          <a:bodyPr wrap="square" anchor="t"/>
+            <a:off x="420000" y="4120000"/>
+            <a:ext cx="11300000" cy="420000"/>
+          </a:xfrm>
+          <a:prstGeom prst="rect">
+            <a:avLst/>
+          </a:prstGeom>
+          <a:noFill/>
+        </p:spPr>
+        <p:txBody>
+          <a:bodyPr wrap="square" anchor="t" lIns="45720" tIns="22860" rIns="45720" bIns="22860"/>
           <a:lstStyle/>
           <a:p>
             <a:pPr algn="l"/>
             <a:r>
-              <a:rPr lang="en-US" sz="1400" b="0" dirty="0">
+              <a:rPr lang="en-US" sz="1300" b="0" dirty="0">
                 <a:solidFill>
                   <a:srgbClr val="0F172A"/>
                 </a:solidFill>
-              </a:rPr>
-              <a:t>XFR-00003  US-NY → IE  ·  Scc  ·  Review Required</a:t>
+                <a:latin typeface="Calibri" pitchFamily="34" charset="0"/>
+              </a:rPr>
+              <a:t xml:space="preserve">XFR-00003 US-NY to IE · Scc · Review Required</a:t>
+            </a:r>
+          </a:p>
+        </p:txBody>
+      </p:sp>
+      <p:sp>
+        <p:nvSpPr>
+          <p:cNvPr id="63" name="t63"/>
+          <p:cNvSpPr txBox="1"/>
+          <p:nvPr/>
+        </p:nvSpPr>
+        <p:spPr>
+          <a:xfrm>
+            <a:off x="420000" y="4580000"/>
+            <a:ext cx="11300000" cy="420000"/>
+          </a:xfrm>
+          <a:prstGeom prst="rect">
+            <a:avLst/>
+          </a:prstGeom>
+          <a:noFill/>
+        </p:spPr>
+        <p:txBody>
+          <a:bodyPr wrap="square" anchor="t" lIns="45720" tIns="22860" rIns="45720" bIns="22860"/>
+          <a:lstStyle/>
+          <a:p>
+            <a:pPr algn="l"/>
+            <a:r>
+              <a:rPr lang="en-US" sz="1300" b="0" dirty="0">
+                <a:solidFill>
+                  <a:srgbClr val="0F172A"/>
+                </a:solidFill>
+                <a:latin typeface="Calibri" pitchFamily="34" charset="0"/>
+              </a:rPr>
+              <a:t xml:space="preserve">XFR-00004 US-NY to IE · Scc · Review Required</a:t>
             </a:r>
           </a:p>
         </p:txBody>
@@ -5138,7 +5375,9 @@
             <a:ext cx="12192000" cy="340000"/>
           </a:xfrm>
           <a:prstGeom prst="roundRect">
-            <a:avLst/>
+            <a:avLst>
+              <a:gd name="adj" fmla="val 6000"/>
+            </a:avLst>
           </a:prstGeom>
           <a:solidFill>
             <a:srgbClr val="F1F5F9"/>
@@ -5172,7 +5411,7 @@
           <a:noFill/>
         </p:spPr>
         <p:txBody>
-          <a:bodyPr wrap="square" anchor="t"/>
+          <a:bodyPr wrap="square" anchor="t" lIns="45720" tIns="22860" rIns="45720" bIns="22860"/>
           <a:lstStyle/>
           <a:p>
             <a:pPr algn="l"/>
@@ -5181,8 +5420,9 @@
                 <a:solidFill>
                   <a:srgbClr val="64748B"/>
                 </a:solidFill>
-              </a:rPr>
-              <a:t>Supreme Privacy Board Report  ·  Confidential  ·  Not legal advice</a:t>
+                <a:latin typeface="Calibri" pitchFamily="34" charset="0"/>
+              </a:rPr>
+              <a:t xml:space="preserve">Supreme Privacy Board Report · Confidential · Not legal advice</a:t>
             </a:r>
           </a:p>
         </p:txBody>
@@ -5204,7 +5444,7 @@
           <a:noFill/>
         </p:spPr>
         <p:txBody>
-          <a:bodyPr wrap="square" anchor="t"/>
+          <a:bodyPr wrap="square" anchor="t" lIns="45720" tIns="22860" rIns="45720" bIns="22860"/>
           <a:lstStyle/>
           <a:p>
             <a:pPr algn="r"/>
@@ -5213,8 +5453,9 @@
                 <a:solidFill>
                   <a:srgbClr val="64748B"/>
                 </a:solidFill>
-              </a:rPr>
-              <a:t>5 / 12</a:t>
+                <a:latin typeface="Calibri" pitchFamily="34" charset="0"/>
+              </a:rPr>
+              <a:t xml:space="preserve">5 / 12</a:t>
             </a:r>
           </a:p>
         </p:txBody>
@@ -5256,7 +5497,9 @@
             <a:ext cx="12192000" cy="1180000"/>
           </a:xfrm>
           <a:prstGeom prst="roundRect">
-            <a:avLst/>
+            <a:avLst>
+              <a:gd name="adj" fmla="val 6000"/>
+            </a:avLst>
           </a:prstGeom>
           <a:solidFill>
             <a:srgbClr val="0F172A"/>
@@ -5285,7 +5528,9 @@
             <a:ext cx="12192000" cy="50000"/>
           </a:xfrm>
           <a:prstGeom prst="roundRect">
-            <a:avLst/>
+            <a:avLst>
+              <a:gd name="adj" fmla="val 6000"/>
+            </a:avLst>
           </a:prstGeom>
           <a:solidFill>
             <a:srgbClr val="C5A46E"/>
@@ -5319,7 +5564,7 @@
           <a:noFill/>
         </p:spPr>
         <p:txBody>
-          <a:bodyPr wrap="square" anchor="t"/>
+          <a:bodyPr wrap="square" anchor="t" lIns="45720" tIns="22860" rIns="45720" bIns="22860"/>
           <a:lstStyle/>
           <a:p>
             <a:pPr algn="l"/>
@@ -5328,8 +5573,9 @@
                 <a:solidFill>
                   <a:srgbClr val="FFFFFF"/>
                 </a:solidFill>
-              </a:rPr>
-              <a:t>Rights-request posture</a:t>
+                <a:latin typeface="Calibri" pitchFamily="34" charset="0"/>
+              </a:rPr>
+              <a:t xml:space="preserve">Rights-request posture</a:t>
             </a:r>
           </a:p>
         </p:txBody>
@@ -5351,7 +5597,7 @@
           <a:noFill/>
         </p:spPr>
         <p:txBody>
-          <a:bodyPr wrap="square" anchor="t"/>
+          <a:bodyPr wrap="square" anchor="t" lIns="45720" tIns="22860" rIns="45720" bIns="22860"/>
           <a:lstStyle/>
           <a:p>
             <a:pPr algn="l"/>
@@ -5360,8 +5606,9 @@
                 <a:solidFill>
                   <a:srgbClr val="CBD5E1"/>
                 </a:solidFill>
-              </a:rPr>
-              <a:t>Requester identity is withheld from this board view.</a:t>
+                <a:latin typeface="Calibri" pitchFamily="34" charset="0"/>
+              </a:rPr>
+              <a:t xml:space="preserve">Requester identity is withheld from this board view.</a:t>
             </a:r>
           </a:p>
         </p:txBody>
@@ -5378,7 +5625,9 @@
             <a:ext cx="2500000" cy="1280000"/>
           </a:xfrm>
           <a:prstGeom prst="roundRect">
-            <a:avLst/>
+            <a:avLst>
+              <a:gd name="adj" fmla="val 6000"/>
+            </a:avLst>
           </a:prstGeom>
           <a:solidFill>
             <a:srgbClr val="F8FAFC"/>
@@ -5406,15 +5655,15 @@
         <p:spPr>
           <a:xfrm>
             <a:off x="420000" y="1780000"/>
-            <a:ext cx="2500000" cy="700000"/>
-          </a:xfrm>
-          <a:prstGeom prst="rect">
-            <a:avLst/>
-          </a:prstGeom>
-          <a:noFill/>
-        </p:spPr>
-        <p:txBody>
-          <a:bodyPr wrap="square" anchor="t"/>
+            <a:ext cx="2500000" cy="640000"/>
+          </a:xfrm>
+          <a:prstGeom prst="rect">
+            <a:avLst/>
+          </a:prstGeom>
+          <a:noFill/>
+        </p:spPr>
+        <p:txBody>
+          <a:bodyPr wrap="square" anchor="t" lIns="45720" tIns="22860" rIns="45720" bIns="22860"/>
           <a:lstStyle/>
           <a:p>
             <a:pPr algn="ctr"/>
@@ -5423,8 +5672,9 @@
                 <a:solidFill>
                   <a:srgbClr val="0F172A"/>
                 </a:solidFill>
-              </a:rPr>
-              <a:t>3</a:t>
+                <a:latin typeface="Calibri" pitchFamily="34" charset="0"/>
+              </a:rPr>
+              <a:t xml:space="preserve">4</a:t>
             </a:r>
           </a:p>
         </p:txBody>
@@ -5437,16 +5687,16 @@
         </p:nvSpPr>
         <p:spPr>
           <a:xfrm>
-            <a:off x="420000" y="2480000"/>
-            <a:ext cx="2500000" cy="360000"/>
-          </a:xfrm>
-          <a:prstGeom prst="rect">
-            <a:avLst/>
-          </a:prstGeom>
-          <a:noFill/>
-        </p:spPr>
-        <p:txBody>
-          <a:bodyPr wrap="square" anchor="t"/>
+            <a:off x="420000" y="2420000"/>
+            <a:ext cx="2500000" cy="420000"/>
+          </a:xfrm>
+          <a:prstGeom prst="rect">
+            <a:avLst/>
+          </a:prstGeom>
+          <a:noFill/>
+        </p:spPr>
+        <p:txBody>
+          <a:bodyPr wrap="square" anchor="t" lIns="45720" tIns="22860" rIns="45720" bIns="22860"/>
           <a:lstStyle/>
           <a:p>
             <a:pPr algn="ctr"/>
@@ -5455,8 +5705,9 @@
                 <a:solidFill>
                   <a:srgbClr val="475569"/>
                 </a:solidFill>
-              </a:rPr>
-              <a:t>Open requests</a:t>
+                <a:latin typeface="Calibri" pitchFamily="34" charset="0"/>
+              </a:rPr>
+              <a:t xml:space="preserve">Open requests</a:t>
             </a:r>
           </a:p>
         </p:txBody>
@@ -5473,7 +5724,9 @@
             <a:ext cx="2500000" cy="1280000"/>
           </a:xfrm>
           <a:prstGeom prst="roundRect">
-            <a:avLst/>
+            <a:avLst>
+              <a:gd name="adj" fmla="val 6000"/>
+            </a:avLst>
           </a:prstGeom>
           <a:solidFill>
             <a:srgbClr val="F8FAFC"/>
@@ -5501,15 +5754,15 @@
         <p:spPr>
           <a:xfrm>
             <a:off x="3120000" y="1780000"/>
-            <a:ext cx="2500000" cy="700000"/>
-          </a:xfrm>
-          <a:prstGeom prst="rect">
-            <a:avLst/>
-          </a:prstGeom>
-          <a:noFill/>
-        </p:spPr>
-        <p:txBody>
-          <a:bodyPr wrap="square" anchor="t"/>
+            <a:ext cx="2500000" cy="640000"/>
+          </a:xfrm>
+          <a:prstGeom prst="rect">
+            <a:avLst/>
+          </a:prstGeom>
+          <a:noFill/>
+        </p:spPr>
+        <p:txBody>
+          <a:bodyPr wrap="square" anchor="t" lIns="45720" tIns="22860" rIns="45720" bIns="22860"/>
           <a:lstStyle/>
           <a:p>
             <a:pPr algn="ctr"/>
@@ -5518,8 +5771,9 @@
                 <a:solidFill>
                   <a:srgbClr val="0F172A"/>
                 </a:solidFill>
-              </a:rPr>
-              <a:t>0</a:t>
+                <a:latin typeface="Calibri" pitchFamily="34" charset="0"/>
+              </a:rPr>
+              <a:t xml:space="preserve">0</a:t>
             </a:r>
           </a:p>
         </p:txBody>
@@ -5532,16 +5786,16 @@
         </p:nvSpPr>
         <p:spPr>
           <a:xfrm>
-            <a:off x="3120000" y="2480000"/>
-            <a:ext cx="2500000" cy="360000"/>
-          </a:xfrm>
-          <a:prstGeom prst="rect">
-            <a:avLst/>
-          </a:prstGeom>
-          <a:noFill/>
-        </p:spPr>
-        <p:txBody>
-          <a:bodyPr wrap="square" anchor="t"/>
+            <a:off x="3120000" y="2420000"/>
+            <a:ext cx="2500000" cy="420000"/>
+          </a:xfrm>
+          <a:prstGeom prst="rect">
+            <a:avLst/>
+          </a:prstGeom>
+          <a:noFill/>
+        </p:spPr>
+        <p:txBody>
+          <a:bodyPr wrap="square" anchor="t" lIns="45720" tIns="22860" rIns="45720" bIns="22860"/>
           <a:lstStyle/>
           <a:p>
             <a:pPr algn="ctr"/>
@@ -5550,8 +5804,9 @@
                 <a:solidFill>
                   <a:srgbClr val="475569"/>
                 </a:solidFill>
-              </a:rPr>
-              <a:t>Overdue (configured)</a:t>
+                <a:latin typeface="Calibri" pitchFamily="34" charset="0"/>
+              </a:rPr>
+              <a:t xml:space="preserve">Overdue (configured)</a:t>
             </a:r>
           </a:p>
         </p:txBody>
@@ -5568,7 +5823,9 @@
             <a:ext cx="2500000" cy="1280000"/>
           </a:xfrm>
           <a:prstGeom prst="roundRect">
-            <a:avLst/>
+            <a:avLst>
+              <a:gd name="adj" fmla="val 6000"/>
+            </a:avLst>
           </a:prstGeom>
           <a:solidFill>
             <a:srgbClr val="F8FAFC"/>
@@ -5596,15 +5853,15 @@
         <p:spPr>
           <a:xfrm>
             <a:off x="5820000" y="1780000"/>
-            <a:ext cx="2500000" cy="700000"/>
-          </a:xfrm>
-          <a:prstGeom prst="rect">
-            <a:avLst/>
-          </a:prstGeom>
-          <a:noFill/>
-        </p:spPr>
-        <p:txBody>
-          <a:bodyPr wrap="square" anchor="t"/>
+            <a:ext cx="2500000" cy="640000"/>
+          </a:xfrm>
+          <a:prstGeom prst="rect">
+            <a:avLst/>
+          </a:prstGeom>
+          <a:noFill/>
+        </p:spPr>
+        <p:txBody>
+          <a:bodyPr wrap="square" anchor="t" lIns="45720" tIns="22860" rIns="45720" bIns="22860"/>
           <a:lstStyle/>
           <a:p>
             <a:pPr algn="ctr"/>
@@ -5613,8 +5870,9 @@
                 <a:solidFill>
                   <a:srgbClr val="0F172A"/>
                 </a:solidFill>
-              </a:rPr>
-              <a:t>3</a:t>
+                <a:latin typeface="Calibri" pitchFamily="34" charset="0"/>
+              </a:rPr>
+              <a:t xml:space="preserve">4</a:t>
             </a:r>
           </a:p>
         </p:txBody>
@@ -5627,16 +5885,16 @@
         </p:nvSpPr>
         <p:spPr>
           <a:xfrm>
-            <a:off x="5820000" y="2480000"/>
-            <a:ext cx="2500000" cy="360000"/>
-          </a:xfrm>
-          <a:prstGeom prst="rect">
-            <a:avLst/>
-          </a:prstGeom>
-          <a:noFill/>
-        </p:spPr>
-        <p:txBody>
-          <a:bodyPr wrap="square" anchor="t"/>
+            <a:off x="5820000" y="2420000"/>
+            <a:ext cx="2500000" cy="420000"/>
+          </a:xfrm>
+          <a:prstGeom prst="rect">
+            <a:avLst/>
+          </a:prstGeom>
+          <a:noFill/>
+        </p:spPr>
+        <p:txBody>
+          <a:bodyPr wrap="square" anchor="t" lIns="45720" tIns="22860" rIns="45720" bIns="22860"/>
           <a:lstStyle/>
           <a:p>
             <a:pPr algn="ctr"/>
@@ -5645,8 +5903,9 @@
                 <a:solidFill>
                   <a:srgbClr val="475569"/>
                 </a:solidFill>
-              </a:rPr>
-              <a:t>Recorded requests</a:t>
+                <a:latin typeface="Calibri" pitchFamily="34" charset="0"/>
+              </a:rPr>
+              <a:t xml:space="preserve">Recorded requests</a:t>
             </a:r>
           </a:p>
         </p:txBody>
@@ -5663,7 +5922,9 @@
             <a:ext cx="2500000" cy="1280000"/>
           </a:xfrm>
           <a:prstGeom prst="roundRect">
-            <a:avLst/>
+            <a:avLst>
+              <a:gd name="adj" fmla="val 6000"/>
+            </a:avLst>
           </a:prstGeom>
           <a:solidFill>
             <a:srgbClr val="F8FAFC"/>
@@ -5691,25 +5952,26 @@
         <p:spPr>
           <a:xfrm>
             <a:off x="8520000" y="1780000"/>
-            <a:ext cx="2500000" cy="700000"/>
-          </a:xfrm>
-          <a:prstGeom prst="rect">
-            <a:avLst/>
-          </a:prstGeom>
-          <a:noFill/>
-        </p:spPr>
-        <p:txBody>
-          <a:bodyPr wrap="square" anchor="t"/>
+            <a:ext cx="2500000" cy="640000"/>
+          </a:xfrm>
+          <a:prstGeom prst="rect">
+            <a:avLst/>
+          </a:prstGeom>
+          <a:noFill/>
+        </p:spPr>
+        <p:txBody>
+          <a:bodyPr wrap="square" anchor="t" lIns="45720" tIns="22860" rIns="45720" bIns="22860"/>
           <a:lstStyle/>
           <a:p>
             <a:pPr algn="ctr"/>
             <a:r>
-              <a:rPr lang="en-US" sz="2800" b="1" dirty="0">
+              <a:rPr lang="en-US" sz="2000" b="1" dirty="0">
                 <a:solidFill>
                   <a:srgbClr val="0F172A"/>
                 </a:solidFill>
-              </a:rPr>
-              <a:t>Configured</a:t>
+                <a:latin typeface="Calibri" pitchFamily="34" charset="0"/>
+              </a:rPr>
+              <a:t xml:space="preserve">Configured</a:t>
             </a:r>
           </a:p>
         </p:txBody>
@@ -5722,16 +5984,16 @@
         </p:nvSpPr>
         <p:spPr>
           <a:xfrm>
-            <a:off x="8520000" y="2480000"/>
-            <a:ext cx="2500000" cy="360000"/>
-          </a:xfrm>
-          <a:prstGeom prst="rect">
-            <a:avLst/>
-          </a:prstGeom>
-          <a:noFill/>
-        </p:spPr>
-        <p:txBody>
-          <a:bodyPr wrap="square" anchor="t"/>
+            <a:off x="8520000" y="2420000"/>
+            <a:ext cx="2500000" cy="420000"/>
+          </a:xfrm>
+          <a:prstGeom prst="rect">
+            <a:avLst/>
+          </a:prstGeom>
+          <a:noFill/>
+        </p:spPr>
+        <p:txBody>
+          <a:bodyPr wrap="square" anchor="t" lIns="45720" tIns="22860" rIns="45720" bIns="22860"/>
           <a:lstStyle/>
           <a:p>
             <a:pPr algn="ctr"/>
@@ -5740,8 +6002,9 @@
                 <a:solidFill>
                   <a:srgbClr val="475569"/>
                 </a:solidFill>
-              </a:rPr>
-              <a:t>Deadline model</a:t>
+                <a:latin typeface="Calibri" pitchFamily="34" charset="0"/>
+              </a:rPr>
+              <a:t xml:space="preserve">Deadline model</a:t>
             </a:r>
           </a:p>
         </p:txBody>
@@ -5755,25 +6018,26 @@
         <p:spPr>
           <a:xfrm>
             <a:off x="420000" y="3200000"/>
-            <a:ext cx="11000000" cy="360000"/>
-          </a:xfrm>
-          <a:prstGeom prst="rect">
-            <a:avLst/>
-          </a:prstGeom>
-          <a:noFill/>
-        </p:spPr>
-        <p:txBody>
-          <a:bodyPr wrap="square" anchor="t"/>
+            <a:ext cx="11300000" cy="420000"/>
+          </a:xfrm>
+          <a:prstGeom prst="rect">
+            <a:avLst/>
+          </a:prstGeom>
+          <a:noFill/>
+        </p:spPr>
+        <p:txBody>
+          <a:bodyPr wrap="square" anchor="t" lIns="45720" tIns="22860" rIns="45720" bIns="22860"/>
           <a:lstStyle/>
           <a:p>
             <a:pPr algn="l"/>
             <a:r>
-              <a:rPr lang="en-US" sz="1400" b="0" dirty="0">
+              <a:rPr lang="en-US" sz="1300" b="0" dirty="0">
                 <a:solidFill>
                   <a:srgbClr val="0F172A"/>
                 </a:solidFill>
-              </a:rPr>
-              <a:t>DSR-00001  Access  ·  Received  ·  configured due 2026-10-13</a:t>
+                <a:latin typeface="Calibri" pitchFamily="34" charset="0"/>
+              </a:rPr>
+              <a:t xml:space="preserve">DSR-00001 Access · Received · configured due 2026-10-13</a:t>
             </a:r>
           </a:p>
         </p:txBody>
@@ -5786,26 +6050,27 @@
         </p:nvSpPr>
         <p:spPr>
           <a:xfrm>
-            <a:off x="420000" y="3580000"/>
-            <a:ext cx="11000000" cy="360000"/>
-          </a:xfrm>
-          <a:prstGeom prst="rect">
-            <a:avLst/>
-          </a:prstGeom>
-          <a:noFill/>
-        </p:spPr>
-        <p:txBody>
-          <a:bodyPr wrap="square" anchor="t"/>
+            <a:off x="420000" y="3660000"/>
+            <a:ext cx="11300000" cy="420000"/>
+          </a:xfrm>
+          <a:prstGeom prst="rect">
+            <a:avLst/>
+          </a:prstGeom>
+          <a:noFill/>
+        </p:spPr>
+        <p:txBody>
+          <a:bodyPr wrap="square" anchor="t" lIns="45720" tIns="22860" rIns="45720" bIns="22860"/>
           <a:lstStyle/>
           <a:p>
             <a:pPr algn="l"/>
             <a:r>
-              <a:rPr lang="en-US" sz="1400" b="0" dirty="0">
+              <a:rPr lang="en-US" sz="1300" b="0" dirty="0">
                 <a:solidFill>
                   <a:srgbClr val="0F172A"/>
                 </a:solidFill>
-              </a:rPr>
-              <a:t>DSR-00002  Access  ·  Received  ·  configured due 2026-10-13</a:t>
+                <a:latin typeface="Calibri" pitchFamily="34" charset="0"/>
+              </a:rPr>
+              <a:t xml:space="preserve">DSR-00002 Access · Received · configured due 2026-10-13</a:t>
             </a:r>
           </a:p>
         </p:txBody>
@@ -5818,26 +6083,60 @@
         </p:nvSpPr>
         <p:spPr>
           <a:xfrm>
-            <a:off x="420000" y="3960000"/>
-            <a:ext cx="11000000" cy="360000"/>
-          </a:xfrm>
-          <a:prstGeom prst="rect">
-            <a:avLst/>
-          </a:prstGeom>
-          <a:noFill/>
-        </p:spPr>
-        <p:txBody>
-          <a:bodyPr wrap="square" anchor="t"/>
+            <a:off x="420000" y="4120000"/>
+            <a:ext cx="11300000" cy="420000"/>
+          </a:xfrm>
+          <a:prstGeom prst="rect">
+            <a:avLst/>
+          </a:prstGeom>
+          <a:noFill/>
+        </p:spPr>
+        <p:txBody>
+          <a:bodyPr wrap="square" anchor="t" lIns="45720" tIns="22860" rIns="45720" bIns="22860"/>
           <a:lstStyle/>
           <a:p>
             <a:pPr algn="l"/>
             <a:r>
-              <a:rPr lang="en-US" sz="1400" b="0" dirty="0">
+              <a:rPr lang="en-US" sz="1300" b="0" dirty="0">
                 <a:solidFill>
                   <a:srgbClr val="0F172A"/>
                 </a:solidFill>
-              </a:rPr>
-              <a:t>DSR-00003  Access  ·  Received  ·  configured due 2026-10-13</a:t>
+                <a:latin typeface="Calibri" pitchFamily="34" charset="0"/>
+              </a:rPr>
+              <a:t xml:space="preserve">DSR-00003 Access · Received · configured due 2026-10-13</a:t>
+            </a:r>
+          </a:p>
+        </p:txBody>
+      </p:sp>
+      <p:sp>
+        <p:nvSpPr>
+          <p:cNvPr id="63" name="t63"/>
+          <p:cNvSpPr txBox="1"/>
+          <p:nvPr/>
+        </p:nvSpPr>
+        <p:spPr>
+          <a:xfrm>
+            <a:off x="420000" y="4580000"/>
+            <a:ext cx="11300000" cy="420000"/>
+          </a:xfrm>
+          <a:prstGeom prst="rect">
+            <a:avLst/>
+          </a:prstGeom>
+          <a:noFill/>
+        </p:spPr>
+        <p:txBody>
+          <a:bodyPr wrap="square" anchor="t" lIns="45720" tIns="22860" rIns="45720" bIns="22860"/>
+          <a:lstStyle/>
+          <a:p>
+            <a:pPr algn="l"/>
+            <a:r>
+              <a:rPr lang="en-US" sz="1300" b="0" dirty="0">
+                <a:solidFill>
+                  <a:srgbClr val="0F172A"/>
+                </a:solidFill>
+                <a:latin typeface="Calibri" pitchFamily="34" charset="0"/>
+              </a:rPr>
+              <a:t xml:space="preserve">DSR-00004 Access · Received · configured due 2026-10-13</a:t>
             </a:r>
           </a:p>
         </p:txBody>
@@ -5854,7 +6153,9 @@
             <a:ext cx="12192000" cy="340000"/>
           </a:xfrm>
           <a:prstGeom prst="roundRect">
-            <a:avLst/>
+            <a:avLst>
+              <a:gd name="adj" fmla="val 6000"/>
+            </a:avLst>
           </a:prstGeom>
           <a:solidFill>
             <a:srgbClr val="F1F5F9"/>
@@ -5888,7 +6189,7 @@
           <a:noFill/>
         </p:spPr>
         <p:txBody>
-          <a:bodyPr wrap="square" anchor="t"/>
+          <a:bodyPr wrap="square" anchor="t" lIns="45720" tIns="22860" rIns="45720" bIns="22860"/>
           <a:lstStyle/>
           <a:p>
             <a:pPr algn="l"/>
@@ -5897,8 +6198,9 @@
                 <a:solidFill>
                   <a:srgbClr val="64748B"/>
                 </a:solidFill>
-              </a:rPr>
-              <a:t>Supreme Privacy Board Report  ·  Confidential  ·  Not legal advice</a:t>
+                <a:latin typeface="Calibri" pitchFamily="34" charset="0"/>
+              </a:rPr>
+              <a:t xml:space="preserve">Supreme Privacy Board Report · Confidential · Not legal advice</a:t>
             </a:r>
           </a:p>
         </p:txBody>
@@ -5920,7 +6222,7 @@
           <a:noFill/>
         </p:spPr>
         <p:txBody>
-          <a:bodyPr wrap="square" anchor="t"/>
+          <a:bodyPr wrap="square" anchor="t" lIns="45720" tIns="22860" rIns="45720" bIns="22860"/>
           <a:lstStyle/>
           <a:p>
             <a:pPr algn="r"/>
@@ -5929,8 +6231,9 @@
                 <a:solidFill>
                   <a:srgbClr val="64748B"/>
                 </a:solidFill>
-              </a:rPr>
-              <a:t>6 / 12</a:t>
+                <a:latin typeface="Calibri" pitchFamily="34" charset="0"/>
+              </a:rPr>
+              <a:t xml:space="preserve">6 / 12</a:t>
             </a:r>
           </a:p>
         </p:txBody>
@@ -5972,7 +6275,9 @@
             <a:ext cx="12192000" cy="1180000"/>
           </a:xfrm>
           <a:prstGeom prst="roundRect">
-            <a:avLst/>
+            <a:avLst>
+              <a:gd name="adj" fmla="val 6000"/>
+            </a:avLst>
           </a:prstGeom>
           <a:solidFill>
             <a:srgbClr val="0F172A"/>
@@ -6001,7 +6306,9 @@
             <a:ext cx="12192000" cy="50000"/>
           </a:xfrm>
           <a:prstGeom prst="roundRect">
-            <a:avLst/>
+            <a:avLst>
+              <a:gd name="adj" fmla="val 6000"/>
+            </a:avLst>
           </a:prstGeom>
           <a:solidFill>
             <a:srgbClr val="C5A46E"/>
@@ -6035,7 +6342,7 @@
           <a:noFill/>
         </p:spPr>
         <p:txBody>
-          <a:bodyPr wrap="square" anchor="t"/>
+          <a:bodyPr wrap="square" anchor="t" lIns="45720" tIns="22860" rIns="45720" bIns="22860"/>
           <a:lstStyle/>
           <a:p>
             <a:pPr algn="l"/>
@@ -6044,8 +6351,9 @@
                 <a:solidFill>
                   <a:srgbClr val="FFFFFF"/>
                 </a:solidFill>
-              </a:rPr>
-              <a:t>DPIA / assessment posture</a:t>
+                <a:latin typeface="Calibri" pitchFamily="34" charset="0"/>
+              </a:rPr>
+              <a:t xml:space="preserve">DPIA / assessment posture</a:t>
             </a:r>
           </a:p>
         </p:txBody>
@@ -6067,7 +6375,7 @@
           <a:noFill/>
         </p:spPr>
         <p:txBody>
-          <a:bodyPr wrap="square" anchor="t"/>
+          <a:bodyPr wrap="square" anchor="t" lIns="45720" tIns="22860" rIns="45720" bIns="22860"/>
           <a:lstStyle/>
           <a:p>
             <a:pPr algn="l"/>
@@ -6076,8 +6384,9 @@
                 <a:solidFill>
                   <a:srgbClr val="CBD5E1"/>
                 </a:solidFill>
-              </a:rPr>
-              <a:t>Screening recommends review. It does not say a DPIA is legally required.</a:t>
+                <a:latin typeface="Calibri" pitchFamily="34" charset="0"/>
+              </a:rPr>
+              <a:t xml:space="preserve">Screening recommends review. It does not say a DPIA is legally required.</a:t>
             </a:r>
           </a:p>
         </p:txBody>
@@ -6094,7 +6403,9 @@
             <a:ext cx="2500000" cy="1280000"/>
           </a:xfrm>
           <a:prstGeom prst="roundRect">
-            <a:avLst/>
+            <a:avLst>
+              <a:gd name="adj" fmla="val 6000"/>
+            </a:avLst>
           </a:prstGeom>
           <a:solidFill>
             <a:srgbClr val="F8FAFC"/>
@@ -6122,15 +6433,15 @@
         <p:spPr>
           <a:xfrm>
             <a:off x="420000" y="1780000"/>
-            <a:ext cx="2500000" cy="700000"/>
-          </a:xfrm>
-          <a:prstGeom prst="rect">
-            <a:avLst/>
-          </a:prstGeom>
-          <a:noFill/>
-        </p:spPr>
-        <p:txBody>
-          <a:bodyPr wrap="square" anchor="t"/>
+            <a:ext cx="2500000" cy="640000"/>
+          </a:xfrm>
+          <a:prstGeom prst="rect">
+            <a:avLst/>
+          </a:prstGeom>
+          <a:noFill/>
+        </p:spPr>
+        <p:txBody>
+          <a:bodyPr wrap="square" anchor="t" lIns="45720" tIns="22860" rIns="45720" bIns="22860"/>
           <a:lstStyle/>
           <a:p>
             <a:pPr algn="ctr"/>
@@ -6139,8 +6450,9 @@
                 <a:solidFill>
                   <a:srgbClr val="0F172A"/>
                 </a:solidFill>
-              </a:rPr>
-              <a:t>3</a:t>
+                <a:latin typeface="Calibri" pitchFamily="34" charset="0"/>
+              </a:rPr>
+              <a:t xml:space="preserve">4</a:t>
             </a:r>
           </a:p>
         </p:txBody>
@@ -6153,16 +6465,16 @@
         </p:nvSpPr>
         <p:spPr>
           <a:xfrm>
-            <a:off x="420000" y="2480000"/>
-            <a:ext cx="2500000" cy="360000"/>
-          </a:xfrm>
-          <a:prstGeom prst="rect">
-            <a:avLst/>
-          </a:prstGeom>
-          <a:noFill/>
-        </p:spPr>
-        <p:txBody>
-          <a:bodyPr wrap="square" anchor="t"/>
+            <a:off x="420000" y="2420000"/>
+            <a:ext cx="2500000" cy="420000"/>
+          </a:xfrm>
+          <a:prstGeom prst="rect">
+            <a:avLst/>
+          </a:prstGeom>
+          <a:noFill/>
+        </p:spPr>
+        <p:txBody>
+          <a:bodyPr wrap="square" anchor="t" lIns="45720" tIns="22860" rIns="45720" bIns="22860"/>
           <a:lstStyle/>
           <a:p>
             <a:pPr algn="ctr"/>
@@ -6171,8 +6483,9 @@
                 <a:solidFill>
                   <a:srgbClr val="475569"/>
                 </a:solidFill>
-              </a:rPr>
-              <a:t>DPIAs recorded</a:t>
+                <a:latin typeface="Calibri" pitchFamily="34" charset="0"/>
+              </a:rPr>
+              <a:t xml:space="preserve">DPIAs recorded</a:t>
             </a:r>
           </a:p>
         </p:txBody>
@@ -6189,7 +6502,9 @@
             <a:ext cx="2500000" cy="1280000"/>
           </a:xfrm>
           <a:prstGeom prst="roundRect">
-            <a:avLst/>
+            <a:avLst>
+              <a:gd name="adj" fmla="val 6000"/>
+            </a:avLst>
           </a:prstGeom>
           <a:solidFill>
             <a:srgbClr val="F8FAFC"/>
@@ -6217,15 +6532,15 @@
         <p:spPr>
           <a:xfrm>
             <a:off x="3120000" y="1780000"/>
-            <a:ext cx="2500000" cy="700000"/>
-          </a:xfrm>
-          <a:prstGeom prst="rect">
-            <a:avLst/>
-          </a:prstGeom>
-          <a:noFill/>
-        </p:spPr>
-        <p:txBody>
-          <a:bodyPr wrap="square" anchor="t"/>
+            <a:ext cx="2500000" cy="640000"/>
+          </a:xfrm>
+          <a:prstGeom prst="rect">
+            <a:avLst/>
+          </a:prstGeom>
+          <a:noFill/>
+        </p:spPr>
+        <p:txBody>
+          <a:bodyPr wrap="square" anchor="t" lIns="45720" tIns="22860" rIns="45720" bIns="22860"/>
           <a:lstStyle/>
           <a:p>
             <a:pPr algn="ctr"/>
@@ -6234,8 +6549,9 @@
                 <a:solidFill>
                   <a:srgbClr val="0F172A"/>
                 </a:solidFill>
-              </a:rPr>
-              <a:t>0</a:t>
+                <a:latin typeface="Calibri" pitchFamily="34" charset="0"/>
+              </a:rPr>
+              <a:t xml:space="preserve">0</a:t>
             </a:r>
           </a:p>
         </p:txBody>
@@ -6248,16 +6564,16 @@
         </p:nvSpPr>
         <p:spPr>
           <a:xfrm>
-            <a:off x="3120000" y="2480000"/>
-            <a:ext cx="2500000" cy="360000"/>
-          </a:xfrm>
-          <a:prstGeom prst="rect">
-            <a:avLst/>
-          </a:prstGeom>
-          <a:noFill/>
-        </p:spPr>
-        <p:txBody>
-          <a:bodyPr wrap="square" anchor="t"/>
+            <a:off x="3120000" y="2420000"/>
+            <a:ext cx="2500000" cy="420000"/>
+          </a:xfrm>
+          <a:prstGeom prst="rect">
+            <a:avLst/>
+          </a:prstGeom>
+          <a:noFill/>
+        </p:spPr>
+        <p:txBody>
+          <a:bodyPr wrap="square" anchor="t" lIns="45720" tIns="22860" rIns="45720" bIns="22860"/>
           <a:lstStyle/>
           <a:p>
             <a:pPr algn="ctr"/>
@@ -6266,8 +6582,9 @@
                 <a:solidFill>
                   <a:srgbClr val="475569"/>
                 </a:solidFill>
-              </a:rPr>
-              <a:t>DPIAs due</a:t>
+                <a:latin typeface="Calibri" pitchFamily="34" charset="0"/>
+              </a:rPr>
+              <a:t xml:space="preserve">DPIAs due</a:t>
             </a:r>
           </a:p>
         </p:txBody>
@@ -6284,7 +6601,9 @@
             <a:ext cx="2500000" cy="1280000"/>
           </a:xfrm>
           <a:prstGeom prst="roundRect">
-            <a:avLst/>
+            <a:avLst>
+              <a:gd name="adj" fmla="val 6000"/>
+            </a:avLst>
           </a:prstGeom>
           <a:solidFill>
             <a:srgbClr val="F8FAFC"/>
@@ -6312,15 +6631,15 @@
         <p:spPr>
           <a:xfrm>
             <a:off x="5820000" y="1780000"/>
-            <a:ext cx="2500000" cy="700000"/>
-          </a:xfrm>
-          <a:prstGeom prst="rect">
-            <a:avLst/>
-          </a:prstGeom>
-          <a:noFill/>
-        </p:spPr>
-        <p:txBody>
-          <a:bodyPr wrap="square" anchor="t"/>
+            <a:ext cx="2500000" cy="640000"/>
+          </a:xfrm>
+          <a:prstGeom prst="rect">
+            <a:avLst/>
+          </a:prstGeom>
+          <a:noFill/>
+        </p:spPr>
+        <p:txBody>
+          <a:bodyPr wrap="square" anchor="t" lIns="45720" tIns="22860" rIns="45720" bIns="22860"/>
           <a:lstStyle/>
           <a:p>
             <a:pPr algn="ctr"/>
@@ -6329,8 +6648,9 @@
                 <a:solidFill>
                   <a:srgbClr val="0F172A"/>
                 </a:solidFill>
-              </a:rPr>
-              <a:t>0</a:t>
+                <a:latin typeface="Calibri" pitchFamily="34" charset="0"/>
+              </a:rPr>
+              <a:t xml:space="preserve">0</a:t>
             </a:r>
           </a:p>
         </p:txBody>
@@ -6343,16 +6663,16 @@
         </p:nvSpPr>
         <p:spPr>
           <a:xfrm>
-            <a:off x="5820000" y="2480000"/>
-            <a:ext cx="2500000" cy="360000"/>
-          </a:xfrm>
-          <a:prstGeom prst="rect">
-            <a:avLst/>
-          </a:prstGeom>
-          <a:noFill/>
-        </p:spPr>
-        <p:txBody>
-          <a:bodyPr wrap="square" anchor="t"/>
+            <a:off x="5820000" y="2420000"/>
+            <a:ext cx="2500000" cy="420000"/>
+          </a:xfrm>
+          <a:prstGeom prst="rect">
+            <a:avLst/>
+          </a:prstGeom>
+          <a:noFill/>
+        </p:spPr>
+        <p:txBody>
+          <a:bodyPr wrap="square" anchor="t" lIns="45720" tIns="22860" rIns="45720" bIns="22860"/>
           <a:lstStyle/>
           <a:p>
             <a:pPr algn="ctr"/>
@@ -6361,8 +6681,9 @@
                 <a:solidFill>
                   <a:srgbClr val="475569"/>
                 </a:solidFill>
-              </a:rPr>
-              <a:t>Decisions recorded</a:t>
+                <a:latin typeface="Calibri" pitchFamily="34" charset="0"/>
+              </a:rPr>
+              <a:t xml:space="preserve">Decisions recorded</a:t>
             </a:r>
           </a:p>
         </p:txBody>
@@ -6379,7 +6700,9 @@
             <a:ext cx="2500000" cy="1280000"/>
           </a:xfrm>
           <a:prstGeom prst="roundRect">
-            <a:avLst/>
+            <a:avLst>
+              <a:gd name="adj" fmla="val 6000"/>
+            </a:avLst>
           </a:prstGeom>
           <a:solidFill>
             <a:srgbClr val="F8FAFC"/>
@@ -6407,15 +6730,15 @@
         <p:spPr>
           <a:xfrm>
             <a:off x="8520000" y="1780000"/>
-            <a:ext cx="2500000" cy="700000"/>
-          </a:xfrm>
-          <a:prstGeom prst="rect">
-            <a:avLst/>
-          </a:prstGeom>
-          <a:noFill/>
-        </p:spPr>
-        <p:txBody>
-          <a:bodyPr wrap="square" anchor="t"/>
+            <a:ext cx="2500000" cy="640000"/>
+          </a:xfrm>
+          <a:prstGeom prst="rect">
+            <a:avLst/>
+          </a:prstGeom>
+          <a:noFill/>
+        </p:spPr>
+        <p:txBody>
+          <a:bodyPr wrap="square" anchor="t" lIns="45720" tIns="22860" rIns="45720" bIns="22860"/>
           <a:lstStyle/>
           <a:p>
             <a:pPr algn="ctr"/>
@@ -6424,8 +6747,9 @@
                 <a:solidFill>
                   <a:srgbClr val="0F172A"/>
                 </a:solidFill>
-              </a:rPr>
-              <a:t>Review</a:t>
+                <a:latin typeface="Calibri" pitchFamily="34" charset="0"/>
+              </a:rPr>
+              <a:t xml:space="preserve">Review</a:t>
             </a:r>
           </a:p>
         </p:txBody>
@@ -6438,16 +6762,16 @@
         </p:nvSpPr>
         <p:spPr>
           <a:xfrm>
-            <a:off x="8520000" y="2480000"/>
-            <a:ext cx="2500000" cy="360000"/>
-          </a:xfrm>
-          <a:prstGeom prst="rect">
-            <a:avLst/>
-          </a:prstGeom>
-          <a:noFill/>
-        </p:spPr>
-        <p:txBody>
-          <a:bodyPr wrap="square" anchor="t"/>
+            <a:off x="8520000" y="2420000"/>
+            <a:ext cx="2500000" cy="420000"/>
+          </a:xfrm>
+          <a:prstGeom prst="rect">
+            <a:avLst/>
+          </a:prstGeom>
+          <a:noFill/>
+        </p:spPr>
+        <p:txBody>
+          <a:bodyPr wrap="square" anchor="t" lIns="45720" tIns="22860" rIns="45720" bIns="22860"/>
           <a:lstStyle/>
           <a:p>
             <a:pPr algn="ctr"/>
@@ -6456,8 +6780,9 @@
                 <a:solidFill>
                   <a:srgbClr val="475569"/>
                 </a:solidFill>
-              </a:rPr>
-              <a:t>Not legal clearance</a:t>
+                <a:latin typeface="Calibri" pitchFamily="34" charset="0"/>
+              </a:rPr>
+              <a:t xml:space="preserve">Not legal clearance</a:t>
             </a:r>
           </a:p>
         </p:txBody>
@@ -6471,25 +6796,26 @@
         <p:spPr>
           <a:xfrm>
             <a:off x="420000" y="3200000"/>
-            <a:ext cx="11000000" cy="360000"/>
-          </a:xfrm>
-          <a:prstGeom prst="rect">
-            <a:avLst/>
-          </a:prstGeom>
-          <a:noFill/>
-        </p:spPr>
-        <p:txBody>
-          <a:bodyPr wrap="square" anchor="t"/>
+            <a:ext cx="11300000" cy="420000"/>
+          </a:xfrm>
+          <a:prstGeom prst="rect">
+            <a:avLst/>
+          </a:prstGeom>
+          <a:noFill/>
+        </p:spPr>
+        <p:txBody>
+          <a:bodyPr wrap="square" anchor="t" lIns="45720" tIns="22860" rIns="45720" bIns="22860"/>
           <a:lstStyle/>
           <a:p>
             <a:pPr algn="l"/>
             <a:r>
-              <a:rPr lang="en-US" sz="1400" b="0" dirty="0">
+              <a:rPr lang="en-US" sz="1300" b="0" dirty="0">
                 <a:solidFill>
                   <a:srgbClr val="0F172A"/>
                 </a:solidFill>
-              </a:rPr>
-              <a:t>DPIA-00001  Claims privacy review  ·  In Progress</a:t>
+                <a:latin typeface="Calibri" pitchFamily="34" charset="0"/>
+              </a:rPr>
+              <a:t xml:space="preserve">DPIA-00001 Claims privacy review · In Progress</a:t>
             </a:r>
           </a:p>
         </p:txBody>
@@ -6502,26 +6828,27 @@
         </p:nvSpPr>
         <p:spPr>
           <a:xfrm>
-            <a:off x="420000" y="3580000"/>
-            <a:ext cx="11000000" cy="360000"/>
-          </a:xfrm>
-          <a:prstGeom prst="rect">
-            <a:avLst/>
-          </a:prstGeom>
-          <a:noFill/>
-        </p:spPr>
-        <p:txBody>
-          <a:bodyPr wrap="square" anchor="t"/>
+            <a:off x="420000" y="3660000"/>
+            <a:ext cx="11300000" cy="420000"/>
+          </a:xfrm>
+          <a:prstGeom prst="rect">
+            <a:avLst/>
+          </a:prstGeom>
+          <a:noFill/>
+        </p:spPr>
+        <p:txBody>
+          <a:bodyPr wrap="square" anchor="t" lIns="45720" tIns="22860" rIns="45720" bIns="22860"/>
           <a:lstStyle/>
           <a:p>
             <a:pPr algn="l"/>
             <a:r>
-              <a:rPr lang="en-US" sz="1400" b="0" dirty="0">
+              <a:rPr lang="en-US" sz="1300" b="0" dirty="0">
                 <a:solidFill>
                   <a:srgbClr val="0F172A"/>
                 </a:solidFill>
-              </a:rPr>
-              <a:t>DPIA-00002  Claims privacy review  ·  In Progress</a:t>
+                <a:latin typeface="Calibri" pitchFamily="34" charset="0"/>
+              </a:rPr>
+              <a:t xml:space="preserve">DPIA-00002 Claims privacy review · In Progress</a:t>
             </a:r>
           </a:p>
         </p:txBody>
@@ -6534,26 +6861,60 @@
         </p:nvSpPr>
         <p:spPr>
           <a:xfrm>
-            <a:off x="420000" y="3960000"/>
-            <a:ext cx="11000000" cy="360000"/>
-          </a:xfrm>
-          <a:prstGeom prst="rect">
-            <a:avLst/>
-          </a:prstGeom>
-          <a:noFill/>
-        </p:spPr>
-        <p:txBody>
-          <a:bodyPr wrap="square" anchor="t"/>
+            <a:off x="420000" y="4120000"/>
+            <a:ext cx="11300000" cy="420000"/>
+          </a:xfrm>
+          <a:prstGeom prst="rect">
+            <a:avLst/>
+          </a:prstGeom>
+          <a:noFill/>
+        </p:spPr>
+        <p:txBody>
+          <a:bodyPr wrap="square" anchor="t" lIns="45720" tIns="22860" rIns="45720" bIns="22860"/>
           <a:lstStyle/>
           <a:p>
             <a:pPr algn="l"/>
             <a:r>
-              <a:rPr lang="en-US" sz="1400" b="0" dirty="0">
+              <a:rPr lang="en-US" sz="1300" b="0" dirty="0">
                 <a:solidFill>
                   <a:srgbClr val="0F172A"/>
                 </a:solidFill>
-              </a:rPr>
-              <a:t>DPIA-00003  Claims privacy review  ·  In Progress</a:t>
+                <a:latin typeface="Calibri" pitchFamily="34" charset="0"/>
+              </a:rPr>
+              <a:t xml:space="preserve">DPIA-00003 Claims privacy review · In Progress</a:t>
+            </a:r>
+          </a:p>
+        </p:txBody>
+      </p:sp>
+      <p:sp>
+        <p:nvSpPr>
+          <p:cNvPr id="63" name="t63"/>
+          <p:cNvSpPr txBox="1"/>
+          <p:nvPr/>
+        </p:nvSpPr>
+        <p:spPr>
+          <a:xfrm>
+            <a:off x="420000" y="4580000"/>
+            <a:ext cx="11300000" cy="420000"/>
+          </a:xfrm>
+          <a:prstGeom prst="rect">
+            <a:avLst/>
+          </a:prstGeom>
+          <a:noFill/>
+        </p:spPr>
+        <p:txBody>
+          <a:bodyPr wrap="square" anchor="t" lIns="45720" tIns="22860" rIns="45720" bIns="22860"/>
+          <a:lstStyle/>
+          <a:p>
+            <a:pPr algn="l"/>
+            <a:r>
+              <a:rPr lang="en-US" sz="1300" b="0" dirty="0">
+                <a:solidFill>
+                  <a:srgbClr val="0F172A"/>
+                </a:solidFill>
+                <a:latin typeface="Calibri" pitchFamily="34" charset="0"/>
+              </a:rPr>
+              <a:t xml:space="preserve">DPIA-00004 Claims privacy review · In Progress</a:t>
             </a:r>
           </a:p>
         </p:txBody>
@@ -6570,7 +6931,9 @@
             <a:ext cx="12192000" cy="340000"/>
           </a:xfrm>
           <a:prstGeom prst="roundRect">
-            <a:avLst/>
+            <a:avLst>
+              <a:gd name="adj" fmla="val 6000"/>
+            </a:avLst>
           </a:prstGeom>
           <a:solidFill>
             <a:srgbClr val="F1F5F9"/>
@@ -6604,7 +6967,7 @@
           <a:noFill/>
         </p:spPr>
         <p:txBody>
-          <a:bodyPr wrap="square" anchor="t"/>
+          <a:bodyPr wrap="square" anchor="t" lIns="45720" tIns="22860" rIns="45720" bIns="22860"/>
           <a:lstStyle/>
           <a:p>
             <a:pPr algn="l"/>
@@ -6613,8 +6976,9 @@
                 <a:solidFill>
                   <a:srgbClr val="64748B"/>
                 </a:solidFill>
-              </a:rPr>
-              <a:t>Supreme Privacy Board Report  ·  Confidential  ·  Not legal advice</a:t>
+                <a:latin typeface="Calibri" pitchFamily="34" charset="0"/>
+              </a:rPr>
+              <a:t xml:space="preserve">Supreme Privacy Board Report · Confidential · Not legal advice</a:t>
             </a:r>
           </a:p>
         </p:txBody>
@@ -6636,7 +7000,7 @@
           <a:noFill/>
         </p:spPr>
         <p:txBody>
-          <a:bodyPr wrap="square" anchor="t"/>
+          <a:bodyPr wrap="square" anchor="t" lIns="45720" tIns="22860" rIns="45720" bIns="22860"/>
           <a:lstStyle/>
           <a:p>
             <a:pPr algn="r"/>
@@ -6645,8 +7009,9 @@
                 <a:solidFill>
                   <a:srgbClr val="64748B"/>
                 </a:solidFill>
-              </a:rPr>
-              <a:t>7 / 12</a:t>
+                <a:latin typeface="Calibri" pitchFamily="34" charset="0"/>
+              </a:rPr>
+              <a:t xml:space="preserve">7 / 12</a:t>
             </a:r>
           </a:p>
         </p:txBody>
@@ -6688,7 +7053,9 @@
             <a:ext cx="12192000" cy="1180000"/>
           </a:xfrm>
           <a:prstGeom prst="roundRect">
-            <a:avLst/>
+            <a:avLst>
+              <a:gd name="adj" fmla="val 6000"/>
+            </a:avLst>
           </a:prstGeom>
           <a:solidFill>
             <a:srgbClr val="0F172A"/>
@@ -6717,7 +7084,9 @@
             <a:ext cx="12192000" cy="50000"/>
           </a:xfrm>
           <a:prstGeom prst="roundRect">
-            <a:avLst/>
+            <a:avLst>
+              <a:gd name="adj" fmla="val 6000"/>
+            </a:avLst>
           </a:prstGeom>
           <a:solidFill>
             <a:srgbClr val="C5A46E"/>
@@ -6751,7 +7120,7 @@
           <a:noFill/>
         </p:spPr>
         <p:txBody>
-          <a:bodyPr wrap="square" anchor="t"/>
+          <a:bodyPr wrap="square" anchor="t" lIns="45720" tIns="22860" rIns="45720" bIns="22860"/>
           <a:lstStyle/>
           <a:p>
             <a:pPr algn="l"/>
@@ -6760,8 +7129,9 @@
                 <a:solidFill>
                   <a:srgbClr val="FFFFFF"/>
                 </a:solidFill>
-              </a:rPr>
-              <a:t>Vendor / processor exposure</a:t>
+                <a:latin typeface="Calibri" pitchFamily="34" charset="0"/>
+              </a:rPr>
+              <a:t xml:space="preserve">Vendor / processor exposure</a:t>
             </a:r>
           </a:p>
         </p:txBody>
@@ -6783,7 +7153,7 @@
           <a:noFill/>
         </p:spPr>
         <p:txBody>
-          <a:bodyPr wrap="square" anchor="t"/>
+          <a:bodyPr wrap="square" anchor="t" lIns="45720" tIns="22860" rIns="45720" bIns="22860"/>
           <a:lstStyle/>
           <a:p>
             <a:pPr algn="l"/>
@@ -6792,8 +7162,9 @@
                 <a:solidFill>
                   <a:srgbClr val="CBD5E1"/>
                 </a:solidFill>
-              </a:rPr>
-              <a:t>Third Party identity is reused. Privacy adds role and links only.</a:t>
+                <a:latin typeface="Calibri" pitchFamily="34" charset="0"/>
+              </a:rPr>
+              <a:t xml:space="preserve">Third Party identity is reused. Privacy adds role and links only.</a:t>
             </a:r>
           </a:p>
         </p:txBody>
@@ -6810,7 +7181,9 @@
             <a:ext cx="2500000" cy="1280000"/>
           </a:xfrm>
           <a:prstGeom prst="roundRect">
-            <a:avLst/>
+            <a:avLst>
+              <a:gd name="adj" fmla="val 6000"/>
+            </a:avLst>
           </a:prstGeom>
           <a:solidFill>
             <a:srgbClr val="F8FAFC"/>
@@ -6838,15 +7211,15 @@
         <p:spPr>
           <a:xfrm>
             <a:off x="420000" y="1780000"/>
-            <a:ext cx="2500000" cy="700000"/>
-          </a:xfrm>
-          <a:prstGeom prst="rect">
-            <a:avLst/>
-          </a:prstGeom>
-          <a:noFill/>
-        </p:spPr>
-        <p:txBody>
-          <a:bodyPr wrap="square" anchor="t"/>
+            <a:ext cx="2500000" cy="640000"/>
+          </a:xfrm>
+          <a:prstGeom prst="rect">
+            <a:avLst/>
+          </a:prstGeom>
+          <a:noFill/>
+        </p:spPr>
+        <p:txBody>
+          <a:bodyPr wrap="square" anchor="t" lIns="45720" tIns="22860" rIns="45720" bIns="22860"/>
           <a:lstStyle/>
           <a:p>
             <a:pPr algn="ctr"/>
@@ -6855,8 +7228,9 @@
                 <a:solidFill>
                   <a:srgbClr val="0F172A"/>
                 </a:solidFill>
-              </a:rPr>
-              <a:t>1</a:t>
+                <a:latin typeface="Calibri" pitchFamily="34" charset="0"/>
+              </a:rPr>
+              <a:t xml:space="preserve">1</a:t>
             </a:r>
           </a:p>
         </p:txBody>
@@ -6869,16 +7243,16 @@
         </p:nvSpPr>
         <p:spPr>
           <a:xfrm>
-            <a:off x="420000" y="2480000"/>
-            <a:ext cx="2500000" cy="360000"/>
-          </a:xfrm>
-          <a:prstGeom prst="rect">
-            <a:avLst/>
-          </a:prstGeom>
-          <a:noFill/>
-        </p:spPr>
-        <p:txBody>
-          <a:bodyPr wrap="square" anchor="t"/>
+            <a:off x="420000" y="2420000"/>
+            <a:ext cx="2500000" cy="420000"/>
+          </a:xfrm>
+          <a:prstGeom prst="rect">
+            <a:avLst/>
+          </a:prstGeom>
+          <a:noFill/>
+        </p:spPr>
+        <p:txBody>
+          <a:bodyPr wrap="square" anchor="t" lIns="45720" tIns="22860" rIns="45720" bIns="22860"/>
           <a:lstStyle/>
           <a:p>
             <a:pPr algn="ctr"/>
@@ -6887,8 +7261,9 @@
                 <a:solidFill>
                   <a:srgbClr val="475569"/>
                 </a:solidFill>
-              </a:rPr>
-              <a:t>Linked processors</a:t>
+                <a:latin typeface="Calibri" pitchFamily="34" charset="0"/>
+              </a:rPr>
+              <a:t xml:space="preserve">Linked processors</a:t>
             </a:r>
           </a:p>
         </p:txBody>
@@ -6905,7 +7280,9 @@
             <a:ext cx="2500000" cy="1280000"/>
           </a:xfrm>
           <a:prstGeom prst="roundRect">
-            <a:avLst/>
+            <a:avLst>
+              <a:gd name="adj" fmla="val 6000"/>
+            </a:avLst>
           </a:prstGeom>
           <a:solidFill>
             <a:srgbClr val="F8FAFC"/>
@@ -6933,15 +7310,15 @@
         <p:spPr>
           <a:xfrm>
             <a:off x="3120000" y="1780000"/>
-            <a:ext cx="2500000" cy="700000"/>
-          </a:xfrm>
-          <a:prstGeom prst="rect">
-            <a:avLst/>
-          </a:prstGeom>
-          <a:noFill/>
-        </p:spPr>
-        <p:txBody>
-          <a:bodyPr wrap="square" anchor="t"/>
+            <a:ext cx="2500000" cy="640000"/>
+          </a:xfrm>
+          <a:prstGeom prst="rect">
+            <a:avLst/>
+          </a:prstGeom>
+          <a:noFill/>
+        </p:spPr>
+        <p:txBody>
+          <a:bodyPr wrap="square" anchor="t" lIns="45720" tIns="22860" rIns="45720" bIns="22860"/>
           <a:lstStyle/>
           <a:p>
             <a:pPr algn="ctr"/>
@@ -6950,8 +7327,9 @@
                 <a:solidFill>
                   <a:srgbClr val="0F172A"/>
                 </a:solidFill>
-              </a:rPr>
-              <a:t>1</a:t>
+                <a:latin typeface="Calibri" pitchFamily="34" charset="0"/>
+              </a:rPr>
+              <a:t xml:space="preserve">1</a:t>
             </a:r>
           </a:p>
         </p:txBody>
@@ -6964,16 +7342,16 @@
         </p:nvSpPr>
         <p:spPr>
           <a:xfrm>
-            <a:off x="3120000" y="2480000"/>
-            <a:ext cx="2500000" cy="360000"/>
-          </a:xfrm>
-          <a:prstGeom prst="rect">
-            <a:avLst/>
-          </a:prstGeom>
-          <a:noFill/>
-        </p:spPr>
-        <p:txBody>
-          <a:bodyPr wrap="square" anchor="t"/>
+            <a:off x="3120000" y="2420000"/>
+            <a:ext cx="2500000" cy="420000"/>
+          </a:xfrm>
+          <a:prstGeom prst="rect">
+            <a:avLst/>
+          </a:prstGeom>
+          <a:noFill/>
+        </p:spPr>
+        <p:txBody>
+          <a:bodyPr wrap="square" anchor="t" lIns="45720" tIns="22860" rIns="45720" bIns="22860"/>
           <a:lstStyle/>
           <a:p>
             <a:pPr algn="ctr"/>
@@ -6982,8 +7360,9 @@
                 <a:solidFill>
                   <a:srgbClr val="475569"/>
                 </a:solidFill>
-              </a:rPr>
-              <a:t>With privacy issues</a:t>
+                <a:latin typeface="Calibri" pitchFamily="34" charset="0"/>
+              </a:rPr>
+              <a:t xml:space="preserve">With privacy issues</a:t>
             </a:r>
           </a:p>
         </p:txBody>
@@ -7000,7 +7379,9 @@
             <a:ext cx="2500000" cy="1280000"/>
           </a:xfrm>
           <a:prstGeom prst="roundRect">
-            <a:avLst/>
+            <a:avLst>
+              <a:gd name="adj" fmla="val 6000"/>
+            </a:avLst>
           </a:prstGeom>
           <a:solidFill>
             <a:srgbClr val="F8FAFC"/>
@@ -7028,15 +7409,15 @@
         <p:spPr>
           <a:xfrm>
             <a:off x="5820000" y="1780000"/>
-            <a:ext cx="2500000" cy="700000"/>
-          </a:xfrm>
-          <a:prstGeom prst="rect">
-            <a:avLst/>
-          </a:prstGeom>
-          <a:noFill/>
-        </p:spPr>
-        <p:txBody>
-          <a:bodyPr wrap="square" anchor="t"/>
+            <a:ext cx="2500000" cy="640000"/>
+          </a:xfrm>
+          <a:prstGeom prst="rect">
+            <a:avLst/>
+          </a:prstGeom>
+          <a:noFill/>
+        </p:spPr>
+        <p:txBody>
+          <a:bodyPr wrap="square" anchor="t" lIns="45720" tIns="22860" rIns="45720" bIns="22860"/>
           <a:lstStyle/>
           <a:p>
             <a:pPr algn="ctr"/>
@@ -7045,8 +7426,9 @@
                 <a:solidFill>
                   <a:srgbClr val="0F172A"/>
                 </a:solidFill>
-              </a:rPr>
-              <a:t>3</a:t>
+                <a:latin typeface="Calibri" pitchFamily="34" charset="0"/>
+              </a:rPr>
+              <a:t xml:space="preserve">4</a:t>
             </a:r>
           </a:p>
         </p:txBody>
@@ -7059,16 +7441,16 @@
         </p:nvSpPr>
         <p:spPr>
           <a:xfrm>
-            <a:off x="5820000" y="2480000"/>
-            <a:ext cx="2500000" cy="360000"/>
-          </a:xfrm>
-          <a:prstGeom prst="rect">
-            <a:avLst/>
-          </a:prstGeom>
-          <a:noFill/>
-        </p:spPr>
-        <p:txBody>
-          <a:bodyPr wrap="square" anchor="t"/>
+            <a:off x="5820000" y="2420000"/>
+            <a:ext cx="2500000" cy="420000"/>
+          </a:xfrm>
+          <a:prstGeom prst="rect">
+            <a:avLst/>
+          </a:prstGeom>
+          <a:noFill/>
+        </p:spPr>
+        <p:txBody>
+          <a:bodyPr wrap="square" anchor="t" lIns="45720" tIns="22860" rIns="45720" bIns="22860"/>
           <a:lstStyle/>
           <a:p>
             <a:pPr algn="ctr"/>
@@ -7077,8 +7459,9 @@
                 <a:solidFill>
                   <a:srgbClr val="475569"/>
                 </a:solidFill>
-              </a:rPr>
-              <a:t>Transfer paths</a:t>
+                <a:latin typeface="Calibri" pitchFamily="34" charset="0"/>
+              </a:rPr>
+              <a:t xml:space="preserve">Transfer paths</a:t>
             </a:r>
           </a:p>
         </p:txBody>
@@ -7095,7 +7478,9 @@
             <a:ext cx="2500000" cy="1280000"/>
           </a:xfrm>
           <a:prstGeom prst="roundRect">
-            <a:avLst/>
+            <a:avLst>
+              <a:gd name="adj" fmla="val 6000"/>
+            </a:avLst>
           </a:prstGeom>
           <a:solidFill>
             <a:srgbClr val="F8FAFC"/>
@@ -7123,15 +7508,15 @@
         <p:spPr>
           <a:xfrm>
             <a:off x="8520000" y="1780000"/>
-            <a:ext cx="2500000" cy="700000"/>
-          </a:xfrm>
-          <a:prstGeom prst="rect">
-            <a:avLst/>
-          </a:prstGeom>
-          <a:noFill/>
-        </p:spPr>
-        <p:txBody>
-          <a:bodyPr wrap="square" anchor="t"/>
+            <a:ext cx="2500000" cy="640000"/>
+          </a:xfrm>
+          <a:prstGeom prst="rect">
+            <a:avLst/>
+          </a:prstGeom>
+          <a:noFill/>
+        </p:spPr>
+        <p:txBody>
+          <a:bodyPr wrap="square" anchor="t" lIns="45720" tIns="22860" rIns="45720" bIns="22860"/>
           <a:lstStyle/>
           <a:p>
             <a:pPr algn="ctr"/>
@@ -7140,8 +7525,9 @@
                 <a:solidFill>
                   <a:srgbClr val="0F172A"/>
                 </a:solidFill>
-              </a:rPr>
-              <a:t>0</a:t>
+                <a:latin typeface="Calibri" pitchFamily="34" charset="0"/>
+              </a:rPr>
+              <a:t xml:space="preserve">0</a:t>
             </a:r>
           </a:p>
         </p:txBody>
@@ -7154,16 +7540,16 @@
         </p:nvSpPr>
         <p:spPr>
           <a:xfrm>
-            <a:off x="8520000" y="2480000"/>
-            <a:ext cx="2500000" cy="360000"/>
-          </a:xfrm>
-          <a:prstGeom prst="rect">
-            <a:avLst/>
-          </a:prstGeom>
-          <a:noFill/>
-        </p:spPr>
-        <p:txBody>
-          <a:bodyPr wrap="square" anchor="t"/>
+            <a:off x="8520000" y="2420000"/>
+            <a:ext cx="2500000" cy="420000"/>
+          </a:xfrm>
+          <a:prstGeom prst="rect">
+            <a:avLst/>
+          </a:prstGeom>
+          <a:noFill/>
+        </p:spPr>
+        <p:txBody>
+          <a:bodyPr wrap="square" anchor="t" lIns="45720" tIns="22860" rIns="45720" bIns="22860"/>
           <a:lstStyle/>
           <a:p>
             <a:pPr algn="ctr"/>
@@ -7172,8 +7558,9 @@
                 <a:solidFill>
                   <a:srgbClr val="475569"/>
                 </a:solidFill>
-              </a:rPr>
-              <a:t>Evidence refresh</a:t>
+                <a:latin typeface="Calibri" pitchFamily="34" charset="0"/>
+              </a:rPr>
+              <a:t xml:space="preserve">Evidence refresh</a:t>
             </a:r>
           </a:p>
         </p:txBody>
@@ -7187,25 +7574,26 @@
         <p:spPr>
           <a:xfrm>
             <a:off x="420000" y="3200000"/>
-            <a:ext cx="11000000" cy="360000"/>
-          </a:xfrm>
-          <a:prstGeom prst="rect">
-            <a:avLst/>
-          </a:prstGeom>
-          <a:noFill/>
-        </p:spPr>
-        <p:txBody>
-          <a:bodyPr wrap="square" anchor="t"/>
+            <a:ext cx="11300000" cy="420000"/>
+          </a:xfrm>
+          <a:prstGeom prst="rect">
+            <a:avLst/>
+          </a:prstGeom>
+          <a:noFill/>
+        </p:spPr>
+        <p:txBody>
+          <a:bodyPr wrap="square" anchor="t" lIns="45720" tIns="22860" rIns="45720" bIns="22860"/>
           <a:lstStyle/>
           <a:p>
             <a:pPr algn="l"/>
             <a:r>
-              <a:rPr lang="en-US" sz="1400" b="0" dirty="0">
+              <a:rPr lang="en-US" sz="1300" b="0" dirty="0">
                 <a:solidFill>
                   <a:srgbClr val="0F172A"/>
                 </a:solidFill>
-              </a:rPr>
-              <a:t>PA-00001  processors: None recorded</a:t>
+                <a:latin typeface="Calibri" pitchFamily="34" charset="0"/>
+              </a:rPr>
+              <a:t xml:space="preserve">PA-00001 No processor recorded</a:t>
             </a:r>
           </a:p>
         </p:txBody>
@@ -7218,26 +7606,27 @@
         </p:nvSpPr>
         <p:spPr>
           <a:xfrm>
-            <a:off x="420000" y="3580000"/>
-            <a:ext cx="11000000" cy="360000"/>
-          </a:xfrm>
-          <a:prstGeom prst="rect">
-            <a:avLst/>
-          </a:prstGeom>
-          <a:noFill/>
-        </p:spPr>
-        <p:txBody>
-          <a:bodyPr wrap="square" anchor="t"/>
+            <a:off x="420000" y="3660000"/>
+            <a:ext cx="11300000" cy="420000"/>
+          </a:xfrm>
+          <a:prstGeom prst="rect">
+            <a:avLst/>
+          </a:prstGeom>
+          <a:noFill/>
+        </p:spPr>
+        <p:txBody>
+          <a:bodyPr wrap="square" anchor="t" lIns="45720" tIns="22860" rIns="45720" bIns="22860"/>
           <a:lstStyle/>
           <a:p>
             <a:pPr algn="l"/>
             <a:r>
-              <a:rPr lang="en-US" sz="1400" b="0" dirty="0">
+              <a:rPr lang="en-US" sz="1300" b="0" dirty="0">
                 <a:solidFill>
                   <a:srgbClr val="0F172A"/>
                 </a:solidFill>
-              </a:rPr>
-              <a:t>PA-00002  processors: Supreme Investigation (Processor)</a:t>
+                <a:latin typeface="Calibri" pitchFamily="34" charset="0"/>
+              </a:rPr>
+              <a:t xml:space="preserve">PA-00002 Supreme Investigation · Processor</a:t>
             </a:r>
           </a:p>
         </p:txBody>
@@ -7250,26 +7639,60 @@
         </p:nvSpPr>
         <p:spPr>
           <a:xfrm>
-            <a:off x="420000" y="3960000"/>
-            <a:ext cx="11000000" cy="360000"/>
-          </a:xfrm>
-          <a:prstGeom prst="rect">
-            <a:avLst/>
-          </a:prstGeom>
-          <a:noFill/>
-        </p:spPr>
-        <p:txBody>
-          <a:bodyPr wrap="square" anchor="t"/>
+            <a:off x="420000" y="4120000"/>
+            <a:ext cx="11300000" cy="420000"/>
+          </a:xfrm>
+          <a:prstGeom prst="rect">
+            <a:avLst/>
+          </a:prstGeom>
+          <a:noFill/>
+        </p:spPr>
+        <p:txBody>
+          <a:bodyPr wrap="square" anchor="t" lIns="45720" tIns="22860" rIns="45720" bIns="22860"/>
           <a:lstStyle/>
           <a:p>
             <a:pPr algn="l"/>
             <a:r>
-              <a:rPr lang="en-US" sz="1400" b="0" dirty="0">
+              <a:rPr lang="en-US" sz="1300" b="0" dirty="0">
                 <a:solidFill>
                   <a:srgbClr val="0F172A"/>
                 </a:solidFill>
-              </a:rPr>
-              <a:t>PA-00003  processors: Supreme Investigation (Processor)</a:t>
+                <a:latin typeface="Calibri" pitchFamily="34" charset="0"/>
+              </a:rPr>
+              <a:t xml:space="preserve">PA-00003 Supreme Investigation · Processor</a:t>
+            </a:r>
+          </a:p>
+        </p:txBody>
+      </p:sp>
+      <p:sp>
+        <p:nvSpPr>
+          <p:cNvPr id="63" name="t63"/>
+          <p:cNvSpPr txBox="1"/>
+          <p:nvPr/>
+        </p:nvSpPr>
+        <p:spPr>
+          <a:xfrm>
+            <a:off x="420000" y="4580000"/>
+            <a:ext cx="11300000" cy="420000"/>
+          </a:xfrm>
+          <a:prstGeom prst="rect">
+            <a:avLst/>
+          </a:prstGeom>
+          <a:noFill/>
+        </p:spPr>
+        <p:txBody>
+          <a:bodyPr wrap="square" anchor="t" lIns="45720" tIns="22860" rIns="45720" bIns="22860"/>
+          <a:lstStyle/>
+          <a:p>
+            <a:pPr algn="l"/>
+            <a:r>
+              <a:rPr lang="en-US" sz="1300" b="0" dirty="0">
+                <a:solidFill>
+                  <a:srgbClr val="0F172A"/>
+                </a:solidFill>
+                <a:latin typeface="Calibri" pitchFamily="34" charset="0"/>
+              </a:rPr>
+              <a:t xml:space="preserve">PA-00004 Supreme Investigation · Processor</a:t>
             </a:r>
           </a:p>
         </p:txBody>
@@ -7286,7 +7709,9 @@
             <a:ext cx="12192000" cy="340000"/>
           </a:xfrm>
           <a:prstGeom prst="roundRect">
-            <a:avLst/>
+            <a:avLst>
+              <a:gd name="adj" fmla="val 6000"/>
+            </a:avLst>
           </a:prstGeom>
           <a:solidFill>
             <a:srgbClr val="F1F5F9"/>
@@ -7320,7 +7745,7 @@
           <a:noFill/>
         </p:spPr>
         <p:txBody>
-          <a:bodyPr wrap="square" anchor="t"/>
+          <a:bodyPr wrap="square" anchor="t" lIns="45720" tIns="22860" rIns="45720" bIns="22860"/>
           <a:lstStyle/>
           <a:p>
             <a:pPr algn="l"/>
@@ -7329,8 +7754,9 @@
                 <a:solidFill>
                   <a:srgbClr val="64748B"/>
                 </a:solidFill>
-              </a:rPr>
-              <a:t>Supreme Privacy Board Report  ·  Confidential  ·  Not legal advice</a:t>
+                <a:latin typeface="Calibri" pitchFamily="34" charset="0"/>
+              </a:rPr>
+              <a:t xml:space="preserve">Supreme Privacy Board Report · Confidential · Not legal advice</a:t>
             </a:r>
           </a:p>
         </p:txBody>
@@ -7352,7 +7778,7 @@
           <a:noFill/>
         </p:spPr>
         <p:txBody>
-          <a:bodyPr wrap="square" anchor="t"/>
+          <a:bodyPr wrap="square" anchor="t" lIns="45720" tIns="22860" rIns="45720" bIns="22860"/>
           <a:lstStyle/>
           <a:p>
             <a:pPr algn="r"/>
@@ -7361,8 +7787,9 @@
                 <a:solidFill>
                   <a:srgbClr val="64748B"/>
                 </a:solidFill>
-              </a:rPr>
-              <a:t>8 / 12</a:t>
+                <a:latin typeface="Calibri" pitchFamily="34" charset="0"/>
+              </a:rPr>
+              <a:t xml:space="preserve">8 / 12</a:t>
             </a:r>
           </a:p>
         </p:txBody>
@@ -7404,7 +7831,9 @@
             <a:ext cx="12192000" cy="1180000"/>
           </a:xfrm>
           <a:prstGeom prst="roundRect">
-            <a:avLst/>
+            <a:avLst>
+              <a:gd name="adj" fmla="val 6000"/>
+            </a:avLst>
           </a:prstGeom>
           <a:solidFill>
             <a:srgbClr val="0F172A"/>
@@ -7433,7 +7862,9 @@
             <a:ext cx="12192000" cy="50000"/>
           </a:xfrm>
           <a:prstGeom prst="roundRect">
-            <a:avLst/>
+            <a:avLst>
+              <a:gd name="adj" fmla="val 6000"/>
+            </a:avLst>
           </a:prstGeom>
           <a:solidFill>
             <a:srgbClr val="C5A46E"/>
@@ -7467,7 +7898,7 @@
           <a:noFill/>
         </p:spPr>
         <p:txBody>
-          <a:bodyPr wrap="square" anchor="t"/>
+          <a:bodyPr wrap="square" anchor="t" lIns="45720" tIns="22860" rIns="45720" bIns="22860"/>
           <a:lstStyle/>
           <a:p>
             <a:pPr algn="l"/>
@@ -7476,8 +7907,9 @@
                 <a:solidFill>
                   <a:srgbClr val="FFFFFF"/>
                 </a:solidFill>
-              </a:rPr>
-              <a:t>Retention / deletion posture</a:t>
+                <a:latin typeface="Calibri" pitchFamily="34" charset="0"/>
+              </a:rPr>
+              <a:t xml:space="preserve">Retention / deletion posture</a:t>
             </a:r>
           </a:p>
         </p:txBody>
@@ -7499,7 +7931,7 @@
           <a:noFill/>
         </p:spPr>
         <p:txBody>
-          <a:bodyPr wrap="square" anchor="t"/>
+          <a:bodyPr wrap="square" anchor="t" lIns="45720" tIns="22860" rIns="45720" bIns="22860"/>
           <a:lstStyle/>
           <a:p>
             <a:pPr algn="l"/>
@@ -7508,8 +7940,9 @@
                 <a:solidFill>
                   <a:srgbClr val="CBD5E1"/>
                 </a:solidFill>
-              </a:rPr>
-              <a:t>Closed tasks are not proof that external-system data is deleted.</a:t>
+                <a:latin typeface="Calibri" pitchFamily="34" charset="0"/>
+              </a:rPr>
+              <a:t xml:space="preserve">Closed tasks are not proof that external-system data is deleted.</a:t>
             </a:r>
           </a:p>
         </p:txBody>
@@ -7526,7 +7959,9 @@
             <a:ext cx="2500000" cy="1280000"/>
           </a:xfrm>
           <a:prstGeom prst="roundRect">
-            <a:avLst/>
+            <a:avLst>
+              <a:gd name="adj" fmla="val 6000"/>
+            </a:avLst>
           </a:prstGeom>
           <a:solidFill>
             <a:srgbClr val="F8FAFC"/>
@@ -7554,15 +7989,15 @@
         <p:spPr>
           <a:xfrm>
             <a:off x="420000" y="1780000"/>
-            <a:ext cx="2500000" cy="700000"/>
-          </a:xfrm>
-          <a:prstGeom prst="rect">
-            <a:avLst/>
-          </a:prstGeom>
-          <a:noFill/>
-        </p:spPr>
-        <p:txBody>
-          <a:bodyPr wrap="square" anchor="t"/>
+            <a:ext cx="2500000" cy="640000"/>
+          </a:xfrm>
+          <a:prstGeom prst="rect">
+            <a:avLst/>
+          </a:prstGeom>
+          <a:noFill/>
+        </p:spPr>
+        <p:txBody>
+          <a:bodyPr wrap="square" anchor="t" lIns="45720" tIns="22860" rIns="45720" bIns="22860"/>
           <a:lstStyle/>
           <a:p>
             <a:pPr algn="ctr"/>
@@ -7571,8 +8006,9 @@
                 <a:solidFill>
                   <a:srgbClr val="0F172A"/>
                 </a:solidFill>
-              </a:rPr>
-              <a:t>3</a:t>
+                <a:latin typeface="Calibri" pitchFamily="34" charset="0"/>
+              </a:rPr>
+              <a:t xml:space="preserve">4</a:t>
             </a:r>
           </a:p>
         </p:txBody>
@@ -7585,16 +8021,16 @@
         </p:nvSpPr>
         <p:spPr>
           <a:xfrm>
-            <a:off x="420000" y="2480000"/>
-            <a:ext cx="2500000" cy="360000"/>
-          </a:xfrm>
-          <a:prstGeom prst="rect">
-            <a:avLst/>
-          </a:prstGeom>
-          <a:noFill/>
-        </p:spPr>
-        <p:txBody>
-          <a:bodyPr wrap="square" anchor="t"/>
+            <a:off x="420000" y="2420000"/>
+            <a:ext cx="2500000" cy="420000"/>
+          </a:xfrm>
+          <a:prstGeom prst="rect">
+            <a:avLst/>
+          </a:prstGeom>
+          <a:noFill/>
+        </p:spPr>
+        <p:txBody>
+          <a:bodyPr wrap="square" anchor="t" lIns="45720" tIns="22860" rIns="45720" bIns="22860"/>
           <a:lstStyle/>
           <a:p>
             <a:pPr algn="ctr"/>
@@ -7603,8 +8039,9 @@
                 <a:solidFill>
                   <a:srgbClr val="475569"/>
                 </a:solidFill>
-              </a:rPr>
-              <a:t>Retention rules</a:t>
+                <a:latin typeface="Calibri" pitchFamily="34" charset="0"/>
+              </a:rPr>
+              <a:t xml:space="preserve">Retention rules</a:t>
             </a:r>
           </a:p>
         </p:txBody>
@@ -7621,7 +8058,9 @@
             <a:ext cx="2500000" cy="1280000"/>
           </a:xfrm>
           <a:prstGeom prst="roundRect">
-            <a:avLst/>
+            <a:avLst>
+              <a:gd name="adj" fmla="val 6000"/>
+            </a:avLst>
           </a:prstGeom>
           <a:solidFill>
             <a:srgbClr val="F8FAFC"/>
@@ -7649,15 +8088,15 @@
         <p:spPr>
           <a:xfrm>
             <a:off x="3120000" y="1780000"/>
-            <a:ext cx="2500000" cy="700000"/>
-          </a:xfrm>
-          <a:prstGeom prst="rect">
-            <a:avLst/>
-          </a:prstGeom>
-          <a:noFill/>
-        </p:spPr>
-        <p:txBody>
-          <a:bodyPr wrap="square" anchor="t"/>
+            <a:ext cx="2500000" cy="640000"/>
+          </a:xfrm>
+          <a:prstGeom prst="rect">
+            <a:avLst/>
+          </a:prstGeom>
+          <a:noFill/>
+        </p:spPr>
+        <p:txBody>
+          <a:bodyPr wrap="square" anchor="t" lIns="45720" tIns="22860" rIns="45720" bIns="22860"/>
           <a:lstStyle/>
           <a:p>
             <a:pPr algn="ctr"/>
@@ -7666,8 +8105,9 @@
                 <a:solidFill>
                   <a:srgbClr val="0F172A"/>
                 </a:solidFill>
-              </a:rPr>
-              <a:t>0</a:t>
+                <a:latin typeface="Calibri" pitchFamily="34" charset="0"/>
+              </a:rPr>
+              <a:t xml:space="preserve">0</a:t>
             </a:r>
           </a:p>
         </p:txBody>
@@ -7680,16 +8120,16 @@
         </p:nvSpPr>
         <p:spPr>
           <a:xfrm>
-            <a:off x="3120000" y="2480000"/>
-            <a:ext cx="2500000" cy="360000"/>
-          </a:xfrm>
-          <a:prstGeom prst="rect">
-            <a:avLst/>
-          </a:prstGeom>
-          <a:noFill/>
-        </p:spPr>
-        <p:txBody>
-          <a:bodyPr wrap="square" anchor="t"/>
+            <a:off x="3120000" y="2420000"/>
+            <a:ext cx="2500000" cy="420000"/>
+          </a:xfrm>
+          <a:prstGeom prst="rect">
+            <a:avLst/>
+          </a:prstGeom>
+          <a:noFill/>
+        </p:spPr>
+        <p:txBody>
+          <a:bodyPr wrap="square" anchor="t" lIns="45720" tIns="22860" rIns="45720" bIns="22860"/>
           <a:lstStyle/>
           <a:p>
             <a:pPr algn="ctr"/>
@@ -7698,8 +8138,9 @@
                 <a:solidFill>
                   <a:srgbClr val="475569"/>
                 </a:solidFill>
-              </a:rPr>
-              <a:t>Actions due</a:t>
+                <a:latin typeface="Calibri" pitchFamily="34" charset="0"/>
+              </a:rPr>
+              <a:t xml:space="preserve">Actions due</a:t>
             </a:r>
           </a:p>
         </p:txBody>
@@ -7716,7 +8157,9 @@
             <a:ext cx="2500000" cy="1280000"/>
           </a:xfrm>
           <a:prstGeom prst="roundRect">
-            <a:avLst/>
+            <a:avLst>
+              <a:gd name="adj" fmla="val 6000"/>
+            </a:avLst>
           </a:prstGeom>
           <a:solidFill>
             <a:srgbClr val="F8FAFC"/>
@@ -7744,15 +8187,15 @@
         <p:spPr>
           <a:xfrm>
             <a:off x="5820000" y="1780000"/>
-            <a:ext cx="2500000" cy="700000"/>
-          </a:xfrm>
-          <a:prstGeom prst="rect">
-            <a:avLst/>
-          </a:prstGeom>
-          <a:noFill/>
-        </p:spPr>
-        <p:txBody>
-          <a:bodyPr wrap="square" anchor="t"/>
+            <a:ext cx="2500000" cy="640000"/>
+          </a:xfrm>
+          <a:prstGeom prst="rect">
+            <a:avLst/>
+          </a:prstGeom>
+          <a:noFill/>
+        </p:spPr>
+        <p:txBody>
+          <a:bodyPr wrap="square" anchor="t" lIns="45720" tIns="22860" rIns="45720" bIns="22860"/>
           <a:lstStyle/>
           <a:p>
             <a:pPr algn="ctr"/>
@@ -7761,8 +8204,9 @@
                 <a:solidFill>
                   <a:srgbClr val="0F172A"/>
                 </a:solidFill>
-              </a:rPr>
-              <a:t>1</a:t>
+                <a:latin typeface="Calibri" pitchFamily="34" charset="0"/>
+              </a:rPr>
+              <a:t xml:space="preserve">2</a:t>
             </a:r>
           </a:p>
         </p:txBody>
@@ -7775,16 +8219,16 @@
         </p:nvSpPr>
         <p:spPr>
           <a:xfrm>
-            <a:off x="5820000" y="2480000"/>
-            <a:ext cx="2500000" cy="360000"/>
-          </a:xfrm>
-          <a:prstGeom prst="rect">
-            <a:avLst/>
-          </a:prstGeom>
-          <a:noFill/>
-        </p:spPr>
-        <p:txBody>
-          <a:bodyPr wrap="square" anchor="t"/>
+            <a:off x="5820000" y="2420000"/>
+            <a:ext cx="2500000" cy="420000"/>
+          </a:xfrm>
+          <a:prstGeom prst="rect">
+            <a:avLst/>
+          </a:prstGeom>
+          <a:noFill/>
+        </p:spPr>
+        <p:txBody>
+          <a:bodyPr wrap="square" anchor="t" lIns="45720" tIns="22860" rIns="45720" bIns="22860"/>
           <a:lstStyle/>
           <a:p>
             <a:pPr algn="ctr"/>
@@ -7793,8 +8237,9 @@
                 <a:solidFill>
                   <a:srgbClr val="475569"/>
                 </a:solidFill>
-              </a:rPr>
-              <a:t>Deletion pending</a:t>
+                <a:latin typeface="Calibri" pitchFamily="34" charset="0"/>
+              </a:rPr>
+              <a:t xml:space="preserve">Deletion pending</a:t>
             </a:r>
           </a:p>
         </p:txBody>
@@ -7811,7 +8256,9 @@
             <a:ext cx="2500000" cy="1280000"/>
           </a:xfrm>
           <a:prstGeom prst="roundRect">
-            <a:avLst/>
+            <a:avLst>
+              <a:gd name="adj" fmla="val 6000"/>
+            </a:avLst>
           </a:prstGeom>
           <a:solidFill>
             <a:srgbClr val="F8FAFC"/>
@@ -7839,15 +8286,15 @@
         <p:spPr>
           <a:xfrm>
             <a:off x="8520000" y="1780000"/>
-            <a:ext cx="2500000" cy="700000"/>
-          </a:xfrm>
-          <a:prstGeom prst="rect">
-            <a:avLst/>
-          </a:prstGeom>
-          <a:noFill/>
-        </p:spPr>
-        <p:txBody>
-          <a:bodyPr wrap="square" anchor="t"/>
+            <a:ext cx="2500000" cy="640000"/>
+          </a:xfrm>
+          <a:prstGeom prst="rect">
+            <a:avLst/>
+          </a:prstGeom>
+          <a:noFill/>
+        </p:spPr>
+        <p:txBody>
+          <a:bodyPr wrap="square" anchor="t" lIns="45720" tIns="22860" rIns="45720" bIns="22860"/>
           <a:lstStyle/>
           <a:p>
             <a:pPr algn="ctr"/>
@@ -7856,8 +8303,9 @@
                 <a:solidFill>
                   <a:srgbClr val="0F172A"/>
                 </a:solidFill>
-              </a:rPr>
-              <a:t>Manual</a:t>
+                <a:latin typeface="Calibri" pitchFamily="34" charset="0"/>
+              </a:rPr>
+              <a:t xml:space="preserve">Manual</a:t>
             </a:r>
           </a:p>
         </p:txBody>
@@ -7870,16 +8318,16 @@
         </p:nvSpPr>
         <p:spPr>
           <a:xfrm>
-            <a:off x="8520000" y="2480000"/>
-            <a:ext cx="2500000" cy="360000"/>
-          </a:xfrm>
-          <a:prstGeom prst="rect">
-            <a:avLst/>
-          </a:prstGeom>
-          <a:noFill/>
-        </p:spPr>
-        <p:txBody>
-          <a:bodyPr wrap="square" anchor="t"/>
+            <a:off x="8520000" y="2420000"/>
+            <a:ext cx="2500000" cy="420000"/>
+          </a:xfrm>
+          <a:prstGeom prst="rect">
+            <a:avLst/>
+          </a:prstGeom>
+          <a:noFill/>
+        </p:spPr>
+        <p:txBody>
+          <a:bodyPr wrap="square" anchor="t" lIns="45720" tIns="22860" rIns="45720" bIns="22860"/>
           <a:lstStyle/>
           <a:p>
             <a:pPr algn="ctr"/>
@@ -7888,8 +8336,9 @@
                 <a:solidFill>
                   <a:srgbClr val="475569"/>
                 </a:solidFill>
-              </a:rPr>
-              <a:t>Auto-delete</a:t>
+                <a:latin typeface="Calibri" pitchFamily="34" charset="0"/>
+              </a:rPr>
+              <a:t xml:space="preserve">Auto-delete</a:t>
             </a:r>
           </a:p>
         </p:txBody>
@@ -7903,25 +8352,26 @@
         <p:spPr>
           <a:xfrm>
             <a:off x="420000" y="3200000"/>
-            <a:ext cx="11000000" cy="360000"/>
-          </a:xfrm>
-          <a:prstGeom prst="rect">
-            <a:avLst/>
-          </a:prstGeom>
-          <a:noFill/>
-        </p:spPr>
-        <p:txBody>
-          <a:bodyPr wrap="square" anchor="t"/>
+            <a:ext cx="11300000" cy="420000"/>
+          </a:xfrm>
+          <a:prstGeom prst="rect">
+            <a:avLst/>
+          </a:prstGeom>
+          <a:noFill/>
+        </p:spPr>
+        <p:txBody>
+          <a:bodyPr wrap="square" anchor="t" lIns="45720" tIns="22860" rIns="45720" bIns="22860"/>
           <a:lstStyle/>
           <a:p>
             <a:pPr algn="l"/>
             <a:r>
-              <a:rPr lang="en-US" sz="1400" b="0" dirty="0">
+              <a:rPr lang="en-US" sz="1300" b="0" dirty="0">
                 <a:solidFill>
                   <a:srgbClr val="0F172A"/>
                 </a:solidFill>
-              </a:rPr>
-              <a:t>RET-00001  7 years after claim close  ·  Scheduled</a:t>
+                <a:latin typeface="Calibri" pitchFamily="34" charset="0"/>
+              </a:rPr>
+              <a:t xml:space="preserve">RET-00001 7 years after claim close · Scheduled</a:t>
             </a:r>
           </a:p>
         </p:txBody>
@@ -7934,26 +8384,27 @@
         </p:nvSpPr>
         <p:spPr>
           <a:xfrm>
-            <a:off x="420000" y="3580000"/>
-            <a:ext cx="11000000" cy="360000"/>
-          </a:xfrm>
-          <a:prstGeom prst="rect">
-            <a:avLst/>
-          </a:prstGeom>
-          <a:noFill/>
-        </p:spPr>
-        <p:txBody>
-          <a:bodyPr wrap="square" anchor="t"/>
+            <a:off x="420000" y="3660000"/>
+            <a:ext cx="11300000" cy="420000"/>
+          </a:xfrm>
+          <a:prstGeom prst="rect">
+            <a:avLst/>
+          </a:prstGeom>
+          <a:noFill/>
+        </p:spPr>
+        <p:txBody>
+          <a:bodyPr wrap="square" anchor="t" lIns="45720" tIns="22860" rIns="45720" bIns="22860"/>
           <a:lstStyle/>
           <a:p>
             <a:pPr algn="l"/>
             <a:r>
-              <a:rPr lang="en-US" sz="1400" b="0" dirty="0">
+              <a:rPr lang="en-US" sz="1300" b="0" dirty="0">
                 <a:solidFill>
                   <a:srgbClr val="0F172A"/>
                 </a:solidFill>
-              </a:rPr>
-              <a:t>RET-00002  7 years after claim close  ·  Scheduled</a:t>
+                <a:latin typeface="Calibri" pitchFamily="34" charset="0"/>
+              </a:rPr>
+              <a:t xml:space="preserve">RET-00002 7 years after claim close · Scheduled</a:t>
             </a:r>
           </a:p>
         </p:txBody>
@@ -7966,26 +8417,60 @@
         </p:nvSpPr>
         <p:spPr>
           <a:xfrm>
-            <a:off x="420000" y="3960000"/>
-            <a:ext cx="11000000" cy="360000"/>
-          </a:xfrm>
-          <a:prstGeom prst="rect">
-            <a:avLst/>
-          </a:prstGeom>
-          <a:noFill/>
-        </p:spPr>
-        <p:txBody>
-          <a:bodyPr wrap="square" anchor="t"/>
+            <a:off x="420000" y="4120000"/>
+            <a:ext cx="11300000" cy="420000"/>
+          </a:xfrm>
+          <a:prstGeom prst="rect">
+            <a:avLst/>
+          </a:prstGeom>
+          <a:noFill/>
+        </p:spPr>
+        <p:txBody>
+          <a:bodyPr wrap="square" anchor="t" lIns="45720" tIns="22860" rIns="45720" bIns="22860"/>
           <a:lstStyle/>
           <a:p>
             <a:pPr algn="l"/>
             <a:r>
-              <a:rPr lang="en-US" sz="1400" b="0" dirty="0">
+              <a:rPr lang="en-US" sz="1300" b="0" dirty="0">
                 <a:solidFill>
                   <a:srgbClr val="0F172A"/>
                 </a:solidFill>
-              </a:rPr>
-              <a:t>RET-00003  7 years after claim close  ·  Scheduled</a:t>
+                <a:latin typeface="Calibri" pitchFamily="34" charset="0"/>
+              </a:rPr>
+              <a:t xml:space="preserve">RET-00003 7 years after claim close · Scheduled</a:t>
+            </a:r>
+          </a:p>
+        </p:txBody>
+      </p:sp>
+      <p:sp>
+        <p:nvSpPr>
+          <p:cNvPr id="63" name="t63"/>
+          <p:cNvSpPr txBox="1"/>
+          <p:nvPr/>
+        </p:nvSpPr>
+        <p:spPr>
+          <a:xfrm>
+            <a:off x="420000" y="4580000"/>
+            <a:ext cx="11300000" cy="420000"/>
+          </a:xfrm>
+          <a:prstGeom prst="rect">
+            <a:avLst/>
+          </a:prstGeom>
+          <a:noFill/>
+        </p:spPr>
+        <p:txBody>
+          <a:bodyPr wrap="square" anchor="t" lIns="45720" tIns="22860" rIns="45720" bIns="22860"/>
+          <a:lstStyle/>
+          <a:p>
+            <a:pPr algn="l"/>
+            <a:r>
+              <a:rPr lang="en-US" sz="1300" b="0" dirty="0">
+                <a:solidFill>
+                  <a:srgbClr val="0F172A"/>
+                </a:solidFill>
+                <a:latin typeface="Calibri" pitchFamily="34" charset="0"/>
+              </a:rPr>
+              <a:t xml:space="preserve">RET-00004 7 years after claim close · Scheduled</a:t>
             </a:r>
           </a:p>
         </p:txBody>
@@ -8002,7 +8487,9 @@
             <a:ext cx="12192000" cy="340000"/>
           </a:xfrm>
           <a:prstGeom prst="roundRect">
-            <a:avLst/>
+            <a:avLst>
+              <a:gd name="adj" fmla="val 6000"/>
+            </a:avLst>
           </a:prstGeom>
           <a:solidFill>
             <a:srgbClr val="F1F5F9"/>
@@ -8036,7 +8523,7 @@
           <a:noFill/>
         </p:spPr>
         <p:txBody>
-          <a:bodyPr wrap="square" anchor="t"/>
+          <a:bodyPr wrap="square" anchor="t" lIns="45720" tIns="22860" rIns="45720" bIns="22860"/>
           <a:lstStyle/>
           <a:p>
             <a:pPr algn="l"/>
@@ -8045,8 +8532,9 @@
                 <a:solidFill>
                   <a:srgbClr val="64748B"/>
                 </a:solidFill>
-              </a:rPr>
-              <a:t>Supreme Privacy Board Report  ·  Confidential  ·  Not legal advice</a:t>
+                <a:latin typeface="Calibri" pitchFamily="34" charset="0"/>
+              </a:rPr>
+              <a:t xml:space="preserve">Supreme Privacy Board Report · Confidential · Not legal advice</a:t>
             </a:r>
           </a:p>
         </p:txBody>
@@ -8068,7 +8556,7 @@
           <a:noFill/>
         </p:spPr>
         <p:txBody>
-          <a:bodyPr wrap="square" anchor="t"/>
+          <a:bodyPr wrap="square" anchor="t" lIns="45720" tIns="22860" rIns="45720" bIns="22860"/>
           <a:lstStyle/>
           <a:p>
             <a:pPr algn="r"/>
@@ -8077,8 +8565,9 @@
                 <a:solidFill>
                   <a:srgbClr val="64748B"/>
                 </a:solidFill>
-              </a:rPr>
-              <a:t>9 / 12</a:t>
+                <a:latin typeface="Calibri" pitchFamily="34" charset="0"/>
+              </a:rPr>
+              <a:t xml:space="preserve">9 / 12</a:t>
             </a:r>
           </a:p>
         </p:txBody>
@@ -8089,4 +8578,164 @@
     <a:masterClrMapping/>
   </p:clrMapOvr>
 </p:sld>
+</file>
+
+<file path=ppt/theme/theme1.xml><?xml version="1.0" encoding="utf-8"?>
+<a:theme xmlns:a="http://schemas.openxmlformats.org/drawingml/2006/main" name="Supreme Board">
+  <a:themeElements>
+    <a:clrScheme name="Supreme">
+      <a:dk1>
+        <a:srgbClr val="0F172A"/>
+      </a:dk1>
+      <a:lt1>
+        <a:srgbClr val="FFFFFF"/>
+      </a:lt1>
+      <a:dk2>
+        <a:srgbClr val="1E293B"/>
+      </a:dk2>
+      <a:lt2>
+        <a:srgbClr val="F8FAFC"/>
+      </a:lt2>
+      <a:accent1>
+        <a:srgbClr val="C5A46E"/>
+      </a:accent1>
+      <a:accent2>
+        <a:srgbClr val="334155"/>
+      </a:accent2>
+      <a:accent3>
+        <a:srgbClr val="475569"/>
+      </a:accent3>
+      <a:accent4>
+        <a:srgbClr val="94A3B8"/>
+      </a:accent4>
+      <a:accent5>
+        <a:srgbClr val="CBD5E1"/>
+      </a:accent5>
+      <a:accent6>
+        <a:srgbClr val="E2E8F0"/>
+      </a:accent6>
+      <a:hlink>
+        <a:srgbClr val="2563EB"/>
+      </a:hlink>
+      <a:folHlink>
+        <a:srgbClr val="7C3AED"/>
+      </a:folHlink>
+    </a:clrScheme>
+    <a:fontScheme name="Supreme">
+      <a:majorFont>
+        <a:latin typeface="Calibri"/>
+        <a:ea typeface=""/>
+        <a:cs typeface=""/>
+      </a:majorFont>
+      <a:minorFont>
+        <a:latin typeface="Calibri"/>
+        <a:ea typeface=""/>
+        <a:cs typeface=""/>
+      </a:minorFont>
+    </a:fontScheme>
+    <a:fmtScheme name="Supreme">
+      <a:fillStyleLst>
+        <a:solidFill>
+          <a:schemeClr val="phClr"/>
+        </a:solidFill>
+        <a:gradFill rotWithShape="1">
+          <a:gsLst>
+            <a:gs pos="0">
+              <a:schemeClr val="phClr">
+                <a:tint val="50000"/>
+                <a:satMod val="300000"/>
+              </a:schemeClr>
+            </a:gs>
+            <a:gs pos="35000">
+              <a:schemeClr val="phClr">
+                <a:tint val="37000"/>
+                <a:satMod val="300000"/>
+              </a:schemeClr>
+            </a:gs>
+            <a:gs pos="100000">
+              <a:schemeClr val="phClr">
+                <a:tint val="15000"/>
+                <a:satMod val="350000"/>
+              </a:schemeClr>
+            </a:gs>
+          </a:gsLst>
+          <a:lin ang="16200000" scaled="1"/>
+        </a:gradFill>
+        <a:gradFill rotWithShape="1">
+          <a:gsLst>
+            <a:gs pos="0">
+              <a:schemeClr val="phClr">
+                <a:tint val="100000"/>
+                <a:satMod val="600000"/>
+              </a:schemeClr>
+            </a:gs>
+            <a:gs pos="100000">
+              <a:schemeClr val="phClr">
+                <a:shade val="100000"/>
+                <a:satMod val="200000"/>
+              </a:schemeClr>
+            </a:gs>
+          </a:gsLst>
+          <a:lin ang="16200000" scaled="0"/>
+        </a:gradFill>
+      </a:fillStyleLst>
+      <a:lnStyleLst>
+        <a:ln w="9525" cap="flat" cmpd="sng" algn="ctr">
+          <a:solidFill>
+            <a:schemeClr val="phClr"/>
+          </a:solidFill>
+          <a:prstDash val="solid"/>
+        </a:ln>
+        <a:ln w="25400" cap="flat" cmpd="sng" algn="ctr">
+          <a:solidFill>
+            <a:schemeClr val="phClr"/>
+          </a:solidFill>
+          <a:prstDash val="solid"/>
+        </a:ln>
+        <a:ln w="38100" cap="flat" cmpd="sng" algn="ctr">
+          <a:solidFill>
+            <a:schemeClr val="phClr"/>
+          </a:solidFill>
+          <a:prstDash val="solid"/>
+        </a:ln>
+      </a:lnStyleLst>
+      <a:effectStyleLst>
+        <a:effectStyle>
+          <a:effectLst/>
+        </a:effectStyle>
+        <a:effectStyle>
+          <a:effectLst/>
+        </a:effectStyle>
+        <a:effectStyle>
+          <a:effectLst/>
+        </a:effectStyle>
+      </a:effectStyleLst>
+      <a:bgFillStyleLst>
+        <a:solidFill>
+          <a:schemeClr val="phClr"/>
+        </a:solidFill>
+        <a:solidFill>
+          <a:schemeClr val="phClr">
+            <a:tint val="95000"/>
+          </a:schemeClr>
+        </a:solidFill>
+        <a:gradFill rotWithShape="1">
+          <a:gsLst>
+            <a:gs pos="0">
+              <a:schemeClr val="phClr">
+                <a:tint val="93000"/>
+              </a:schemeClr>
+            </a:gs>
+            <a:gs pos="100000">
+              <a:schemeClr val="phClr">
+                <a:shade val="91000"/>
+              </a:schemeClr>
+            </a:gs>
+          </a:gsLst>
+          <a:lin ang="5400000" scaled="0"/>
+        </a:gradFill>
+      </a:bgFillStyleLst>
+    </a:fmtScheme>
+  </a:themeElements>
+</a:theme>
 </file>
--- a/docs/private-beta/hosted-ux-qa/supreme-privacy/Supreme-Privacy-Board.pptx
+++ b/docs/private-beta/hosted-ux-qa/supreme-privacy/Supreme-Privacy-Board.pptx
@@ -2,7 +2,7 @@
 <file path=ppt/presentation.xml><?xml version="1.0" encoding="utf-8"?>
 <p:presentation xmlns:a="http://schemas.openxmlformats.org/drawingml/2006/main" xmlns:r="http://schemas.openxmlformats.org/officeDocument/2006/relationships" xmlns:p="http://schemas.openxmlformats.org/presentationml/2006/main">
   <p:sldMasterIdLst>
-    <p:sldMasterId id="2147483648" r:id="rId13"/>
+    <p:sldMasterId id="2147483648" r:id="rId15"/>
   </p:sldMasterIdLst>
   <p:sldIdLst>
     <p:sldId id="256" r:id="rId1"/>
@@ -17,6 +17,8 @@
     <p:sldId id="265" r:id="rId10"/>
     <p:sldId id="266" r:id="rId11"/>
     <p:sldId id="267" r:id="rId12"/>
+    <p:sldId id="268" r:id="rId13"/>
+    <p:sldId id="269" r:id="rId14"/>
   </p:sldIdLst>
   <p:sldSz cx="12192000" cy="6858000" type="screen16x9"/>
   <p:notesSz cx="6858000" cy="9144000"/>
@@ -944,22 +946,22 @@
       </p:sp>
       <p:sp>
         <p:nvSpPr>
-          <p:cNvPr id="60" name="t60"/>
+          <p:cNvPr id="60" name="n60"/>
           <p:cNvSpPr txBox="1"/>
           <p:nvPr/>
         </p:nvSpPr>
         <p:spPr>
           <a:xfrm>
             <a:off x="420000" y="3200000"/>
-            <a:ext cx="11300000" cy="420000"/>
-          </a:xfrm>
-          <a:prstGeom prst="rect">
-            <a:avLst/>
-          </a:prstGeom>
-          <a:noFill/>
-        </p:spPr>
-        <p:txBody>
-          <a:bodyPr wrap="square" anchor="t" lIns="45720" tIns="22860" rIns="45720" bIns="22860"/>
+            <a:ext cx="11300000" cy="610000"/>
+          </a:xfrm>
+          <a:prstGeom prst="rect">
+            <a:avLst/>
+          </a:prstGeom>
+          <a:noFill/>
+        </p:spPr>
+        <p:txBody>
+          <a:bodyPr wrap="square" anchor="t" lIns="45720" tIns="8000" rIns="45720" bIns="8000"/>
           <a:lstStyle/>
           <a:p>
             <a:pPr algn="l"/>
@@ -970,30 +972,9 @@
                 </a:solidFill>
                 <a:latin typeface="Calibri" pitchFamily="34" charset="0"/>
               </a:rPr>
-              <a:t xml:space="preserve">GAP-00001 Open privacy-related gap: GAP-00001 500.07 is mapped to controls that are not implemented. A gap is remaining work, not a legal co</a:t>
-            </a:r>
-          </a:p>
-        </p:txBody>
-      </p:sp>
-      <p:sp>
-        <p:nvSpPr>
-          <p:cNvPr id="61" name="t61"/>
-          <p:cNvSpPr txBox="1"/>
-          <p:nvPr/>
-        </p:nvSpPr>
-        <p:spPr>
-          <a:xfrm>
-            <a:off x="420000" y="3660000"/>
-            <a:ext cx="11300000" cy="420000"/>
-          </a:xfrm>
-          <a:prstGeom prst="rect">
-            <a:avLst/>
-          </a:prstGeom>
-          <a:noFill/>
-        </p:spPr>
-        <p:txBody>
-          <a:bodyPr wrap="square" anchor="t" lIns="45720" tIns="22860" rIns="45720" bIns="22860"/>
-          <a:lstStyle/>
+              <a:t xml:space="preserve">GAP-00001 Open privacy-related gap: GAP-00001 500.07 is mapped to controls that are not</a:t>
+            </a:r>
+          </a:p>
           <a:p>
             <a:pPr algn="l"/>
             <a:r>
@@ -1003,29 +984,29 @@
                 </a:solidFill>
                 <a:latin typeface="Calibri" pitchFamily="34" charset="0"/>
               </a:rPr>
-              <a:t xml:space="preserve">GAP-00003 Open privacy-related gap: GAP-00003 A.15 is mapped to controls that are not implemented. A gap is remaining work, not a legal conc</a:t>
-            </a:r>
-          </a:p>
-        </p:txBody>
-      </p:sp>
-      <p:sp>
-        <p:nvSpPr>
-          <p:cNvPr id="62" name="t62"/>
-          <p:cNvSpPr txBox="1"/>
-          <p:nvPr/>
-        </p:nvSpPr>
-        <p:spPr>
-          <a:xfrm>
-            <a:off x="420000" y="4120000"/>
-            <a:ext cx="11300000" cy="420000"/>
-          </a:xfrm>
-          <a:prstGeom prst="rect">
-            <a:avLst/>
-          </a:prstGeom>
-          <a:noFill/>
-        </p:spPr>
-        <p:txBody>
-          <a:bodyPr wrap="square" anchor="t" lIns="45720" tIns="22860" rIns="45720" bIns="22860"/>
+              <a:t xml:space="preserve">implemented. A gap is remaining work, not a legal conclusion.</a:t>
+            </a:r>
+          </a:p>
+        </p:txBody>
+      </p:sp>
+      <p:sp>
+        <p:nvSpPr>
+          <p:cNvPr id="61" name="n61"/>
+          <p:cNvSpPr txBox="1"/>
+          <p:nvPr/>
+        </p:nvSpPr>
+        <p:spPr>
+          <a:xfrm>
+            <a:off x="420000" y="3870000"/>
+            <a:ext cx="11300000" cy="610000"/>
+          </a:xfrm>
+          <a:prstGeom prst="rect">
+            <a:avLst/>
+          </a:prstGeom>
+          <a:noFill/>
+        </p:spPr>
+        <p:txBody>
+          <a:bodyPr wrap="square" anchor="t" lIns="45720" tIns="8000" rIns="45720" bIns="8000"/>
           <a:lstStyle/>
           <a:p>
             <a:pPr algn="l"/>
@@ -1036,30 +1017,9 @@
                 </a:solidFill>
                 <a:latin typeface="Calibri" pitchFamily="34" charset="0"/>
               </a:rPr>
-              <a:t xml:space="preserve">GAP-00002 Open privacy-related gap: GAP-00002 500.07 has no current CLEAN evidence. A gap is remaining work, not a legal conclusion.</a:t>
-            </a:r>
-          </a:p>
-        </p:txBody>
-      </p:sp>
-      <p:sp>
-        <p:nvSpPr>
-          <p:cNvPr id="63" name="t63"/>
-          <p:cNvSpPr txBox="1"/>
-          <p:nvPr/>
-        </p:nvSpPr>
-        <p:spPr>
-          <a:xfrm>
-            <a:off x="420000" y="4580000"/>
-            <a:ext cx="11300000" cy="420000"/>
-          </a:xfrm>
-          <a:prstGeom prst="rect">
-            <a:avLst/>
-          </a:prstGeom>
-          <a:noFill/>
-        </p:spPr>
-        <p:txBody>
-          <a:bodyPr wrap="square" anchor="t" lIns="45720" tIns="22860" rIns="45720" bIns="22860"/>
-          <a:lstStyle/>
+              <a:t xml:space="preserve">GAP-00003 Open privacy-related gap: GAP-00003 A.15 is mapped to controls that are not</a:t>
+            </a:r>
+          </a:p>
           <a:p>
             <a:pPr algn="l"/>
             <a:r>
@@ -1069,7 +1029,97 @@
                 </a:solidFill>
                 <a:latin typeface="Calibri" pitchFamily="34" charset="0"/>
               </a:rPr>
-              <a:t xml:space="preserve">GAP-00004 Open privacy-related gap: GAP-00004 A.15 has no current CLEAN evidence. A gap is remaining work, not a legal conclusion.</a:t>
+              <a:t xml:space="preserve">implemented. A gap is remaining work, not a legal conclusion.</a:t>
+            </a:r>
+          </a:p>
+        </p:txBody>
+      </p:sp>
+      <p:sp>
+        <p:nvSpPr>
+          <p:cNvPr id="62" name="n62"/>
+          <p:cNvSpPr txBox="1"/>
+          <p:nvPr/>
+        </p:nvSpPr>
+        <p:spPr>
+          <a:xfrm>
+            <a:off x="420000" y="4540000"/>
+            <a:ext cx="11300000" cy="610000"/>
+          </a:xfrm>
+          <a:prstGeom prst="rect">
+            <a:avLst/>
+          </a:prstGeom>
+          <a:noFill/>
+        </p:spPr>
+        <p:txBody>
+          <a:bodyPr wrap="square" anchor="t" lIns="45720" tIns="8000" rIns="45720" bIns="8000"/>
+          <a:lstStyle/>
+          <a:p>
+            <a:pPr algn="l"/>
+            <a:r>
+              <a:rPr lang="en-US" sz="1300" b="0" dirty="0">
+                <a:solidFill>
+                  <a:srgbClr val="0F172A"/>
+                </a:solidFill>
+                <a:latin typeface="Calibri" pitchFamily="34" charset="0"/>
+              </a:rPr>
+              <a:t xml:space="preserve">GAP-00002 Open privacy-related gap: GAP-00002 500.07 has no current CLEAN evidence. A</a:t>
+            </a:r>
+          </a:p>
+          <a:p>
+            <a:pPr algn="l"/>
+            <a:r>
+              <a:rPr lang="en-US" sz="1300" b="0" dirty="0">
+                <a:solidFill>
+                  <a:srgbClr val="0F172A"/>
+                </a:solidFill>
+                <a:latin typeface="Calibri" pitchFamily="34" charset="0"/>
+              </a:rPr>
+              <a:t xml:space="preserve">gap is remaining work, not a legal conclusion.</a:t>
+            </a:r>
+          </a:p>
+        </p:txBody>
+      </p:sp>
+      <p:sp>
+        <p:nvSpPr>
+          <p:cNvPr id="63" name="n63"/>
+          <p:cNvSpPr txBox="1"/>
+          <p:nvPr/>
+        </p:nvSpPr>
+        <p:spPr>
+          <a:xfrm>
+            <a:off x="420000" y="5210000"/>
+            <a:ext cx="11300000" cy="610000"/>
+          </a:xfrm>
+          <a:prstGeom prst="rect">
+            <a:avLst/>
+          </a:prstGeom>
+          <a:noFill/>
+        </p:spPr>
+        <p:txBody>
+          <a:bodyPr wrap="square" anchor="t" lIns="45720" tIns="8000" rIns="45720" bIns="8000"/>
+          <a:lstStyle/>
+          <a:p>
+            <a:pPr algn="l"/>
+            <a:r>
+              <a:rPr lang="en-US" sz="1300" b="0" dirty="0">
+                <a:solidFill>
+                  <a:srgbClr val="0F172A"/>
+                </a:solidFill>
+                <a:latin typeface="Calibri" pitchFamily="34" charset="0"/>
+              </a:rPr>
+              <a:t xml:space="preserve">GAP-00004 Open privacy-related gap: GAP-00004 A.15 has no current CLEAN evidence. A gap</a:t>
+            </a:r>
+          </a:p>
+          <a:p>
+            <a:pPr algn="l"/>
+            <a:r>
+              <a:rPr lang="en-US" sz="1300" b="0" dirty="0">
+                <a:solidFill>
+                  <a:srgbClr val="0F172A"/>
+                </a:solidFill>
+                <a:latin typeface="Calibri" pitchFamily="34" charset="0"/>
+              </a:rPr>
+              <a:t xml:space="preserve">is remaining work, not a legal conclusion.</a:t>
             </a:r>
           </a:p>
         </p:txBody>
@@ -1166,7 +1216,7 @@
                 </a:solidFill>
                 <a:latin typeface="Calibri" pitchFamily="34" charset="0"/>
               </a:rPr>
-              <a:t xml:space="preserve">10 / 12</a:t>
+              <a:t xml:space="preserve">10 / 14</a:t>
             </a:r>
           </a:p>
         </p:txBody>
@@ -1326,22 +1376,22 @@
       </p:sp>
       <p:sp>
         <p:nvSpPr>
-          <p:cNvPr id="20" name="t20"/>
+          <p:cNvPr id="20" name="n20"/>
           <p:cNvSpPr txBox="1"/>
           <p:nvPr/>
         </p:nvSpPr>
         <p:spPr>
           <a:xfrm>
             <a:off x="420000" y="1680000"/>
-            <a:ext cx="11300000" cy="420000"/>
-          </a:xfrm>
-          <a:prstGeom prst="rect">
-            <a:avLst/>
-          </a:prstGeom>
-          <a:noFill/>
-        </p:spPr>
-        <p:txBody>
-          <a:bodyPr wrap="square" anchor="t" lIns="45720" tIns="22860" rIns="45720" bIns="22860"/>
+            <a:ext cx="11300000" cy="610000"/>
+          </a:xfrm>
+          <a:prstGeom prst="rect">
+            <a:avLst/>
+          </a:prstGeom>
+          <a:noFill/>
+        </p:spPr>
+        <p:txBody>
+          <a:bodyPr wrap="square" anchor="t" lIns="45720" tIns="8000" rIns="45720" bIns="8000"/>
           <a:lstStyle/>
           <a:p>
             <a:pPr algn="l"/>
@@ -1352,30 +1402,9 @@
                 </a:solidFill>
                 <a:latin typeface="Calibri" pitchFamily="34" charset="0"/>
               </a:rPr>
-              <a:t xml:space="preserve">XFR-00001 Transfer requiring review — XFR-00001 US-NY → IE is recorded as review required. This is not a lawfulness finding.</a:t>
-            </a:r>
-          </a:p>
-        </p:txBody>
-      </p:sp>
-      <p:sp>
-        <p:nvSpPr>
-          <p:cNvPr id="21" name="t21"/>
-          <p:cNvSpPr txBox="1"/>
-          <p:nvPr/>
-        </p:nvSpPr>
-        <p:spPr>
-          <a:xfrm>
-            <a:off x="420000" y="2140000"/>
-            <a:ext cx="11300000" cy="420000"/>
-          </a:xfrm>
-          <a:prstGeom prst="rect">
-            <a:avLst/>
-          </a:prstGeom>
-          <a:noFill/>
-        </p:spPr>
-        <p:txBody>
-          <a:bodyPr wrap="square" anchor="t" lIns="45720" tIns="22860" rIns="45720" bIns="22860"/>
-          <a:lstStyle/>
+              <a:t xml:space="preserve">XFR-00001 Transfer requiring review — XFR-00001 US-NY → IE is recorded as review</a:t>
+            </a:r>
+          </a:p>
           <a:p>
             <a:pPr algn="l"/>
             <a:r>
@@ -1385,29 +1414,29 @@
                 </a:solidFill>
                 <a:latin typeface="Calibri" pitchFamily="34" charset="0"/>
               </a:rPr>
-              <a:t xml:space="preserve">XFR-00002 Transfer requiring review — XFR-00002 US-NY → IE is recorded as review required. This is not a lawfulness finding.</a:t>
-            </a:r>
-          </a:p>
-        </p:txBody>
-      </p:sp>
-      <p:sp>
-        <p:nvSpPr>
-          <p:cNvPr id="22" name="t22"/>
-          <p:cNvSpPr txBox="1"/>
-          <p:nvPr/>
-        </p:nvSpPr>
-        <p:spPr>
-          <a:xfrm>
-            <a:off x="420000" y="2600000"/>
-            <a:ext cx="11300000" cy="420000"/>
-          </a:xfrm>
-          <a:prstGeom prst="rect">
-            <a:avLst/>
-          </a:prstGeom>
-          <a:noFill/>
-        </p:spPr>
-        <p:txBody>
-          <a:bodyPr wrap="square" anchor="t" lIns="45720" tIns="22860" rIns="45720" bIns="22860"/>
+              <a:t xml:space="preserve">required. This is not a lawfulness finding.</a:t>
+            </a:r>
+          </a:p>
+        </p:txBody>
+      </p:sp>
+      <p:sp>
+        <p:nvSpPr>
+          <p:cNvPr id="21" name="n21"/>
+          <p:cNvSpPr txBox="1"/>
+          <p:nvPr/>
+        </p:nvSpPr>
+        <p:spPr>
+          <a:xfrm>
+            <a:off x="420000" y="2360000"/>
+            <a:ext cx="11300000" cy="610000"/>
+          </a:xfrm>
+          <a:prstGeom prst="rect">
+            <a:avLst/>
+          </a:prstGeom>
+          <a:noFill/>
+        </p:spPr>
+        <p:txBody>
+          <a:bodyPr wrap="square" anchor="t" lIns="45720" tIns="8000" rIns="45720" bIns="8000"/>
           <a:lstStyle/>
           <a:p>
             <a:pPr algn="l"/>
@@ -1418,30 +1447,9 @@
                 </a:solidFill>
                 <a:latin typeface="Calibri" pitchFamily="34" charset="0"/>
               </a:rPr>
-              <a:t xml:space="preserve">XFR-00003 Transfer requiring review — XFR-00003 US-NY → IE is recorded as review required. This is not a lawfulness finding.</a:t>
-            </a:r>
-          </a:p>
-        </p:txBody>
-      </p:sp>
-      <p:sp>
-        <p:nvSpPr>
-          <p:cNvPr id="23" name="t23"/>
-          <p:cNvSpPr txBox="1"/>
-          <p:nvPr/>
-        </p:nvSpPr>
-        <p:spPr>
-          <a:xfrm>
-            <a:off x="420000" y="3060000"/>
-            <a:ext cx="11300000" cy="420000"/>
-          </a:xfrm>
-          <a:prstGeom prst="rect">
-            <a:avLst/>
-          </a:prstGeom>
-          <a:noFill/>
-        </p:spPr>
-        <p:txBody>
-          <a:bodyPr wrap="square" anchor="t" lIns="45720" tIns="22860" rIns="45720" bIns="22860"/>
-          <a:lstStyle/>
+              <a:t xml:space="preserve">XFR-00002 Transfer requiring review — XFR-00002 US-NY → IE is recorded as review</a:t>
+            </a:r>
+          </a:p>
           <a:p>
             <a:pPr algn="l"/>
             <a:r>
@@ -1451,29 +1459,29 @@
                 </a:solidFill>
                 <a:latin typeface="Calibri" pitchFamily="34" charset="0"/>
               </a:rPr>
-              <a:t xml:space="preserve">XFR-00004 Transfer requiring review — XFR-00004 US-NY → IE is recorded as review required. This is not a lawfulness finding.</a:t>
-            </a:r>
-          </a:p>
-        </p:txBody>
-      </p:sp>
-      <p:sp>
-        <p:nvSpPr>
-          <p:cNvPr id="24" name="t24"/>
-          <p:cNvSpPr txBox="1"/>
-          <p:nvPr/>
-        </p:nvSpPr>
-        <p:spPr>
-          <a:xfrm>
-            <a:off x="420000" y="3520000"/>
-            <a:ext cx="11300000" cy="420000"/>
-          </a:xfrm>
-          <a:prstGeom prst="rect">
-            <a:avLst/>
-          </a:prstGeom>
-          <a:noFill/>
-        </p:spPr>
-        <p:txBody>
-          <a:bodyPr wrap="square" anchor="t" lIns="45720" tIns="22860" rIns="45720" bIns="22860"/>
+              <a:t xml:space="preserve">required. This is not a lawfulness finding.</a:t>
+            </a:r>
+          </a:p>
+        </p:txBody>
+      </p:sp>
+      <p:sp>
+        <p:nvSpPr>
+          <p:cNvPr id="22" name="n22"/>
+          <p:cNvSpPr txBox="1"/>
+          <p:nvPr/>
+        </p:nvSpPr>
+        <p:spPr>
+          <a:xfrm>
+            <a:off x="420000" y="3040000"/>
+            <a:ext cx="11300000" cy="610000"/>
+          </a:xfrm>
+          <a:prstGeom prst="rect">
+            <a:avLst/>
+          </a:prstGeom>
+          <a:noFill/>
+        </p:spPr>
+        <p:txBody>
+          <a:bodyPr wrap="square" anchor="t" lIns="45720" tIns="8000" rIns="45720" bIns="8000"/>
           <a:lstStyle/>
           <a:p>
             <a:pPr algn="l"/>
@@ -1484,7 +1492,154 @@
                 </a:solidFill>
                 <a:latin typeface="Calibri" pitchFamily="34" charset="0"/>
               </a:rPr>
-              <a:t xml:space="preserve">GAP-00001 Open privacy-related gap — GAP-00001 500.07 is mapped to controls that are not implemented. A gap is remaining work, not a legal c</a:t>
+              <a:t xml:space="preserve">XFR-00003 Transfer requiring review — XFR-00003 US-NY → IE is recorded as review</a:t>
+            </a:r>
+          </a:p>
+          <a:p>
+            <a:pPr algn="l"/>
+            <a:r>
+              <a:rPr lang="en-US" sz="1300" b="0" dirty="0">
+                <a:solidFill>
+                  <a:srgbClr val="0F172A"/>
+                </a:solidFill>
+                <a:latin typeface="Calibri" pitchFamily="34" charset="0"/>
+              </a:rPr>
+              <a:t xml:space="preserve">required. This is not a lawfulness finding.</a:t>
+            </a:r>
+          </a:p>
+        </p:txBody>
+      </p:sp>
+      <p:sp>
+        <p:nvSpPr>
+          <p:cNvPr id="23" name="n23"/>
+          <p:cNvSpPr txBox="1"/>
+          <p:nvPr/>
+        </p:nvSpPr>
+        <p:spPr>
+          <a:xfrm>
+            <a:off x="420000" y="3720000"/>
+            <a:ext cx="11300000" cy="610000"/>
+          </a:xfrm>
+          <a:prstGeom prst="rect">
+            <a:avLst/>
+          </a:prstGeom>
+          <a:noFill/>
+        </p:spPr>
+        <p:txBody>
+          <a:bodyPr wrap="square" anchor="t" lIns="45720" tIns="8000" rIns="45720" bIns="8000"/>
+          <a:lstStyle/>
+          <a:p>
+            <a:pPr algn="l"/>
+            <a:r>
+              <a:rPr lang="en-US" sz="1300" b="0" dirty="0">
+                <a:solidFill>
+                  <a:srgbClr val="0F172A"/>
+                </a:solidFill>
+                <a:latin typeface="Calibri" pitchFamily="34" charset="0"/>
+              </a:rPr>
+              <a:t xml:space="preserve">XFR-00004 Transfer requiring review — XFR-00004 US-NY → IE is recorded as review</a:t>
+            </a:r>
+          </a:p>
+          <a:p>
+            <a:pPr algn="l"/>
+            <a:r>
+              <a:rPr lang="en-US" sz="1300" b="0" dirty="0">
+                <a:solidFill>
+                  <a:srgbClr val="0F172A"/>
+                </a:solidFill>
+                <a:latin typeface="Calibri" pitchFamily="34" charset="0"/>
+              </a:rPr>
+              <a:t xml:space="preserve">required. This is not a lawfulness finding.</a:t>
+            </a:r>
+          </a:p>
+        </p:txBody>
+      </p:sp>
+      <p:sp>
+        <p:nvSpPr>
+          <p:cNvPr id="24" name="n24"/>
+          <p:cNvSpPr txBox="1"/>
+          <p:nvPr/>
+        </p:nvSpPr>
+        <p:spPr>
+          <a:xfrm>
+            <a:off x="420000" y="4400000"/>
+            <a:ext cx="11300000" cy="610000"/>
+          </a:xfrm>
+          <a:prstGeom prst="rect">
+            <a:avLst/>
+          </a:prstGeom>
+          <a:noFill/>
+        </p:spPr>
+        <p:txBody>
+          <a:bodyPr wrap="square" anchor="t" lIns="45720" tIns="8000" rIns="45720" bIns="8000"/>
+          <a:lstStyle/>
+          <a:p>
+            <a:pPr algn="l"/>
+            <a:r>
+              <a:rPr lang="en-US" sz="1300" b="0" dirty="0">
+                <a:solidFill>
+                  <a:srgbClr val="0F172A"/>
+                </a:solidFill>
+                <a:latin typeface="Calibri" pitchFamily="34" charset="0"/>
+              </a:rPr>
+              <a:t xml:space="preserve">GAP-00001 Open privacy-related gap — GAP-00001 500.07 is mapped to controls that are not</a:t>
+            </a:r>
+          </a:p>
+          <a:p>
+            <a:pPr algn="l"/>
+            <a:r>
+              <a:rPr lang="en-US" sz="1300" b="0" dirty="0">
+                <a:solidFill>
+                  <a:srgbClr val="0F172A"/>
+                </a:solidFill>
+                <a:latin typeface="Calibri" pitchFamily="34" charset="0"/>
+              </a:rPr>
+              <a:t xml:space="preserve">implemented. A gap is remaining work, not a legal conclusion.</a:t>
+            </a:r>
+          </a:p>
+        </p:txBody>
+      </p:sp>
+      <p:sp>
+        <p:nvSpPr>
+          <p:cNvPr id="25" name="n25"/>
+          <p:cNvSpPr txBox="1"/>
+          <p:nvPr/>
+        </p:nvSpPr>
+        <p:spPr>
+          <a:xfrm>
+            <a:off x="420000" y="5080000"/>
+            <a:ext cx="11300000" cy="610000"/>
+          </a:xfrm>
+          <a:prstGeom prst="rect">
+            <a:avLst/>
+          </a:prstGeom>
+          <a:noFill/>
+        </p:spPr>
+        <p:txBody>
+          <a:bodyPr wrap="square" anchor="t" lIns="45720" tIns="8000" rIns="45720" bIns="8000"/>
+          <a:lstStyle/>
+          <a:p>
+            <a:pPr algn="l"/>
+            <a:r>
+              <a:rPr lang="en-US" sz="1300" b="0" dirty="0">
+                <a:solidFill>
+                  <a:srgbClr val="0F172A"/>
+                </a:solidFill>
+                <a:latin typeface="Calibri" pitchFamily="34" charset="0"/>
+              </a:rPr>
+              <a:t xml:space="preserve">GAP-00003 Open privacy-related gap — GAP-00003 A.15 is mapped to controls that are not</a:t>
+            </a:r>
+          </a:p>
+          <a:p>
+            <a:pPr algn="l"/>
+            <a:r>
+              <a:rPr lang="en-US" sz="1300" b="0" dirty="0">
+                <a:solidFill>
+                  <a:srgbClr val="0F172A"/>
+                </a:solidFill>
+                <a:latin typeface="Calibri" pitchFamily="34" charset="0"/>
+              </a:rPr>
+              <a:t xml:space="preserve">implemented. A gap is remaining work, not a legal conclusion.</a:t>
             </a:r>
           </a:p>
         </p:txBody>
@@ -1581,7 +1736,7 @@
                 </a:solidFill>
                 <a:latin typeface="Calibri" pitchFamily="34" charset="0"/>
               </a:rPr>
-              <a:t xml:space="preserve">11 / 12</a:t>
+              <a:t xml:space="preserve">11 / 14</a:t>
             </a:r>
           </a:p>
         </p:txBody>
@@ -1701,7 +1856,7 @@
                 </a:solidFill>
                 <a:latin typeface="Calibri" pitchFamily="34" charset="0"/>
               </a:rPr>
-              <a:t xml:space="preserve">Priority actions / next 90 days</a:t>
+              <a:t xml:space="preserve">Key decisions required · continued</a:t>
             </a:r>
           </a:p>
         </p:txBody>
@@ -1734,29 +1889,29 @@
                 </a:solidFill>
                 <a:latin typeface="Calibri" pitchFamily="34" charset="0"/>
               </a:rPr>
-              <a:t xml:space="preserve">Taken from the live attention queue. No invented program.</a:t>
-            </a:r>
-          </a:p>
-        </p:txBody>
-      </p:sp>
-      <p:sp>
-        <p:nvSpPr>
-          <p:cNvPr id="20" name="t20"/>
+              <a:t xml:space="preserve">Human-authoritative. Supreme does not issue legal conclusions.</a:t>
+            </a:r>
+          </a:p>
+        </p:txBody>
+      </p:sp>
+      <p:sp>
+        <p:nvSpPr>
+          <p:cNvPr id="20" name="n20"/>
           <p:cNvSpPr txBox="1"/>
           <p:nvPr/>
         </p:nvSpPr>
         <p:spPr>
           <a:xfrm>
             <a:off x="420000" y="1680000"/>
-            <a:ext cx="11300000" cy="420000"/>
-          </a:xfrm>
-          <a:prstGeom prst="rect">
-            <a:avLst/>
-          </a:prstGeom>
-          <a:noFill/>
-        </p:spPr>
-        <p:txBody>
-          <a:bodyPr wrap="square" anchor="t" lIns="45720" tIns="22860" rIns="45720" bIns="22860"/>
+            <a:ext cx="11300000" cy="610000"/>
+          </a:xfrm>
+          <a:prstGeom prst="rect">
+            <a:avLst/>
+          </a:prstGeom>
+          <a:noFill/>
+        </p:spPr>
+        <p:txBody>
+          <a:bodyPr wrap="square" anchor="t" lIns="45720" tIns="8000" rIns="45720" bIns="8000"/>
           <a:lstStyle/>
           <a:p>
             <a:pPr algn="l"/>
@@ -1767,30 +1922,9 @@
                 </a:solidFill>
                 <a:latin typeface="Calibri" pitchFamily="34" charset="0"/>
               </a:rPr>
-              <a:t xml:space="preserve">1. Review XFR-00001 — Transfer requiring review</a:t>
-            </a:r>
-          </a:p>
-        </p:txBody>
-      </p:sp>
-      <p:sp>
-        <p:nvSpPr>
-          <p:cNvPr id="21" name="t21"/>
-          <p:cNvSpPr txBox="1"/>
-          <p:nvPr/>
-        </p:nvSpPr>
-        <p:spPr>
-          <a:xfrm>
-            <a:off x="420000" y="2140000"/>
-            <a:ext cx="11300000" cy="420000"/>
-          </a:xfrm>
-          <a:prstGeom prst="rect">
-            <a:avLst/>
-          </a:prstGeom>
-          <a:noFill/>
-        </p:spPr>
-        <p:txBody>
-          <a:bodyPr wrap="square" anchor="t" lIns="45720" tIns="22860" rIns="45720" bIns="22860"/>
-          <a:lstStyle/>
+              <a:t xml:space="preserve">GAP-00002 Open privacy-related gap — GAP-00002 500.07 has no current CLEAN evidence. A</a:t>
+            </a:r>
+          </a:p>
           <a:p>
             <a:pPr algn="l"/>
             <a:r>
@@ -1800,29 +1934,29 @@
                 </a:solidFill>
                 <a:latin typeface="Calibri" pitchFamily="34" charset="0"/>
               </a:rPr>
-              <a:t xml:space="preserve">2. Review XFR-00002 — Transfer requiring review</a:t>
-            </a:r>
-          </a:p>
-        </p:txBody>
-      </p:sp>
-      <p:sp>
-        <p:nvSpPr>
-          <p:cNvPr id="22" name="t22"/>
-          <p:cNvSpPr txBox="1"/>
-          <p:nvPr/>
-        </p:nvSpPr>
-        <p:spPr>
-          <a:xfrm>
-            <a:off x="420000" y="2600000"/>
-            <a:ext cx="11300000" cy="420000"/>
-          </a:xfrm>
-          <a:prstGeom prst="rect">
-            <a:avLst/>
-          </a:prstGeom>
-          <a:noFill/>
-        </p:spPr>
-        <p:txBody>
-          <a:bodyPr wrap="square" anchor="t" lIns="45720" tIns="22860" rIns="45720" bIns="22860"/>
+              <a:t xml:space="preserve">gap is remaining work, not a legal conclusion.</a:t>
+            </a:r>
+          </a:p>
+        </p:txBody>
+      </p:sp>
+      <p:sp>
+        <p:nvSpPr>
+          <p:cNvPr id="21" name="n21"/>
+          <p:cNvSpPr txBox="1"/>
+          <p:nvPr/>
+        </p:nvSpPr>
+        <p:spPr>
+          <a:xfrm>
+            <a:off x="420000" y="2360000"/>
+            <a:ext cx="11300000" cy="610000"/>
+          </a:xfrm>
+          <a:prstGeom prst="rect">
+            <a:avLst/>
+          </a:prstGeom>
+          <a:noFill/>
+        </p:spPr>
+        <p:txBody>
+          <a:bodyPr wrap="square" anchor="t" lIns="45720" tIns="8000" rIns="45720" bIns="8000"/>
           <a:lstStyle/>
           <a:p>
             <a:pPr algn="l"/>
@@ -1833,30 +1967,9 @@
                 </a:solidFill>
                 <a:latin typeface="Calibri" pitchFamily="34" charset="0"/>
               </a:rPr>
-              <a:t xml:space="preserve">3. Review XFR-00003 — Transfer requiring review</a:t>
-            </a:r>
-          </a:p>
-        </p:txBody>
-      </p:sp>
-      <p:sp>
-        <p:nvSpPr>
-          <p:cNvPr id="23" name="t23"/>
-          <p:cNvSpPr txBox="1"/>
-          <p:nvPr/>
-        </p:nvSpPr>
-        <p:spPr>
-          <a:xfrm>
-            <a:off x="420000" y="3060000"/>
-            <a:ext cx="11300000" cy="420000"/>
-          </a:xfrm>
-          <a:prstGeom prst="rect">
-            <a:avLst/>
-          </a:prstGeom>
-          <a:noFill/>
-        </p:spPr>
-        <p:txBody>
-          <a:bodyPr wrap="square" anchor="t" lIns="45720" tIns="22860" rIns="45720" bIns="22860"/>
-          <a:lstStyle/>
+              <a:t xml:space="preserve">GAP-00004 Open privacy-related gap — GAP-00004 A.15 has no current CLEAN evidence. A gap</a:t>
+            </a:r>
+          </a:p>
           <a:p>
             <a:pPr algn="l"/>
             <a:r>
@@ -1866,73 +1979,7 @@
                 </a:solidFill>
                 <a:latin typeface="Calibri" pitchFamily="34" charset="0"/>
               </a:rPr>
-              <a:t xml:space="preserve">4. Review XFR-00004 — Transfer requiring review</a:t>
-            </a:r>
-          </a:p>
-        </p:txBody>
-      </p:sp>
-      <p:sp>
-        <p:nvSpPr>
-          <p:cNvPr id="24" name="t24"/>
-          <p:cNvSpPr txBox="1"/>
-          <p:nvPr/>
-        </p:nvSpPr>
-        <p:spPr>
-          <a:xfrm>
-            <a:off x="420000" y="3520000"/>
-            <a:ext cx="11300000" cy="420000"/>
-          </a:xfrm>
-          <a:prstGeom prst="rect">
-            <a:avLst/>
-          </a:prstGeom>
-          <a:noFill/>
-        </p:spPr>
-        <p:txBody>
-          <a:bodyPr wrap="square" anchor="t" lIns="45720" tIns="22860" rIns="45720" bIns="22860"/>
-          <a:lstStyle/>
-          <a:p>
-            <a:pPr algn="l"/>
-            <a:r>
-              <a:rPr lang="en-US" sz="1300" b="0" dirty="0">
-                <a:solidFill>
-                  <a:srgbClr val="0F172A"/>
-                </a:solidFill>
-                <a:latin typeface="Calibri" pitchFamily="34" charset="0"/>
-              </a:rPr>
-              <a:t xml:space="preserve">5. Review GAP-00001 — Open privacy-related gap</a:t>
-            </a:r>
-          </a:p>
-        </p:txBody>
-      </p:sp>
-      <p:sp>
-        <p:nvSpPr>
-          <p:cNvPr id="90" name="t90"/>
-          <p:cNvSpPr txBox="1"/>
-          <p:nvPr/>
-        </p:nvSpPr>
-        <p:spPr>
-          <a:xfrm>
-            <a:off x="420000" y="5600000"/>
-            <a:ext cx="11000000" cy="300000"/>
-          </a:xfrm>
-          <a:prstGeom prst="rect">
-            <a:avLst/>
-          </a:prstGeom>
-          <a:noFill/>
-        </p:spPr>
-        <p:txBody>
-          <a:bodyPr wrap="square" anchor="t" lIns="45720" tIns="22860" rIns="45720" bIns="22860"/>
-          <a:lstStyle/>
-          <a:p>
-            <a:pPr algn="l"/>
-            <a:r>
-              <a:rPr lang="en-US" sz="1200" b="0" dirty="0">
-                <a:solidFill>
-                  <a:srgbClr val="64748B"/>
-                </a:solidFill>
-                <a:latin typeface="Calibri" pitchFamily="34" charset="0"/>
-              </a:rPr>
-              <a:t xml:space="preserve">Consent collector remains not configured / manual. No trend available.</a:t>
+              <a:t xml:space="preserve">is remaining work, not a legal conclusion.</a:t>
             </a:r>
           </a:p>
         </p:txBody>
@@ -2029,7 +2076,900 @@
                 </a:solidFill>
                 <a:latin typeface="Calibri" pitchFamily="34" charset="0"/>
               </a:rPr>
-              <a:t xml:space="preserve">12 / 12</a:t>
+              <a:t xml:space="preserve">12 / 14</a:t>
+            </a:r>
+          </a:p>
+        </p:txBody>
+      </p:sp>
+    </p:spTree>
+  </p:cSld>
+  <p:clrMapOvr>
+    <a:masterClrMapping/>
+  </p:clrMapOvr>
+</p:sld>
+</file>
+
+<file path=ppt/slides/slide13.xml><?xml version="1.0" encoding="utf-8"?>
+<p:sld xmlns:a="http://schemas.openxmlformats.org/drawingml/2006/main" xmlns:r="http://schemas.openxmlformats.org/officeDocument/2006/relationships" xmlns:p="http://schemas.openxmlformats.org/presentationml/2006/main">
+  <p:cSld>
+    <p:spTree>
+      <p:nvGrpSpPr>
+        <p:cNvPr id="1" name=""/>
+        <p:cNvGrpSpPr/>
+        <p:nvPr/>
+      </p:nvGrpSpPr>
+      <p:grpSpPr>
+        <a:xfrm>
+          <a:off x="0" y="0"/>
+          <a:ext cx="0" cy="0"/>
+          <a:chOff x="0" y="0"/>
+          <a:chExt cx="0" cy="0"/>
+        </a:xfrm>
+      </p:grpSpPr>
+      <p:sp>
+        <p:nvSpPr>
+          <p:cNvPr id="3" name="bar"/>
+          <p:cNvSpPr/>
+          <p:nvPr/>
+        </p:nvSpPr>
+        <p:spPr>
+          <a:xfrm>
+            <a:off x="0" y="0"/>
+            <a:ext cx="12192000" cy="1180000"/>
+          </a:xfrm>
+          <a:prstGeom prst="roundRect">
+            <a:avLst>
+              <a:gd name="adj" fmla="val 6000"/>
+            </a:avLst>
+          </a:prstGeom>
+          <a:solidFill>
+            <a:srgbClr val="0F172A"/>
+          </a:solidFill>
+          <a:ln>
+            <a:noFill/>
+          </a:ln>
+        </p:spPr>
+        <p:txBody>
+          <a:bodyPr/>
+          <a:lstStyle/>
+          <a:p>
+            <a:endParaRPr/>
+          </a:p>
+        </p:txBody>
+      </p:sp>
+      <p:sp>
+        <p:nvSpPr>
+          <p:cNvPr id="4" name="gold"/>
+          <p:cNvSpPr/>
+          <p:nvPr/>
+        </p:nvSpPr>
+        <p:spPr>
+          <a:xfrm>
+            <a:off x="0" y="1180000"/>
+            <a:ext cx="12192000" cy="50000"/>
+          </a:xfrm>
+          <a:prstGeom prst="roundRect">
+            <a:avLst>
+              <a:gd name="adj" fmla="val 6000"/>
+            </a:avLst>
+          </a:prstGeom>
+          <a:solidFill>
+            <a:srgbClr val="C5A46E"/>
+          </a:solidFill>
+          <a:ln>
+            <a:noFill/>
+          </a:ln>
+        </p:spPr>
+        <p:txBody>
+          <a:bodyPr/>
+          <a:lstStyle/>
+          <a:p>
+            <a:endParaRPr/>
+          </a:p>
+        </p:txBody>
+      </p:sp>
+      <p:sp>
+        <p:nvSpPr>
+          <p:cNvPr id="5" name="t5"/>
+          <p:cNvSpPr txBox="1"/>
+          <p:nvPr/>
+        </p:nvSpPr>
+        <p:spPr>
+          <a:xfrm>
+            <a:off x="420000" y="220000"/>
+            <a:ext cx="11000000" cy="560000"/>
+          </a:xfrm>
+          <a:prstGeom prst="rect">
+            <a:avLst/>
+          </a:prstGeom>
+          <a:noFill/>
+        </p:spPr>
+        <p:txBody>
+          <a:bodyPr wrap="square" anchor="t" lIns="45720" tIns="22860" rIns="45720" bIns="22860"/>
+          <a:lstStyle/>
+          <a:p>
+            <a:pPr algn="l"/>
+            <a:r>
+              <a:rPr lang="en-US" sz="2600" b="1" dirty="0">
+                <a:solidFill>
+                  <a:srgbClr val="FFFFFF"/>
+                </a:solidFill>
+                <a:latin typeface="Calibri" pitchFamily="34" charset="0"/>
+              </a:rPr>
+              <a:t xml:space="preserve">Priority actions / next 90 days</a:t>
+            </a:r>
+          </a:p>
+        </p:txBody>
+      </p:sp>
+      <p:sp>
+        <p:nvSpPr>
+          <p:cNvPr id="6" name="t6"/>
+          <p:cNvSpPr txBox="1"/>
+          <p:nvPr/>
+        </p:nvSpPr>
+        <p:spPr>
+          <a:xfrm>
+            <a:off x="420000" y="740000"/>
+            <a:ext cx="11000000" cy="320000"/>
+          </a:xfrm>
+          <a:prstGeom prst="rect">
+            <a:avLst/>
+          </a:prstGeom>
+          <a:noFill/>
+        </p:spPr>
+        <p:txBody>
+          <a:bodyPr wrap="square" anchor="t" lIns="45720" tIns="22860" rIns="45720" bIns="22860"/>
+          <a:lstStyle/>
+          <a:p>
+            <a:pPr algn="l"/>
+            <a:r>
+              <a:rPr lang="en-US" sz="1200" b="0" dirty="0">
+                <a:solidFill>
+                  <a:srgbClr val="CBD5E1"/>
+                </a:solidFill>
+                <a:latin typeface="Calibri" pitchFamily="34" charset="0"/>
+              </a:rPr>
+              <a:t xml:space="preserve">Taken from the live attention queue. No invented program.</a:t>
+            </a:r>
+          </a:p>
+        </p:txBody>
+      </p:sp>
+      <p:sp>
+        <p:nvSpPr>
+          <p:cNvPr id="20" name="n20"/>
+          <p:cNvSpPr txBox="1"/>
+          <p:nvPr/>
+        </p:nvSpPr>
+        <p:spPr>
+          <a:xfrm>
+            <a:off x="420000" y="1680000"/>
+            <a:ext cx="11300000" cy="610000"/>
+          </a:xfrm>
+          <a:prstGeom prst="rect">
+            <a:avLst/>
+          </a:prstGeom>
+          <a:noFill/>
+        </p:spPr>
+        <p:txBody>
+          <a:bodyPr wrap="square" anchor="t" lIns="45720" tIns="8000" rIns="45720" bIns="8000"/>
+          <a:lstStyle/>
+          <a:p>
+            <a:pPr algn="l"/>
+            <a:r>
+              <a:rPr lang="en-US" sz="1300" b="0" dirty="0">
+                <a:solidFill>
+                  <a:srgbClr val="0F172A"/>
+                </a:solidFill>
+                <a:latin typeface="Calibri" pitchFamily="34" charset="0"/>
+              </a:rPr>
+              <a:t xml:space="preserve">1. Review XFR-00001 — Transfer requiring review. XFR-00001 US-NY → IE is recorded as</a:t>
+            </a:r>
+          </a:p>
+          <a:p>
+            <a:pPr algn="l"/>
+            <a:r>
+              <a:rPr lang="en-US" sz="1300" b="0" dirty="0">
+                <a:solidFill>
+                  <a:srgbClr val="0F172A"/>
+                </a:solidFill>
+                <a:latin typeface="Calibri" pitchFamily="34" charset="0"/>
+              </a:rPr>
+              <a:t xml:space="preserve">review required. This is not a lawfulness finding.</a:t>
+            </a:r>
+          </a:p>
+        </p:txBody>
+      </p:sp>
+      <p:sp>
+        <p:nvSpPr>
+          <p:cNvPr id="21" name="n21"/>
+          <p:cNvSpPr txBox="1"/>
+          <p:nvPr/>
+        </p:nvSpPr>
+        <p:spPr>
+          <a:xfrm>
+            <a:off x="420000" y="2360000"/>
+            <a:ext cx="11300000" cy="610000"/>
+          </a:xfrm>
+          <a:prstGeom prst="rect">
+            <a:avLst/>
+          </a:prstGeom>
+          <a:noFill/>
+        </p:spPr>
+        <p:txBody>
+          <a:bodyPr wrap="square" anchor="t" lIns="45720" tIns="8000" rIns="45720" bIns="8000"/>
+          <a:lstStyle/>
+          <a:p>
+            <a:pPr algn="l"/>
+            <a:r>
+              <a:rPr lang="en-US" sz="1300" b="0" dirty="0">
+                <a:solidFill>
+                  <a:srgbClr val="0F172A"/>
+                </a:solidFill>
+                <a:latin typeface="Calibri" pitchFamily="34" charset="0"/>
+              </a:rPr>
+              <a:t xml:space="preserve">2. Review XFR-00002 — Transfer requiring review. XFR-00002 US-NY → IE is recorded as</a:t>
+            </a:r>
+          </a:p>
+          <a:p>
+            <a:pPr algn="l"/>
+            <a:r>
+              <a:rPr lang="en-US" sz="1300" b="0" dirty="0">
+                <a:solidFill>
+                  <a:srgbClr val="0F172A"/>
+                </a:solidFill>
+                <a:latin typeface="Calibri" pitchFamily="34" charset="0"/>
+              </a:rPr>
+              <a:t xml:space="preserve">review required. This is not a lawfulness finding.</a:t>
+            </a:r>
+          </a:p>
+        </p:txBody>
+      </p:sp>
+      <p:sp>
+        <p:nvSpPr>
+          <p:cNvPr id="22" name="n22"/>
+          <p:cNvSpPr txBox="1"/>
+          <p:nvPr/>
+        </p:nvSpPr>
+        <p:spPr>
+          <a:xfrm>
+            <a:off x="420000" y="3040000"/>
+            <a:ext cx="11300000" cy="610000"/>
+          </a:xfrm>
+          <a:prstGeom prst="rect">
+            <a:avLst/>
+          </a:prstGeom>
+          <a:noFill/>
+        </p:spPr>
+        <p:txBody>
+          <a:bodyPr wrap="square" anchor="t" lIns="45720" tIns="8000" rIns="45720" bIns="8000"/>
+          <a:lstStyle/>
+          <a:p>
+            <a:pPr algn="l"/>
+            <a:r>
+              <a:rPr lang="en-US" sz="1300" b="0" dirty="0">
+                <a:solidFill>
+                  <a:srgbClr val="0F172A"/>
+                </a:solidFill>
+                <a:latin typeface="Calibri" pitchFamily="34" charset="0"/>
+              </a:rPr>
+              <a:t xml:space="preserve">3. Review XFR-00003 — Transfer requiring review. XFR-00003 US-NY → IE is recorded as</a:t>
+            </a:r>
+          </a:p>
+          <a:p>
+            <a:pPr algn="l"/>
+            <a:r>
+              <a:rPr lang="en-US" sz="1300" b="0" dirty="0">
+                <a:solidFill>
+                  <a:srgbClr val="0F172A"/>
+                </a:solidFill>
+                <a:latin typeface="Calibri" pitchFamily="34" charset="0"/>
+              </a:rPr>
+              <a:t xml:space="preserve">review required. This is not a lawfulness finding.</a:t>
+            </a:r>
+          </a:p>
+        </p:txBody>
+      </p:sp>
+      <p:sp>
+        <p:nvSpPr>
+          <p:cNvPr id="23" name="n23"/>
+          <p:cNvSpPr txBox="1"/>
+          <p:nvPr/>
+        </p:nvSpPr>
+        <p:spPr>
+          <a:xfrm>
+            <a:off x="420000" y="3720000"/>
+            <a:ext cx="11300000" cy="610000"/>
+          </a:xfrm>
+          <a:prstGeom prst="rect">
+            <a:avLst/>
+          </a:prstGeom>
+          <a:noFill/>
+        </p:spPr>
+        <p:txBody>
+          <a:bodyPr wrap="square" anchor="t" lIns="45720" tIns="8000" rIns="45720" bIns="8000"/>
+          <a:lstStyle/>
+          <a:p>
+            <a:pPr algn="l"/>
+            <a:r>
+              <a:rPr lang="en-US" sz="1300" b="0" dirty="0">
+                <a:solidFill>
+                  <a:srgbClr val="0F172A"/>
+                </a:solidFill>
+                <a:latin typeface="Calibri" pitchFamily="34" charset="0"/>
+              </a:rPr>
+              <a:t xml:space="preserve">4. Review XFR-00004 — Transfer requiring review. XFR-00004 US-NY → IE is recorded as</a:t>
+            </a:r>
+          </a:p>
+          <a:p>
+            <a:pPr algn="l"/>
+            <a:r>
+              <a:rPr lang="en-US" sz="1300" b="0" dirty="0">
+                <a:solidFill>
+                  <a:srgbClr val="0F172A"/>
+                </a:solidFill>
+                <a:latin typeface="Calibri" pitchFamily="34" charset="0"/>
+              </a:rPr>
+              <a:t xml:space="preserve">review required. This is not a lawfulness finding.</a:t>
+            </a:r>
+          </a:p>
+        </p:txBody>
+      </p:sp>
+      <p:sp>
+        <p:nvSpPr>
+          <p:cNvPr id="24" name="n24"/>
+          <p:cNvSpPr txBox="1"/>
+          <p:nvPr/>
+        </p:nvSpPr>
+        <p:spPr>
+          <a:xfrm>
+            <a:off x="420000" y="4400000"/>
+            <a:ext cx="11300000" cy="610000"/>
+          </a:xfrm>
+          <a:prstGeom prst="rect">
+            <a:avLst/>
+          </a:prstGeom>
+          <a:noFill/>
+        </p:spPr>
+        <p:txBody>
+          <a:bodyPr wrap="square" anchor="t" lIns="45720" tIns="8000" rIns="45720" bIns="8000"/>
+          <a:lstStyle/>
+          <a:p>
+            <a:pPr algn="l"/>
+            <a:r>
+              <a:rPr lang="en-US" sz="1300" b="0" dirty="0">
+                <a:solidFill>
+                  <a:srgbClr val="0F172A"/>
+                </a:solidFill>
+                <a:latin typeface="Calibri" pitchFamily="34" charset="0"/>
+              </a:rPr>
+              <a:t xml:space="preserve">5. Review GAP-00001 — Open privacy-related gap. GAP-00001 500.07 is mapped to controls</a:t>
+            </a:r>
+          </a:p>
+          <a:p>
+            <a:pPr algn="l"/>
+            <a:r>
+              <a:rPr lang="en-US" sz="1300" b="0" dirty="0">
+                <a:solidFill>
+                  <a:srgbClr val="0F172A"/>
+                </a:solidFill>
+                <a:latin typeface="Calibri" pitchFamily="34" charset="0"/>
+              </a:rPr>
+              <a:t xml:space="preserve">that are not implemented. A gap is remaining work, not a legal conclusion.</a:t>
+            </a:r>
+          </a:p>
+        </p:txBody>
+      </p:sp>
+      <p:sp>
+        <p:nvSpPr>
+          <p:cNvPr id="900" name="ft"/>
+          <p:cNvSpPr/>
+          <p:nvPr/>
+        </p:nvSpPr>
+        <p:spPr>
+          <a:xfrm>
+            <a:off x="0" y="6520000"/>
+            <a:ext cx="12192000" cy="340000"/>
+          </a:xfrm>
+          <a:prstGeom prst="roundRect">
+            <a:avLst>
+              <a:gd name="adj" fmla="val 6000"/>
+            </a:avLst>
+          </a:prstGeom>
+          <a:solidFill>
+            <a:srgbClr val="F1F5F9"/>
+          </a:solidFill>
+          <a:ln>
+            <a:noFill/>
+          </a:ln>
+        </p:spPr>
+        <p:txBody>
+          <a:bodyPr/>
+          <a:lstStyle/>
+          <a:p>
+            <a:endParaRPr/>
+          </a:p>
+        </p:txBody>
+      </p:sp>
+      <p:sp>
+        <p:nvSpPr>
+          <p:cNvPr id="901" name="t901"/>
+          <p:cNvSpPr txBox="1"/>
+          <p:nvPr/>
+        </p:nvSpPr>
+        <p:spPr>
+          <a:xfrm>
+            <a:off x="360000" y="6560000"/>
+            <a:ext cx="7800000" cy="260000"/>
+          </a:xfrm>
+          <a:prstGeom prst="rect">
+            <a:avLst/>
+          </a:prstGeom>
+          <a:noFill/>
+        </p:spPr>
+        <p:txBody>
+          <a:bodyPr wrap="square" anchor="t" lIns="45720" tIns="22860" rIns="45720" bIns="22860"/>
+          <a:lstStyle/>
+          <a:p>
+            <a:pPr algn="l"/>
+            <a:r>
+              <a:rPr lang="en-US" sz="900" b="0" dirty="0">
+                <a:solidFill>
+                  <a:srgbClr val="64748B"/>
+                </a:solidFill>
+                <a:latin typeface="Calibri" pitchFamily="34" charset="0"/>
+              </a:rPr>
+              <a:t xml:space="preserve">Supreme Privacy Board Report · Confidential · Not legal advice</a:t>
+            </a:r>
+          </a:p>
+        </p:txBody>
+      </p:sp>
+      <p:sp>
+        <p:nvSpPr>
+          <p:cNvPr id="902" name="t902"/>
+          <p:cNvSpPr txBox="1"/>
+          <p:nvPr/>
+        </p:nvSpPr>
+        <p:spPr>
+          <a:xfrm>
+            <a:off x="10400000" y="6560000"/>
+            <a:ext cx="1400000" cy="260000"/>
+          </a:xfrm>
+          <a:prstGeom prst="rect">
+            <a:avLst/>
+          </a:prstGeom>
+          <a:noFill/>
+        </p:spPr>
+        <p:txBody>
+          <a:bodyPr wrap="square" anchor="t" lIns="45720" tIns="22860" rIns="45720" bIns="22860"/>
+          <a:lstStyle/>
+          <a:p>
+            <a:pPr algn="r"/>
+            <a:r>
+              <a:rPr lang="en-US" sz="900" b="0" dirty="0">
+                <a:solidFill>
+                  <a:srgbClr val="64748B"/>
+                </a:solidFill>
+                <a:latin typeface="Calibri" pitchFamily="34" charset="0"/>
+              </a:rPr>
+              <a:t xml:space="preserve">13 / 14</a:t>
+            </a:r>
+          </a:p>
+        </p:txBody>
+      </p:sp>
+    </p:spTree>
+  </p:cSld>
+  <p:clrMapOvr>
+    <a:masterClrMapping/>
+  </p:clrMapOvr>
+</p:sld>
+</file>
+
+<file path=ppt/slides/slide14.xml><?xml version="1.0" encoding="utf-8"?>
+<p:sld xmlns:a="http://schemas.openxmlformats.org/drawingml/2006/main" xmlns:r="http://schemas.openxmlformats.org/officeDocument/2006/relationships" xmlns:p="http://schemas.openxmlformats.org/presentationml/2006/main">
+  <p:cSld>
+    <p:spTree>
+      <p:nvGrpSpPr>
+        <p:cNvPr id="1" name=""/>
+        <p:cNvGrpSpPr/>
+        <p:nvPr/>
+      </p:nvGrpSpPr>
+      <p:grpSpPr>
+        <a:xfrm>
+          <a:off x="0" y="0"/>
+          <a:ext cx="0" cy="0"/>
+          <a:chOff x="0" y="0"/>
+          <a:chExt cx="0" cy="0"/>
+        </a:xfrm>
+      </p:grpSpPr>
+      <p:sp>
+        <p:nvSpPr>
+          <p:cNvPr id="3" name="bar"/>
+          <p:cNvSpPr/>
+          <p:nvPr/>
+        </p:nvSpPr>
+        <p:spPr>
+          <a:xfrm>
+            <a:off x="0" y="0"/>
+            <a:ext cx="12192000" cy="1180000"/>
+          </a:xfrm>
+          <a:prstGeom prst="roundRect">
+            <a:avLst>
+              <a:gd name="adj" fmla="val 6000"/>
+            </a:avLst>
+          </a:prstGeom>
+          <a:solidFill>
+            <a:srgbClr val="0F172A"/>
+          </a:solidFill>
+          <a:ln>
+            <a:noFill/>
+          </a:ln>
+        </p:spPr>
+        <p:txBody>
+          <a:bodyPr/>
+          <a:lstStyle/>
+          <a:p>
+            <a:endParaRPr/>
+          </a:p>
+        </p:txBody>
+      </p:sp>
+      <p:sp>
+        <p:nvSpPr>
+          <p:cNvPr id="4" name="gold"/>
+          <p:cNvSpPr/>
+          <p:nvPr/>
+        </p:nvSpPr>
+        <p:spPr>
+          <a:xfrm>
+            <a:off x="0" y="1180000"/>
+            <a:ext cx="12192000" cy="50000"/>
+          </a:xfrm>
+          <a:prstGeom prst="roundRect">
+            <a:avLst>
+              <a:gd name="adj" fmla="val 6000"/>
+            </a:avLst>
+          </a:prstGeom>
+          <a:solidFill>
+            <a:srgbClr val="C5A46E"/>
+          </a:solidFill>
+          <a:ln>
+            <a:noFill/>
+          </a:ln>
+        </p:spPr>
+        <p:txBody>
+          <a:bodyPr/>
+          <a:lstStyle/>
+          <a:p>
+            <a:endParaRPr/>
+          </a:p>
+        </p:txBody>
+      </p:sp>
+      <p:sp>
+        <p:nvSpPr>
+          <p:cNvPr id="5" name="t5"/>
+          <p:cNvSpPr txBox="1"/>
+          <p:nvPr/>
+        </p:nvSpPr>
+        <p:spPr>
+          <a:xfrm>
+            <a:off x="420000" y="220000"/>
+            <a:ext cx="11000000" cy="560000"/>
+          </a:xfrm>
+          <a:prstGeom prst="rect">
+            <a:avLst/>
+          </a:prstGeom>
+          <a:noFill/>
+        </p:spPr>
+        <p:txBody>
+          <a:bodyPr wrap="square" anchor="t" lIns="45720" tIns="22860" rIns="45720" bIns="22860"/>
+          <a:lstStyle/>
+          <a:p>
+            <a:pPr algn="l"/>
+            <a:r>
+              <a:rPr lang="en-US" sz="2600" b="1" dirty="0">
+                <a:solidFill>
+                  <a:srgbClr val="FFFFFF"/>
+                </a:solidFill>
+                <a:latin typeface="Calibri" pitchFamily="34" charset="0"/>
+              </a:rPr>
+              <a:t xml:space="preserve">Priority actions / next 90 days · continued</a:t>
+            </a:r>
+          </a:p>
+        </p:txBody>
+      </p:sp>
+      <p:sp>
+        <p:nvSpPr>
+          <p:cNvPr id="6" name="t6"/>
+          <p:cNvSpPr txBox="1"/>
+          <p:nvPr/>
+        </p:nvSpPr>
+        <p:spPr>
+          <a:xfrm>
+            <a:off x="420000" y="740000"/>
+            <a:ext cx="11000000" cy="320000"/>
+          </a:xfrm>
+          <a:prstGeom prst="rect">
+            <a:avLst/>
+          </a:prstGeom>
+          <a:noFill/>
+        </p:spPr>
+        <p:txBody>
+          <a:bodyPr wrap="square" anchor="t" lIns="45720" tIns="22860" rIns="45720" bIns="22860"/>
+          <a:lstStyle/>
+          <a:p>
+            <a:pPr algn="l"/>
+            <a:r>
+              <a:rPr lang="en-US" sz="1200" b="0" dirty="0">
+                <a:solidFill>
+                  <a:srgbClr val="CBD5E1"/>
+                </a:solidFill>
+                <a:latin typeface="Calibri" pitchFamily="34" charset="0"/>
+              </a:rPr>
+              <a:t xml:space="preserve">Taken from the live attention queue. No invented program.</a:t>
+            </a:r>
+          </a:p>
+        </p:txBody>
+      </p:sp>
+      <p:sp>
+        <p:nvSpPr>
+          <p:cNvPr id="20" name="n20"/>
+          <p:cNvSpPr txBox="1"/>
+          <p:nvPr/>
+        </p:nvSpPr>
+        <p:spPr>
+          <a:xfrm>
+            <a:off x="420000" y="1680000"/>
+            <a:ext cx="11300000" cy="610000"/>
+          </a:xfrm>
+          <a:prstGeom prst="rect">
+            <a:avLst/>
+          </a:prstGeom>
+          <a:noFill/>
+        </p:spPr>
+        <p:txBody>
+          <a:bodyPr wrap="square" anchor="t" lIns="45720" tIns="8000" rIns="45720" bIns="8000"/>
+          <a:lstStyle/>
+          <a:p>
+            <a:pPr algn="l"/>
+            <a:r>
+              <a:rPr lang="en-US" sz="1300" b="0" dirty="0">
+                <a:solidFill>
+                  <a:srgbClr val="0F172A"/>
+                </a:solidFill>
+                <a:latin typeface="Calibri" pitchFamily="34" charset="0"/>
+              </a:rPr>
+              <a:t xml:space="preserve">6. Review GAP-00003 — Open privacy-related gap. GAP-00003 A.15 is mapped to controls</a:t>
+            </a:r>
+          </a:p>
+          <a:p>
+            <a:pPr algn="l"/>
+            <a:r>
+              <a:rPr lang="en-US" sz="1300" b="0" dirty="0">
+                <a:solidFill>
+                  <a:srgbClr val="0F172A"/>
+                </a:solidFill>
+                <a:latin typeface="Calibri" pitchFamily="34" charset="0"/>
+              </a:rPr>
+              <a:t xml:space="preserve">that are not implemented. A gap is remaining work, not a legal conclusion.</a:t>
+            </a:r>
+          </a:p>
+        </p:txBody>
+      </p:sp>
+      <p:sp>
+        <p:nvSpPr>
+          <p:cNvPr id="21" name="n21"/>
+          <p:cNvSpPr txBox="1"/>
+          <p:nvPr/>
+        </p:nvSpPr>
+        <p:spPr>
+          <a:xfrm>
+            <a:off x="420000" y="2360000"/>
+            <a:ext cx="11300000" cy="610000"/>
+          </a:xfrm>
+          <a:prstGeom prst="rect">
+            <a:avLst/>
+          </a:prstGeom>
+          <a:noFill/>
+        </p:spPr>
+        <p:txBody>
+          <a:bodyPr wrap="square" anchor="t" lIns="45720" tIns="8000" rIns="45720" bIns="8000"/>
+          <a:lstStyle/>
+          <a:p>
+            <a:pPr algn="l"/>
+            <a:r>
+              <a:rPr lang="en-US" sz="1300" b="0" dirty="0">
+                <a:solidFill>
+                  <a:srgbClr val="0F172A"/>
+                </a:solidFill>
+                <a:latin typeface="Calibri" pitchFamily="34" charset="0"/>
+              </a:rPr>
+              <a:t xml:space="preserve">7. Review GAP-00002 — Open privacy-related gap. GAP-00002 500.07 has no current CLEAN</a:t>
+            </a:r>
+          </a:p>
+          <a:p>
+            <a:pPr algn="l"/>
+            <a:r>
+              <a:rPr lang="en-US" sz="1300" b="0" dirty="0">
+                <a:solidFill>
+                  <a:srgbClr val="0F172A"/>
+                </a:solidFill>
+                <a:latin typeface="Calibri" pitchFamily="34" charset="0"/>
+              </a:rPr>
+              <a:t xml:space="preserve">evidence. A gap is remaining work, not a legal conclusion.</a:t>
+            </a:r>
+          </a:p>
+        </p:txBody>
+      </p:sp>
+      <p:sp>
+        <p:nvSpPr>
+          <p:cNvPr id="22" name="n22"/>
+          <p:cNvSpPr txBox="1"/>
+          <p:nvPr/>
+        </p:nvSpPr>
+        <p:spPr>
+          <a:xfrm>
+            <a:off x="420000" y="3040000"/>
+            <a:ext cx="11300000" cy="610000"/>
+          </a:xfrm>
+          <a:prstGeom prst="rect">
+            <a:avLst/>
+          </a:prstGeom>
+          <a:noFill/>
+        </p:spPr>
+        <p:txBody>
+          <a:bodyPr wrap="square" anchor="t" lIns="45720" tIns="8000" rIns="45720" bIns="8000"/>
+          <a:lstStyle/>
+          <a:p>
+            <a:pPr algn="l"/>
+            <a:r>
+              <a:rPr lang="en-US" sz="1300" b="0" dirty="0">
+                <a:solidFill>
+                  <a:srgbClr val="0F172A"/>
+                </a:solidFill>
+                <a:latin typeface="Calibri" pitchFamily="34" charset="0"/>
+              </a:rPr>
+              <a:t xml:space="preserve">8. Review GAP-00004 — Open privacy-related gap. GAP-00004 A.15 has no current CLEAN</a:t>
+            </a:r>
+          </a:p>
+          <a:p>
+            <a:pPr algn="l"/>
+            <a:r>
+              <a:rPr lang="en-US" sz="1300" b="0" dirty="0">
+                <a:solidFill>
+                  <a:srgbClr val="0F172A"/>
+                </a:solidFill>
+                <a:latin typeface="Calibri" pitchFamily="34" charset="0"/>
+              </a:rPr>
+              <a:t xml:space="preserve">evidence. A gap is remaining work, not a legal conclusion.</a:t>
+            </a:r>
+          </a:p>
+        </p:txBody>
+      </p:sp>
+      <p:sp>
+        <p:nvSpPr>
+          <p:cNvPr id="80" name="t80"/>
+          <p:cNvSpPr txBox="1"/>
+          <p:nvPr/>
+        </p:nvSpPr>
+        <p:spPr>
+          <a:xfrm>
+            <a:off x="420000" y="5600000"/>
+            <a:ext cx="11000000" cy="360000"/>
+          </a:xfrm>
+          <a:prstGeom prst="rect">
+            <a:avLst/>
+          </a:prstGeom>
+          <a:noFill/>
+        </p:spPr>
+        <p:txBody>
+          <a:bodyPr wrap="square" anchor="t" lIns="45720" tIns="22860" rIns="45720" bIns="22860"/>
+          <a:lstStyle/>
+          <a:p>
+            <a:pPr algn="l"/>
+            <a:r>
+              <a:rPr lang="en-US" sz="1200" b="0" dirty="0">
+                <a:solidFill>
+                  <a:srgbClr val="64748B"/>
+                </a:solidFill>
+                <a:latin typeface="Calibri" pitchFamily="34" charset="0"/>
+              </a:rPr>
+              <a:t xml:space="preserve">Consent collector remains not configured / manual. No trend available.</a:t>
+            </a:r>
+          </a:p>
+        </p:txBody>
+      </p:sp>
+      <p:sp>
+        <p:nvSpPr>
+          <p:cNvPr id="900" name="ft"/>
+          <p:cNvSpPr/>
+          <p:nvPr/>
+        </p:nvSpPr>
+        <p:spPr>
+          <a:xfrm>
+            <a:off x="0" y="6520000"/>
+            <a:ext cx="12192000" cy="340000"/>
+          </a:xfrm>
+          <a:prstGeom prst="roundRect">
+            <a:avLst>
+              <a:gd name="adj" fmla="val 6000"/>
+            </a:avLst>
+          </a:prstGeom>
+          <a:solidFill>
+            <a:srgbClr val="F1F5F9"/>
+          </a:solidFill>
+          <a:ln>
+            <a:noFill/>
+          </a:ln>
+        </p:spPr>
+        <p:txBody>
+          <a:bodyPr/>
+          <a:lstStyle/>
+          <a:p>
+            <a:endParaRPr/>
+          </a:p>
+        </p:txBody>
+      </p:sp>
+      <p:sp>
+        <p:nvSpPr>
+          <p:cNvPr id="901" name="t901"/>
+          <p:cNvSpPr txBox="1"/>
+          <p:nvPr/>
+        </p:nvSpPr>
+        <p:spPr>
+          <a:xfrm>
+            <a:off x="360000" y="6560000"/>
+            <a:ext cx="7800000" cy="260000"/>
+          </a:xfrm>
+          <a:prstGeom prst="rect">
+            <a:avLst/>
+          </a:prstGeom>
+          <a:noFill/>
+        </p:spPr>
+        <p:txBody>
+          <a:bodyPr wrap="square" anchor="t" lIns="45720" tIns="22860" rIns="45720" bIns="22860"/>
+          <a:lstStyle/>
+          <a:p>
+            <a:pPr algn="l"/>
+            <a:r>
+              <a:rPr lang="en-US" sz="900" b="0" dirty="0">
+                <a:solidFill>
+                  <a:srgbClr val="64748B"/>
+                </a:solidFill>
+                <a:latin typeface="Calibri" pitchFamily="34" charset="0"/>
+              </a:rPr>
+              <a:t xml:space="preserve">Supreme Privacy Board Report · Confidential · Not legal advice</a:t>
+            </a:r>
+          </a:p>
+        </p:txBody>
+      </p:sp>
+      <p:sp>
+        <p:nvSpPr>
+          <p:cNvPr id="902" name="t902"/>
+          <p:cNvSpPr txBox="1"/>
+          <p:nvPr/>
+        </p:nvSpPr>
+        <p:spPr>
+          <a:xfrm>
+            <a:off x="10400000" y="6560000"/>
+            <a:ext cx="1400000" cy="260000"/>
+          </a:xfrm>
+          <a:prstGeom prst="rect">
+            <a:avLst/>
+          </a:prstGeom>
+          <a:noFill/>
+        </p:spPr>
+        <p:txBody>
+          <a:bodyPr wrap="square" anchor="t" lIns="45720" tIns="22860" rIns="45720" bIns="22860"/>
+          <a:lstStyle/>
+          <a:p>
+            <a:pPr algn="r"/>
+            <a:r>
+              <a:rPr lang="en-US" sz="900" b="0" dirty="0">
+                <a:solidFill>
+                  <a:srgbClr val="64748B"/>
+                </a:solidFill>
+                <a:latin typeface="Calibri" pitchFamily="34" charset="0"/>
+              </a:rPr>
+              <a:t xml:space="preserve">14 / 14</a:t>
             </a:r>
           </a:p>
         </p:txBody>
@@ -3088,7 +4028,7 @@
                 </a:solidFill>
                 <a:latin typeface="Calibri" pitchFamily="34" charset="0"/>
               </a:rPr>
-              <a:t xml:space="preserve">2 / 12</a:t>
+              <a:t xml:space="preserve">2 / 14</a:t>
             </a:r>
           </a:p>
         </p:txBody>
@@ -3644,22 +4584,22 @@
       </p:sp>
       <p:sp>
         <p:nvSpPr>
-          <p:cNvPr id="60" name="t60"/>
+          <p:cNvPr id="60" name="n60"/>
           <p:cNvSpPr txBox="1"/>
           <p:nvPr/>
         </p:nvSpPr>
         <p:spPr>
           <a:xfrm>
             <a:off x="420000" y="3200000"/>
-            <a:ext cx="11300000" cy="420000"/>
-          </a:xfrm>
-          <a:prstGeom prst="rect">
-            <a:avLst/>
-          </a:prstGeom>
-          <a:noFill/>
-        </p:spPr>
-        <p:txBody>
-          <a:bodyPr wrap="square" anchor="t" lIns="45720" tIns="22860" rIns="45720" bIns="22860"/>
+            <a:ext cx="11300000" cy="330000"/>
+          </a:xfrm>
+          <a:prstGeom prst="rect">
+            <a:avLst/>
+          </a:prstGeom>
+          <a:noFill/>
+        </p:spPr>
+        <p:txBody>
+          <a:bodyPr wrap="square" anchor="t" lIns="45720" tIns="8000" rIns="45720" bIns="8000"/>
           <a:lstStyle/>
           <a:p>
             <a:pPr algn="l"/>
@@ -3677,22 +4617,22 @@
       </p:sp>
       <p:sp>
         <p:nvSpPr>
-          <p:cNvPr id="61" name="t61"/>
-          <p:cNvSpPr txBox="1"/>
-          <p:nvPr/>
-        </p:nvSpPr>
-        <p:spPr>
-          <a:xfrm>
-            <a:off x="420000" y="3660000"/>
-            <a:ext cx="11300000" cy="420000"/>
-          </a:xfrm>
-          <a:prstGeom prst="rect">
-            <a:avLst/>
-          </a:prstGeom>
-          <a:noFill/>
-        </p:spPr>
-        <p:txBody>
-          <a:bodyPr wrap="square" anchor="t" lIns="45720" tIns="22860" rIns="45720" bIns="22860"/>
+          <p:cNvPr id="61" name="n61"/>
+          <p:cNvSpPr txBox="1"/>
+          <p:nvPr/>
+        </p:nvSpPr>
+        <p:spPr>
+          <a:xfrm>
+            <a:off x="420000" y="3590000"/>
+            <a:ext cx="11300000" cy="330000"/>
+          </a:xfrm>
+          <a:prstGeom prst="rect">
+            <a:avLst/>
+          </a:prstGeom>
+          <a:noFill/>
+        </p:spPr>
+        <p:txBody>
+          <a:bodyPr wrap="square" anchor="t" lIns="45720" tIns="8000" rIns="45720" bIns="8000"/>
           <a:lstStyle/>
           <a:p>
             <a:pPr algn="l"/>
@@ -3710,22 +4650,22 @@
       </p:sp>
       <p:sp>
         <p:nvSpPr>
-          <p:cNvPr id="62" name="t62"/>
-          <p:cNvSpPr txBox="1"/>
-          <p:nvPr/>
-        </p:nvSpPr>
-        <p:spPr>
-          <a:xfrm>
-            <a:off x="420000" y="4120000"/>
-            <a:ext cx="11300000" cy="420000"/>
-          </a:xfrm>
-          <a:prstGeom prst="rect">
-            <a:avLst/>
-          </a:prstGeom>
-          <a:noFill/>
-        </p:spPr>
-        <p:txBody>
-          <a:bodyPr wrap="square" anchor="t" lIns="45720" tIns="22860" rIns="45720" bIns="22860"/>
+          <p:cNvPr id="62" name="n62"/>
+          <p:cNvSpPr txBox="1"/>
+          <p:nvPr/>
+        </p:nvSpPr>
+        <p:spPr>
+          <a:xfrm>
+            <a:off x="420000" y="3980000"/>
+            <a:ext cx="11300000" cy="330000"/>
+          </a:xfrm>
+          <a:prstGeom prst="rect">
+            <a:avLst/>
+          </a:prstGeom>
+          <a:noFill/>
+        </p:spPr>
+        <p:txBody>
+          <a:bodyPr wrap="square" anchor="t" lIns="45720" tIns="8000" rIns="45720" bIns="8000"/>
           <a:lstStyle/>
           <a:p>
             <a:pPr algn="l"/>
@@ -3743,22 +4683,22 @@
       </p:sp>
       <p:sp>
         <p:nvSpPr>
-          <p:cNvPr id="63" name="t63"/>
-          <p:cNvSpPr txBox="1"/>
-          <p:nvPr/>
-        </p:nvSpPr>
-        <p:spPr>
-          <a:xfrm>
-            <a:off x="420000" y="4580000"/>
-            <a:ext cx="11300000" cy="420000"/>
-          </a:xfrm>
-          <a:prstGeom prst="rect">
-            <a:avLst/>
-          </a:prstGeom>
-          <a:noFill/>
-        </p:spPr>
-        <p:txBody>
-          <a:bodyPr wrap="square" anchor="t" lIns="45720" tIns="22860" rIns="45720" bIns="22860"/>
+          <p:cNvPr id="63" name="n63"/>
+          <p:cNvSpPr txBox="1"/>
+          <p:nvPr/>
+        </p:nvSpPr>
+        <p:spPr>
+          <a:xfrm>
+            <a:off x="420000" y="4370000"/>
+            <a:ext cx="11300000" cy="330000"/>
+          </a:xfrm>
+          <a:prstGeom prst="rect">
+            <a:avLst/>
+          </a:prstGeom>
+          <a:noFill/>
+        </p:spPr>
+        <p:txBody>
+          <a:bodyPr wrap="square" anchor="t" lIns="45720" tIns="8000" rIns="45720" bIns="8000"/>
           <a:lstStyle/>
           <a:p>
             <a:pPr algn="l"/>
@@ -3866,7 +4806,7 @@
                 </a:solidFill>
                 <a:latin typeface="Calibri" pitchFamily="34" charset="0"/>
               </a:rPr>
-              <a:t xml:space="preserve">3 / 12</a:t>
+              <a:t xml:space="preserve">3 / 14</a:t>
             </a:r>
           </a:p>
         </p:txBody>
@@ -4422,22 +5362,22 @@
       </p:sp>
       <p:sp>
         <p:nvSpPr>
-          <p:cNvPr id="60" name="t60"/>
+          <p:cNvPr id="60" name="n60"/>
           <p:cNvSpPr txBox="1"/>
           <p:nvPr/>
         </p:nvSpPr>
         <p:spPr>
           <a:xfrm>
             <a:off x="420000" y="3200000"/>
-            <a:ext cx="11300000" cy="420000"/>
-          </a:xfrm>
-          <a:prstGeom prst="rect">
-            <a:avLst/>
-          </a:prstGeom>
-          <a:noFill/>
-        </p:spPr>
-        <p:txBody>
-          <a:bodyPr wrap="square" anchor="t" lIns="45720" tIns="22860" rIns="45720" bIns="22860"/>
+            <a:ext cx="11300000" cy="330000"/>
+          </a:xfrm>
+          <a:prstGeom prst="rect">
+            <a:avLst/>
+          </a:prstGeom>
+          <a:noFill/>
+        </p:spPr>
+        <p:txBody>
+          <a:bodyPr wrap="square" anchor="t" lIns="45720" tIns="8000" rIns="45720" bIns="8000"/>
           <a:lstStyle/>
           <a:p>
             <a:pPr algn="l"/>
@@ -4455,22 +5395,22 @@
       </p:sp>
       <p:sp>
         <p:nvSpPr>
-          <p:cNvPr id="61" name="t61"/>
-          <p:cNvSpPr txBox="1"/>
-          <p:nvPr/>
-        </p:nvSpPr>
-        <p:spPr>
-          <a:xfrm>
-            <a:off x="420000" y="3660000"/>
-            <a:ext cx="11300000" cy="420000"/>
-          </a:xfrm>
-          <a:prstGeom prst="rect">
-            <a:avLst/>
-          </a:prstGeom>
-          <a:noFill/>
-        </p:spPr>
-        <p:txBody>
-          <a:bodyPr wrap="square" anchor="t" lIns="45720" tIns="22860" rIns="45720" bIns="22860"/>
+          <p:cNvPr id="61" name="n61"/>
+          <p:cNvSpPr txBox="1"/>
+          <p:nvPr/>
+        </p:nvSpPr>
+        <p:spPr>
+          <a:xfrm>
+            <a:off x="420000" y="3590000"/>
+            <a:ext cx="11300000" cy="330000"/>
+          </a:xfrm>
+          <a:prstGeom prst="rect">
+            <a:avLst/>
+          </a:prstGeom>
+          <a:noFill/>
+        </p:spPr>
+        <p:txBody>
+          <a:bodyPr wrap="square" anchor="t" lIns="45720" tIns="8000" rIns="45720" bIns="8000"/>
           <a:lstStyle/>
           <a:p>
             <a:pPr algn="l"/>
@@ -4488,22 +5428,22 @@
       </p:sp>
       <p:sp>
         <p:nvSpPr>
-          <p:cNvPr id="62" name="t62"/>
-          <p:cNvSpPr txBox="1"/>
-          <p:nvPr/>
-        </p:nvSpPr>
-        <p:spPr>
-          <a:xfrm>
-            <a:off x="420000" y="4120000"/>
-            <a:ext cx="11300000" cy="420000"/>
-          </a:xfrm>
-          <a:prstGeom prst="rect">
-            <a:avLst/>
-          </a:prstGeom>
-          <a:noFill/>
-        </p:spPr>
-        <p:txBody>
-          <a:bodyPr wrap="square" anchor="t" lIns="45720" tIns="22860" rIns="45720" bIns="22860"/>
+          <p:cNvPr id="62" name="n62"/>
+          <p:cNvSpPr txBox="1"/>
+          <p:nvPr/>
+        </p:nvSpPr>
+        <p:spPr>
+          <a:xfrm>
+            <a:off x="420000" y="3980000"/>
+            <a:ext cx="11300000" cy="330000"/>
+          </a:xfrm>
+          <a:prstGeom prst="rect">
+            <a:avLst/>
+          </a:prstGeom>
+          <a:noFill/>
+        </p:spPr>
+        <p:txBody>
+          <a:bodyPr wrap="square" anchor="t" lIns="45720" tIns="8000" rIns="45720" bIns="8000"/>
           <a:lstStyle/>
           <a:p>
             <a:pPr algn="l"/>
@@ -4521,22 +5461,22 @@
       </p:sp>
       <p:sp>
         <p:nvSpPr>
-          <p:cNvPr id="63" name="t63"/>
-          <p:cNvSpPr txBox="1"/>
-          <p:nvPr/>
-        </p:nvSpPr>
-        <p:spPr>
-          <a:xfrm>
-            <a:off x="420000" y="4580000"/>
-            <a:ext cx="11300000" cy="420000"/>
-          </a:xfrm>
-          <a:prstGeom prst="rect">
-            <a:avLst/>
-          </a:prstGeom>
-          <a:noFill/>
-        </p:spPr>
-        <p:txBody>
-          <a:bodyPr wrap="square" anchor="t" lIns="45720" tIns="22860" rIns="45720" bIns="22860"/>
+          <p:cNvPr id="63" name="n63"/>
+          <p:cNvSpPr txBox="1"/>
+          <p:nvPr/>
+        </p:nvSpPr>
+        <p:spPr>
+          <a:xfrm>
+            <a:off x="420000" y="4370000"/>
+            <a:ext cx="11300000" cy="330000"/>
+          </a:xfrm>
+          <a:prstGeom prst="rect">
+            <a:avLst/>
+          </a:prstGeom>
+          <a:noFill/>
+        </p:spPr>
+        <p:txBody>
+          <a:bodyPr wrap="square" anchor="t" lIns="45720" tIns="8000" rIns="45720" bIns="8000"/>
           <a:lstStyle/>
           <a:p>
             <a:pPr algn="l"/>
@@ -4677,7 +5617,7 @@
                 </a:solidFill>
                 <a:latin typeface="Calibri" pitchFamily="34" charset="0"/>
               </a:rPr>
-              <a:t xml:space="preserve">4 / 12</a:t>
+              <a:t xml:space="preserve">4 / 14</a:t>
             </a:r>
           </a:p>
         </p:txBody>
@@ -5233,22 +6173,22 @@
       </p:sp>
       <p:sp>
         <p:nvSpPr>
-          <p:cNvPr id="60" name="t60"/>
+          <p:cNvPr id="60" name="n60"/>
           <p:cNvSpPr txBox="1"/>
           <p:nvPr/>
         </p:nvSpPr>
         <p:spPr>
           <a:xfrm>
             <a:off x="420000" y="3200000"/>
-            <a:ext cx="11300000" cy="420000"/>
-          </a:xfrm>
-          <a:prstGeom prst="rect">
-            <a:avLst/>
-          </a:prstGeom>
-          <a:noFill/>
-        </p:spPr>
-        <p:txBody>
-          <a:bodyPr wrap="square" anchor="t" lIns="45720" tIns="22860" rIns="45720" bIns="22860"/>
+            <a:ext cx="11300000" cy="330000"/>
+          </a:xfrm>
+          <a:prstGeom prst="rect">
+            <a:avLst/>
+          </a:prstGeom>
+          <a:noFill/>
+        </p:spPr>
+        <p:txBody>
+          <a:bodyPr wrap="square" anchor="t" lIns="45720" tIns="8000" rIns="45720" bIns="8000"/>
           <a:lstStyle/>
           <a:p>
             <a:pPr algn="l"/>
@@ -5266,22 +6206,22 @@
       </p:sp>
       <p:sp>
         <p:nvSpPr>
-          <p:cNvPr id="61" name="t61"/>
-          <p:cNvSpPr txBox="1"/>
-          <p:nvPr/>
-        </p:nvSpPr>
-        <p:spPr>
-          <a:xfrm>
-            <a:off x="420000" y="3660000"/>
-            <a:ext cx="11300000" cy="420000"/>
-          </a:xfrm>
-          <a:prstGeom prst="rect">
-            <a:avLst/>
-          </a:prstGeom>
-          <a:noFill/>
-        </p:spPr>
-        <p:txBody>
-          <a:bodyPr wrap="square" anchor="t" lIns="45720" tIns="22860" rIns="45720" bIns="22860"/>
+          <p:cNvPr id="61" name="n61"/>
+          <p:cNvSpPr txBox="1"/>
+          <p:nvPr/>
+        </p:nvSpPr>
+        <p:spPr>
+          <a:xfrm>
+            <a:off x="420000" y="3590000"/>
+            <a:ext cx="11300000" cy="330000"/>
+          </a:xfrm>
+          <a:prstGeom prst="rect">
+            <a:avLst/>
+          </a:prstGeom>
+          <a:noFill/>
+        </p:spPr>
+        <p:txBody>
+          <a:bodyPr wrap="square" anchor="t" lIns="45720" tIns="8000" rIns="45720" bIns="8000"/>
           <a:lstStyle/>
           <a:p>
             <a:pPr algn="l"/>
@@ -5299,22 +6239,22 @@
       </p:sp>
       <p:sp>
         <p:nvSpPr>
-          <p:cNvPr id="62" name="t62"/>
-          <p:cNvSpPr txBox="1"/>
-          <p:nvPr/>
-        </p:nvSpPr>
-        <p:spPr>
-          <a:xfrm>
-            <a:off x="420000" y="4120000"/>
-            <a:ext cx="11300000" cy="420000"/>
-          </a:xfrm>
-          <a:prstGeom prst="rect">
-            <a:avLst/>
-          </a:prstGeom>
-          <a:noFill/>
-        </p:spPr>
-        <p:txBody>
-          <a:bodyPr wrap="square" anchor="t" lIns="45720" tIns="22860" rIns="45720" bIns="22860"/>
+          <p:cNvPr id="62" name="n62"/>
+          <p:cNvSpPr txBox="1"/>
+          <p:nvPr/>
+        </p:nvSpPr>
+        <p:spPr>
+          <a:xfrm>
+            <a:off x="420000" y="3980000"/>
+            <a:ext cx="11300000" cy="330000"/>
+          </a:xfrm>
+          <a:prstGeom prst="rect">
+            <a:avLst/>
+          </a:prstGeom>
+          <a:noFill/>
+        </p:spPr>
+        <p:txBody>
+          <a:bodyPr wrap="square" anchor="t" lIns="45720" tIns="8000" rIns="45720" bIns="8000"/>
           <a:lstStyle/>
           <a:p>
             <a:pPr algn="l"/>
@@ -5332,22 +6272,22 @@
       </p:sp>
       <p:sp>
         <p:nvSpPr>
-          <p:cNvPr id="63" name="t63"/>
-          <p:cNvSpPr txBox="1"/>
-          <p:nvPr/>
-        </p:nvSpPr>
-        <p:spPr>
-          <a:xfrm>
-            <a:off x="420000" y="4580000"/>
-            <a:ext cx="11300000" cy="420000"/>
-          </a:xfrm>
-          <a:prstGeom prst="rect">
-            <a:avLst/>
-          </a:prstGeom>
-          <a:noFill/>
-        </p:spPr>
-        <p:txBody>
-          <a:bodyPr wrap="square" anchor="t" lIns="45720" tIns="22860" rIns="45720" bIns="22860"/>
+          <p:cNvPr id="63" name="n63"/>
+          <p:cNvSpPr txBox="1"/>
+          <p:nvPr/>
+        </p:nvSpPr>
+        <p:spPr>
+          <a:xfrm>
+            <a:off x="420000" y="4370000"/>
+            <a:ext cx="11300000" cy="330000"/>
+          </a:xfrm>
+          <a:prstGeom prst="rect">
+            <a:avLst/>
+          </a:prstGeom>
+          <a:noFill/>
+        </p:spPr>
+        <p:txBody>
+          <a:bodyPr wrap="square" anchor="t" lIns="45720" tIns="8000" rIns="45720" bIns="8000"/>
           <a:lstStyle/>
           <a:p>
             <a:pPr algn="l"/>
@@ -5455,7 +6395,7 @@
                 </a:solidFill>
                 <a:latin typeface="Calibri" pitchFamily="34" charset="0"/>
               </a:rPr>
-              <a:t xml:space="preserve">5 / 12</a:t>
+              <a:t xml:space="preserve">5 / 14</a:t>
             </a:r>
           </a:p>
         </p:txBody>
@@ -6011,22 +6951,22 @@
       </p:sp>
       <p:sp>
         <p:nvSpPr>
-          <p:cNvPr id="60" name="t60"/>
+          <p:cNvPr id="60" name="n60"/>
           <p:cNvSpPr txBox="1"/>
           <p:nvPr/>
         </p:nvSpPr>
         <p:spPr>
           <a:xfrm>
             <a:off x="420000" y="3200000"/>
-            <a:ext cx="11300000" cy="420000"/>
-          </a:xfrm>
-          <a:prstGeom prst="rect">
-            <a:avLst/>
-          </a:prstGeom>
-          <a:noFill/>
-        </p:spPr>
-        <p:txBody>
-          <a:bodyPr wrap="square" anchor="t" lIns="45720" tIns="22860" rIns="45720" bIns="22860"/>
+            <a:ext cx="11300000" cy="330000"/>
+          </a:xfrm>
+          <a:prstGeom prst="rect">
+            <a:avLst/>
+          </a:prstGeom>
+          <a:noFill/>
+        </p:spPr>
+        <p:txBody>
+          <a:bodyPr wrap="square" anchor="t" lIns="45720" tIns="8000" rIns="45720" bIns="8000"/>
           <a:lstStyle/>
           <a:p>
             <a:pPr algn="l"/>
@@ -6044,22 +6984,22 @@
       </p:sp>
       <p:sp>
         <p:nvSpPr>
-          <p:cNvPr id="61" name="t61"/>
-          <p:cNvSpPr txBox="1"/>
-          <p:nvPr/>
-        </p:nvSpPr>
-        <p:spPr>
-          <a:xfrm>
-            <a:off x="420000" y="3660000"/>
-            <a:ext cx="11300000" cy="420000"/>
-          </a:xfrm>
-          <a:prstGeom prst="rect">
-            <a:avLst/>
-          </a:prstGeom>
-          <a:noFill/>
-        </p:spPr>
-        <p:txBody>
-          <a:bodyPr wrap="square" anchor="t" lIns="45720" tIns="22860" rIns="45720" bIns="22860"/>
+          <p:cNvPr id="61" name="n61"/>
+          <p:cNvSpPr txBox="1"/>
+          <p:nvPr/>
+        </p:nvSpPr>
+        <p:spPr>
+          <a:xfrm>
+            <a:off x="420000" y="3590000"/>
+            <a:ext cx="11300000" cy="330000"/>
+          </a:xfrm>
+          <a:prstGeom prst="rect">
+            <a:avLst/>
+          </a:prstGeom>
+          <a:noFill/>
+        </p:spPr>
+        <p:txBody>
+          <a:bodyPr wrap="square" anchor="t" lIns="45720" tIns="8000" rIns="45720" bIns="8000"/>
           <a:lstStyle/>
           <a:p>
             <a:pPr algn="l"/>
@@ -6077,22 +7017,22 @@
       </p:sp>
       <p:sp>
         <p:nvSpPr>
-          <p:cNvPr id="62" name="t62"/>
-          <p:cNvSpPr txBox="1"/>
-          <p:nvPr/>
-        </p:nvSpPr>
-        <p:spPr>
-          <a:xfrm>
-            <a:off x="420000" y="4120000"/>
-            <a:ext cx="11300000" cy="420000"/>
-          </a:xfrm>
-          <a:prstGeom prst="rect">
-            <a:avLst/>
-          </a:prstGeom>
-          <a:noFill/>
-        </p:spPr>
-        <p:txBody>
-          <a:bodyPr wrap="square" anchor="t" lIns="45720" tIns="22860" rIns="45720" bIns="22860"/>
+          <p:cNvPr id="62" name="n62"/>
+          <p:cNvSpPr txBox="1"/>
+          <p:nvPr/>
+        </p:nvSpPr>
+        <p:spPr>
+          <a:xfrm>
+            <a:off x="420000" y="3980000"/>
+            <a:ext cx="11300000" cy="330000"/>
+          </a:xfrm>
+          <a:prstGeom prst="rect">
+            <a:avLst/>
+          </a:prstGeom>
+          <a:noFill/>
+        </p:spPr>
+        <p:txBody>
+          <a:bodyPr wrap="square" anchor="t" lIns="45720" tIns="8000" rIns="45720" bIns="8000"/>
           <a:lstStyle/>
           <a:p>
             <a:pPr algn="l"/>
@@ -6110,22 +7050,22 @@
       </p:sp>
       <p:sp>
         <p:nvSpPr>
-          <p:cNvPr id="63" name="t63"/>
-          <p:cNvSpPr txBox="1"/>
-          <p:nvPr/>
-        </p:nvSpPr>
-        <p:spPr>
-          <a:xfrm>
-            <a:off x="420000" y="4580000"/>
-            <a:ext cx="11300000" cy="420000"/>
-          </a:xfrm>
-          <a:prstGeom prst="rect">
-            <a:avLst/>
-          </a:prstGeom>
-          <a:noFill/>
-        </p:spPr>
-        <p:txBody>
-          <a:bodyPr wrap="square" anchor="t" lIns="45720" tIns="22860" rIns="45720" bIns="22860"/>
+          <p:cNvPr id="63" name="n63"/>
+          <p:cNvSpPr txBox="1"/>
+          <p:nvPr/>
+        </p:nvSpPr>
+        <p:spPr>
+          <a:xfrm>
+            <a:off x="420000" y="4370000"/>
+            <a:ext cx="11300000" cy="330000"/>
+          </a:xfrm>
+          <a:prstGeom prst="rect">
+            <a:avLst/>
+          </a:prstGeom>
+          <a:noFill/>
+        </p:spPr>
+        <p:txBody>
+          <a:bodyPr wrap="square" anchor="t" lIns="45720" tIns="8000" rIns="45720" bIns="8000"/>
           <a:lstStyle/>
           <a:p>
             <a:pPr algn="l"/>
@@ -6233,7 +7173,7 @@
                 </a:solidFill>
                 <a:latin typeface="Calibri" pitchFamily="34" charset="0"/>
               </a:rPr>
-              <a:t xml:space="preserve">6 / 12</a:t>
+              <a:t xml:space="preserve">6 / 14</a:t>
             </a:r>
           </a:p>
         </p:txBody>
@@ -6789,22 +7729,22 @@
       </p:sp>
       <p:sp>
         <p:nvSpPr>
-          <p:cNvPr id="60" name="t60"/>
+          <p:cNvPr id="60" name="n60"/>
           <p:cNvSpPr txBox="1"/>
           <p:nvPr/>
         </p:nvSpPr>
         <p:spPr>
           <a:xfrm>
             <a:off x="420000" y="3200000"/>
-            <a:ext cx="11300000" cy="420000"/>
-          </a:xfrm>
-          <a:prstGeom prst="rect">
-            <a:avLst/>
-          </a:prstGeom>
-          <a:noFill/>
-        </p:spPr>
-        <p:txBody>
-          <a:bodyPr wrap="square" anchor="t" lIns="45720" tIns="22860" rIns="45720" bIns="22860"/>
+            <a:ext cx="11300000" cy="330000"/>
+          </a:xfrm>
+          <a:prstGeom prst="rect">
+            <a:avLst/>
+          </a:prstGeom>
+          <a:noFill/>
+        </p:spPr>
+        <p:txBody>
+          <a:bodyPr wrap="square" anchor="t" lIns="45720" tIns="8000" rIns="45720" bIns="8000"/>
           <a:lstStyle/>
           <a:p>
             <a:pPr algn="l"/>
@@ -6822,22 +7762,22 @@
       </p:sp>
       <p:sp>
         <p:nvSpPr>
-          <p:cNvPr id="61" name="t61"/>
-          <p:cNvSpPr txBox="1"/>
-          <p:nvPr/>
-        </p:nvSpPr>
-        <p:spPr>
-          <a:xfrm>
-            <a:off x="420000" y="3660000"/>
-            <a:ext cx="11300000" cy="420000"/>
-          </a:xfrm>
-          <a:prstGeom prst="rect">
-            <a:avLst/>
-          </a:prstGeom>
-          <a:noFill/>
-        </p:spPr>
-        <p:txBody>
-          <a:bodyPr wrap="square" anchor="t" lIns="45720" tIns="22860" rIns="45720" bIns="22860"/>
+          <p:cNvPr id="61" name="n61"/>
+          <p:cNvSpPr txBox="1"/>
+          <p:nvPr/>
+        </p:nvSpPr>
+        <p:spPr>
+          <a:xfrm>
+            <a:off x="420000" y="3590000"/>
+            <a:ext cx="11300000" cy="330000"/>
+          </a:xfrm>
+          <a:prstGeom prst="rect">
+            <a:avLst/>
+          </a:prstGeom>
+          <a:noFill/>
+        </p:spPr>
+        <p:txBody>
+          <a:bodyPr wrap="square" anchor="t" lIns="45720" tIns="8000" rIns="45720" bIns="8000"/>
           <a:lstStyle/>
           <a:p>
             <a:pPr algn="l"/>
@@ -6855,22 +7795,22 @@
       </p:sp>
       <p:sp>
         <p:nvSpPr>
-          <p:cNvPr id="62" name="t62"/>
-          <p:cNvSpPr txBox="1"/>
-          <p:nvPr/>
-        </p:nvSpPr>
-        <p:spPr>
-          <a:xfrm>
-            <a:off x="420000" y="4120000"/>
-            <a:ext cx="11300000" cy="420000"/>
-          </a:xfrm>
-          <a:prstGeom prst="rect">
-            <a:avLst/>
-          </a:prstGeom>
-          <a:noFill/>
-        </p:spPr>
-        <p:txBody>
-          <a:bodyPr wrap="square" anchor="t" lIns="45720" tIns="22860" rIns="45720" bIns="22860"/>
+          <p:cNvPr id="62" name="n62"/>
+          <p:cNvSpPr txBox="1"/>
+          <p:nvPr/>
+        </p:nvSpPr>
+        <p:spPr>
+          <a:xfrm>
+            <a:off x="420000" y="3980000"/>
+            <a:ext cx="11300000" cy="330000"/>
+          </a:xfrm>
+          <a:prstGeom prst="rect">
+            <a:avLst/>
+          </a:prstGeom>
+          <a:noFill/>
+        </p:spPr>
+        <p:txBody>
+          <a:bodyPr wrap="square" anchor="t" lIns="45720" tIns="8000" rIns="45720" bIns="8000"/>
           <a:lstStyle/>
           <a:p>
             <a:pPr algn="l"/>
@@ -6888,22 +7828,22 @@
       </p:sp>
       <p:sp>
         <p:nvSpPr>
-          <p:cNvPr id="63" name="t63"/>
-          <p:cNvSpPr txBox="1"/>
-          <p:nvPr/>
-        </p:nvSpPr>
-        <p:spPr>
-          <a:xfrm>
-            <a:off x="420000" y="4580000"/>
-            <a:ext cx="11300000" cy="420000"/>
-          </a:xfrm>
-          <a:prstGeom prst="rect">
-            <a:avLst/>
-          </a:prstGeom>
-          <a:noFill/>
-        </p:spPr>
-        <p:txBody>
-          <a:bodyPr wrap="square" anchor="t" lIns="45720" tIns="22860" rIns="45720" bIns="22860"/>
+          <p:cNvPr id="63" name="n63"/>
+          <p:cNvSpPr txBox="1"/>
+          <p:nvPr/>
+        </p:nvSpPr>
+        <p:spPr>
+          <a:xfrm>
+            <a:off x="420000" y="4370000"/>
+            <a:ext cx="11300000" cy="330000"/>
+          </a:xfrm>
+          <a:prstGeom prst="rect">
+            <a:avLst/>
+          </a:prstGeom>
+          <a:noFill/>
+        </p:spPr>
+        <p:txBody>
+          <a:bodyPr wrap="square" anchor="t" lIns="45720" tIns="8000" rIns="45720" bIns="8000"/>
           <a:lstStyle/>
           <a:p>
             <a:pPr algn="l"/>
@@ -7011,7 +7951,7 @@
                 </a:solidFill>
                 <a:latin typeface="Calibri" pitchFamily="34" charset="0"/>
               </a:rPr>
-              <a:t xml:space="preserve">7 / 12</a:t>
+              <a:t xml:space="preserve">7 / 14</a:t>
             </a:r>
           </a:p>
         </p:txBody>
@@ -7567,22 +8507,22 @@
       </p:sp>
       <p:sp>
         <p:nvSpPr>
-          <p:cNvPr id="60" name="t60"/>
+          <p:cNvPr id="60" name="n60"/>
           <p:cNvSpPr txBox="1"/>
           <p:nvPr/>
         </p:nvSpPr>
         <p:spPr>
           <a:xfrm>
             <a:off x="420000" y="3200000"/>
-            <a:ext cx="11300000" cy="420000"/>
-          </a:xfrm>
-          <a:prstGeom prst="rect">
-            <a:avLst/>
-          </a:prstGeom>
-          <a:noFill/>
-        </p:spPr>
-        <p:txBody>
-          <a:bodyPr wrap="square" anchor="t" lIns="45720" tIns="22860" rIns="45720" bIns="22860"/>
+            <a:ext cx="11300000" cy="330000"/>
+          </a:xfrm>
+          <a:prstGeom prst="rect">
+            <a:avLst/>
+          </a:prstGeom>
+          <a:noFill/>
+        </p:spPr>
+        <p:txBody>
+          <a:bodyPr wrap="square" anchor="t" lIns="45720" tIns="8000" rIns="45720" bIns="8000"/>
           <a:lstStyle/>
           <a:p>
             <a:pPr algn="l"/>
@@ -7600,22 +8540,22 @@
       </p:sp>
       <p:sp>
         <p:nvSpPr>
-          <p:cNvPr id="61" name="t61"/>
-          <p:cNvSpPr txBox="1"/>
-          <p:nvPr/>
-        </p:nvSpPr>
-        <p:spPr>
-          <a:xfrm>
-            <a:off x="420000" y="3660000"/>
-            <a:ext cx="11300000" cy="420000"/>
-          </a:xfrm>
-          <a:prstGeom prst="rect">
-            <a:avLst/>
-          </a:prstGeom>
-          <a:noFill/>
-        </p:spPr>
-        <p:txBody>
-          <a:bodyPr wrap="square" anchor="t" lIns="45720" tIns="22860" rIns="45720" bIns="22860"/>
+          <p:cNvPr id="61" name="n61"/>
+          <p:cNvSpPr txBox="1"/>
+          <p:nvPr/>
+        </p:nvSpPr>
+        <p:spPr>
+          <a:xfrm>
+            <a:off x="420000" y="3590000"/>
+            <a:ext cx="11300000" cy="330000"/>
+          </a:xfrm>
+          <a:prstGeom prst="rect">
+            <a:avLst/>
+          </a:prstGeom>
+          <a:noFill/>
+        </p:spPr>
+        <p:txBody>
+          <a:bodyPr wrap="square" anchor="t" lIns="45720" tIns="8000" rIns="45720" bIns="8000"/>
           <a:lstStyle/>
           <a:p>
             <a:pPr algn="l"/>
@@ -7633,22 +8573,22 @@
       </p:sp>
       <p:sp>
         <p:nvSpPr>
-          <p:cNvPr id="62" name="t62"/>
-          <p:cNvSpPr txBox="1"/>
-          <p:nvPr/>
-        </p:nvSpPr>
-        <p:spPr>
-          <a:xfrm>
-            <a:off x="420000" y="4120000"/>
-            <a:ext cx="11300000" cy="420000"/>
-          </a:xfrm>
-          <a:prstGeom prst="rect">
-            <a:avLst/>
-          </a:prstGeom>
-          <a:noFill/>
-        </p:spPr>
-        <p:txBody>
-          <a:bodyPr wrap="square" anchor="t" lIns="45720" tIns="22860" rIns="45720" bIns="22860"/>
+          <p:cNvPr id="62" name="n62"/>
+          <p:cNvSpPr txBox="1"/>
+          <p:nvPr/>
+        </p:nvSpPr>
+        <p:spPr>
+          <a:xfrm>
+            <a:off x="420000" y="3980000"/>
+            <a:ext cx="11300000" cy="330000"/>
+          </a:xfrm>
+          <a:prstGeom prst="rect">
+            <a:avLst/>
+          </a:prstGeom>
+          <a:noFill/>
+        </p:spPr>
+        <p:txBody>
+          <a:bodyPr wrap="square" anchor="t" lIns="45720" tIns="8000" rIns="45720" bIns="8000"/>
           <a:lstStyle/>
           <a:p>
             <a:pPr algn="l"/>
@@ -7666,22 +8606,22 @@
       </p:sp>
       <p:sp>
         <p:nvSpPr>
-          <p:cNvPr id="63" name="t63"/>
-          <p:cNvSpPr txBox="1"/>
-          <p:nvPr/>
-        </p:nvSpPr>
-        <p:spPr>
-          <a:xfrm>
-            <a:off x="420000" y="4580000"/>
-            <a:ext cx="11300000" cy="420000"/>
-          </a:xfrm>
-          <a:prstGeom prst="rect">
-            <a:avLst/>
-          </a:prstGeom>
-          <a:noFill/>
-        </p:spPr>
-        <p:txBody>
-          <a:bodyPr wrap="square" anchor="t" lIns="45720" tIns="22860" rIns="45720" bIns="22860"/>
+          <p:cNvPr id="63" name="n63"/>
+          <p:cNvSpPr txBox="1"/>
+          <p:nvPr/>
+        </p:nvSpPr>
+        <p:spPr>
+          <a:xfrm>
+            <a:off x="420000" y="4370000"/>
+            <a:ext cx="11300000" cy="330000"/>
+          </a:xfrm>
+          <a:prstGeom prst="rect">
+            <a:avLst/>
+          </a:prstGeom>
+          <a:noFill/>
+        </p:spPr>
+        <p:txBody>
+          <a:bodyPr wrap="square" anchor="t" lIns="45720" tIns="8000" rIns="45720" bIns="8000"/>
           <a:lstStyle/>
           <a:p>
             <a:pPr algn="l"/>
@@ -7789,7 +8729,7 @@
                 </a:solidFill>
                 <a:latin typeface="Calibri" pitchFamily="34" charset="0"/>
               </a:rPr>
-              <a:t xml:space="preserve">8 / 12</a:t>
+              <a:t xml:space="preserve">8 / 14</a:t>
             </a:r>
           </a:p>
         </p:txBody>
@@ -8345,22 +9285,22 @@
       </p:sp>
       <p:sp>
         <p:nvSpPr>
-          <p:cNvPr id="60" name="t60"/>
+          <p:cNvPr id="60" name="n60"/>
           <p:cNvSpPr txBox="1"/>
           <p:nvPr/>
         </p:nvSpPr>
         <p:spPr>
           <a:xfrm>
             <a:off x="420000" y="3200000"/>
-            <a:ext cx="11300000" cy="420000"/>
-          </a:xfrm>
-          <a:prstGeom prst="rect">
-            <a:avLst/>
-          </a:prstGeom>
-          <a:noFill/>
-        </p:spPr>
-        <p:txBody>
-          <a:bodyPr wrap="square" anchor="t" lIns="45720" tIns="22860" rIns="45720" bIns="22860"/>
+            <a:ext cx="11300000" cy="330000"/>
+          </a:xfrm>
+          <a:prstGeom prst="rect">
+            <a:avLst/>
+          </a:prstGeom>
+          <a:noFill/>
+        </p:spPr>
+        <p:txBody>
+          <a:bodyPr wrap="square" anchor="t" lIns="45720" tIns="8000" rIns="45720" bIns="8000"/>
           <a:lstStyle/>
           <a:p>
             <a:pPr algn="l"/>
@@ -8378,22 +9318,22 @@
       </p:sp>
       <p:sp>
         <p:nvSpPr>
-          <p:cNvPr id="61" name="t61"/>
-          <p:cNvSpPr txBox="1"/>
-          <p:nvPr/>
-        </p:nvSpPr>
-        <p:spPr>
-          <a:xfrm>
-            <a:off x="420000" y="3660000"/>
-            <a:ext cx="11300000" cy="420000"/>
-          </a:xfrm>
-          <a:prstGeom prst="rect">
-            <a:avLst/>
-          </a:prstGeom>
-          <a:noFill/>
-        </p:spPr>
-        <p:txBody>
-          <a:bodyPr wrap="square" anchor="t" lIns="45720" tIns="22860" rIns="45720" bIns="22860"/>
+          <p:cNvPr id="61" name="n61"/>
+          <p:cNvSpPr txBox="1"/>
+          <p:nvPr/>
+        </p:nvSpPr>
+        <p:spPr>
+          <a:xfrm>
+            <a:off x="420000" y="3590000"/>
+            <a:ext cx="11300000" cy="330000"/>
+          </a:xfrm>
+          <a:prstGeom prst="rect">
+            <a:avLst/>
+          </a:prstGeom>
+          <a:noFill/>
+        </p:spPr>
+        <p:txBody>
+          <a:bodyPr wrap="square" anchor="t" lIns="45720" tIns="8000" rIns="45720" bIns="8000"/>
           <a:lstStyle/>
           <a:p>
             <a:pPr algn="l"/>
@@ -8411,22 +9351,22 @@
       </p:sp>
       <p:sp>
         <p:nvSpPr>
-          <p:cNvPr id="62" name="t62"/>
-          <p:cNvSpPr txBox="1"/>
-          <p:nvPr/>
-        </p:nvSpPr>
-        <p:spPr>
-          <a:xfrm>
-            <a:off x="420000" y="4120000"/>
-            <a:ext cx="11300000" cy="420000"/>
-          </a:xfrm>
-          <a:prstGeom prst="rect">
-            <a:avLst/>
-          </a:prstGeom>
-          <a:noFill/>
-        </p:spPr>
-        <p:txBody>
-          <a:bodyPr wrap="square" anchor="t" lIns="45720" tIns="22860" rIns="45720" bIns="22860"/>
+          <p:cNvPr id="62" name="n62"/>
+          <p:cNvSpPr txBox="1"/>
+          <p:nvPr/>
+        </p:nvSpPr>
+        <p:spPr>
+          <a:xfrm>
+            <a:off x="420000" y="3980000"/>
+            <a:ext cx="11300000" cy="330000"/>
+          </a:xfrm>
+          <a:prstGeom prst="rect">
+            <a:avLst/>
+          </a:prstGeom>
+          <a:noFill/>
+        </p:spPr>
+        <p:txBody>
+          <a:bodyPr wrap="square" anchor="t" lIns="45720" tIns="8000" rIns="45720" bIns="8000"/>
           <a:lstStyle/>
           <a:p>
             <a:pPr algn="l"/>
@@ -8444,22 +9384,22 @@
       </p:sp>
       <p:sp>
         <p:nvSpPr>
-          <p:cNvPr id="63" name="t63"/>
-          <p:cNvSpPr txBox="1"/>
-          <p:nvPr/>
-        </p:nvSpPr>
-        <p:spPr>
-          <a:xfrm>
-            <a:off x="420000" y="4580000"/>
-            <a:ext cx="11300000" cy="420000"/>
-          </a:xfrm>
-          <a:prstGeom prst="rect">
-            <a:avLst/>
-          </a:prstGeom>
-          <a:noFill/>
-        </p:spPr>
-        <p:txBody>
-          <a:bodyPr wrap="square" anchor="t" lIns="45720" tIns="22860" rIns="45720" bIns="22860"/>
+          <p:cNvPr id="63" name="n63"/>
+          <p:cNvSpPr txBox="1"/>
+          <p:nvPr/>
+        </p:nvSpPr>
+        <p:spPr>
+          <a:xfrm>
+            <a:off x="420000" y="4370000"/>
+            <a:ext cx="11300000" cy="330000"/>
+          </a:xfrm>
+          <a:prstGeom prst="rect">
+            <a:avLst/>
+          </a:prstGeom>
+          <a:noFill/>
+        </p:spPr>
+        <p:txBody>
+          <a:bodyPr wrap="square" anchor="t" lIns="45720" tIns="8000" rIns="45720" bIns="8000"/>
           <a:lstStyle/>
           <a:p>
             <a:pPr algn="l"/>
@@ -8567,7 +9507,7 @@
                 </a:solidFill>
                 <a:latin typeface="Calibri" pitchFamily="34" charset="0"/>
               </a:rPr>
-              <a:t xml:space="preserve">9 / 12</a:t>
+              <a:t xml:space="preserve">9 / 14</a:t>
             </a:r>
           </a:p>
         </p:txBody>
